--- a/presentacion/Aplica-tu-Seguro-Presentacion-Comercial-v2.pptx
+++ b/presentacion/Aplica-tu-Seguro-Presentacion-Comercial-v2.pptx
@@ -18,8 +18,8 @@
   <p:notesMasterIdLst>
     <p:notesMasterId r:id="rId11"/>
   </p:notesMasterIdLst>
-  <p:sldSz cx="12192000" cy="6858000"/>
-  <p:notesSz cx="6858000" cy="12192000"/>
+  <p:sldSz cx="9144000" cy="12191695"/>
+  <p:notesSz cx="12191695" cy="9144000"/>
   <p:defaultTextStyle>
     <a:lvl1pPr marL="0" algn="l" defTabSz="914400" rtl="0" eaLnBrk="1" latinLnBrk="0" hangingPunct="1">
       <a:defRPr sz="1800" kern="1200">
@@ -1566,6 +1566,13 @@
 <file path=ppt/slides/slide1.xml><?xml version="1.0" encoding="utf-8"?>
 <p:sld xmlns:a="http://schemas.openxmlformats.org/drawingml/2006/main" xmlns:r="http://schemas.openxmlformats.org/officeDocument/2006/relationships" xmlns:p="http://schemas.openxmlformats.org/presentationml/2006/main">
   <p:cSld name="Slide 1">
+    <p:bg>
+      <p:bgPr>
+        <a:solidFill>
+          <a:srgbClr val="16233A"/>
+        </a:solidFill>
+      </p:bgPr>
+    </p:bg>
     <p:spTree>
       <p:nvGrpSpPr>
         <p:cNvPr id="1" name=""/>
@@ -1582,7 +1589,7 @@
       </p:grpSpPr>
       <p:pic>
         <p:nvPicPr>
-          <p:cNvPr id="2" name="Image 0" descr="/home/user/Prototipo-comercial/presentacion/img/torres.png">    </p:cNvPr>
+          <p:cNvPr id="2" name="Image 0" descr="/home/user/Prototipo-comercial/presentacion/img/logo-blanco.png">    </p:cNvPr>
           <p:cNvPicPr>
             <a:picLocks noChangeAspect="1"/>
           </p:cNvPicPr>
@@ -1595,8 +1602,8 @@
         </p:blipFill>
         <p:spPr>
           <a:xfrm>
-            <a:off x="0" y="0"/>
-            <a:ext cx="12191695" cy="6858000"/>
+            <a:off x="777240" y="932688"/>
+            <a:ext cx="402336" cy="426110"/>
           </a:xfrm>
           <a:prstGeom prst="rect">
             <a:avLst/>
@@ -1605,21 +1612,86 @@
       </p:pic>
       <p:sp>
         <p:nvSpPr>
-          <p:cNvPr id="3" name="Shape 0"/>
+          <p:cNvPr id="3" name="Text 0"/>
+          <p:cNvSpPr txBox="1"/>
+          <p:nvPr/>
+        </p:nvSpPr>
+        <p:spPr>
+          <a:xfrm>
+            <a:off x="1344168" y="1014984"/>
+            <a:ext cx="4572000" cy="274320"/>
+          </a:xfrm>
+          <a:prstGeom prst="rect">
+            <a:avLst/>
+          </a:prstGeom>
+          <a:noFill/>
+          <a:ln/>
+        </p:spPr>
+        <p:txBody>
+          <a:bodyPr wrap="square" lIns="0" tIns="0" rIns="0" bIns="0" rtlCol="0" anchor="ctr"/>
+          <a:lstStyle/>
+          <a:p>
+            <a:pPr algn="l" indent="0" marL="0">
+              <a:lnSpc>
+                <a:spcPct val="120000"/>
+              </a:lnSpc>
+              <a:buNone/>
+            </a:pPr>
+            <a:r>
+              <a:rPr lang="en-US" sz="1150" b="1" spc="300" kern="0" dirty="0">
+                <a:solidFill>
+                  <a:srgbClr val="FFFFFF"/>
+                </a:solidFill>
+                <a:latin typeface="Inter" pitchFamily="34" charset="0"/>
+                <a:ea typeface="Inter" pitchFamily="34" charset="-122"/>
+                <a:cs typeface="Inter" pitchFamily="34" charset="-120"/>
+              </a:rPr>
+              <a:t>APLICA TU SEGURO</a:t>
+            </a:r>
+            <a:endParaRPr lang="en-US" sz="1150" dirty="0"/>
+          </a:p>
+        </p:txBody>
+      </p:sp>
+      <p:pic>
+        <p:nvPicPr>
+          <p:cNvPr id="4" name="Image 1" descr="/home/user/Prototipo-comercial/presentacion/img/santiago.jpg">    </p:cNvPr>
+          <p:cNvPicPr>
+            <a:picLocks noChangeAspect="1"/>
+          </p:cNvPicPr>
+          <p:nvPr/>
+        </p:nvPicPr>
+        <p:blipFill>
+          <a:blip r:embed="rId2"/>
+          <a:srcRect l="0" r="0" t="0" b="0"/>
+          <a:stretch/>
+        </p:blipFill>
+        <p:spPr>
+          <a:xfrm>
+            <a:off x="0" y="2148840"/>
+            <a:ext cx="9144000" cy="4389120"/>
+          </a:xfrm>
+          <a:prstGeom prst="rect">
+            <a:avLst/>
+          </a:prstGeom>
+        </p:spPr>
+      </p:pic>
+      <p:sp>
+        <p:nvSpPr>
+          <p:cNvPr id="5" name="Shape 1"/>
           <p:cNvSpPr/>
           <p:nvPr/>
         </p:nvSpPr>
         <p:spPr>
           <a:xfrm>
-            <a:off x="0" y="0"/>
-            <a:ext cx="12191695" cy="6858000"/>
+            <a:off x="0" y="2148840"/>
+            <a:ext cx="9144000" cy="4389120"/>
           </a:xfrm>
           <a:prstGeom prst="rect">
             <a:avLst/>
           </a:prstGeom>
           <a:solidFill>
             <a:srgbClr val="16233A">
-              <a:alpha val="62000"/>
+              <a:alpha val="36000"/>
             </a:srgbClr>
           </a:solidFill>
           <a:ln w="12700">
@@ -1630,58 +1702,35 @@
           </a:ln>
         </p:spPr>
       </p:sp>
-      <p:pic>
-        <p:nvPicPr>
-          <p:cNvPr id="4" name="Image 1" descr="/home/user/Prototipo-comercial/presentacion/img/logo-blanco.png">    </p:cNvPr>
-          <p:cNvPicPr>
-            <a:picLocks noChangeAspect="1"/>
-          </p:cNvPicPr>
-          <p:nvPr/>
-        </p:nvPicPr>
-        <p:blipFill>
-          <a:blip r:embed="rId2"/>
-          <a:srcRect l="0" r="0" t="0" b="0"/>
-          <a:stretch/>
-        </p:blipFill>
-        <p:spPr>
-          <a:xfrm>
-            <a:off x="777240" y="603504"/>
-            <a:ext cx="402336" cy="426110"/>
-          </a:xfrm>
-          <a:prstGeom prst="rect">
-            <a:avLst/>
-          </a:prstGeom>
-        </p:spPr>
-      </p:pic>
-      <p:sp>
-        <p:nvSpPr>
-          <p:cNvPr id="5" name="Text 1"/>
-          <p:cNvSpPr txBox="1"/>
-          <p:nvPr/>
-        </p:nvSpPr>
-        <p:spPr>
-          <a:xfrm>
-            <a:off x="1344168" y="685800"/>
-            <a:ext cx="3657600" cy="274320"/>
-          </a:xfrm>
-          <a:prstGeom prst="rect">
-            <a:avLst/>
-          </a:prstGeom>
-          <a:noFill/>
-          <a:ln/>
-        </p:spPr>
-        <p:txBody>
-          <a:bodyPr wrap="square" lIns="0" tIns="0" rIns="0" bIns="0" rtlCol="0" anchor="ctr"/>
-          <a:lstStyle/>
-          <a:p>
-            <a:pPr algn="l" indent="0" marL="0">
-              <a:lnSpc>
-                <a:spcPct val="120000"/>
-              </a:lnSpc>
-              <a:buNone/>
-            </a:pPr>
-            <a:r>
-              <a:rPr lang="en-US" sz="1150" b="1" spc="300" kern="0" dirty="0">
+      <p:sp>
+        <p:nvSpPr>
+          <p:cNvPr id="6" name="Text 2"/>
+          <p:cNvSpPr txBox="1"/>
+          <p:nvPr/>
+        </p:nvSpPr>
+        <p:spPr>
+          <a:xfrm>
+            <a:off x="777240" y="7543800"/>
+            <a:ext cx="7589520" cy="2011680"/>
+          </a:xfrm>
+          <a:prstGeom prst="rect">
+            <a:avLst/>
+          </a:prstGeom>
+          <a:noFill/>
+          <a:ln/>
+        </p:spPr>
+        <p:txBody>
+          <a:bodyPr wrap="square" lIns="0" tIns="0" rIns="0" bIns="0" rtlCol="0" anchor="t"/>
+          <a:lstStyle/>
+          <a:p>
+            <a:pPr algn="l" indent="0" marL="0">
+              <a:lnSpc>
+                <a:spcPct val="110000"/>
+              </a:lnSpc>
+              <a:buNone/>
+            </a:pPr>
+            <a:r>
+              <a:rPr lang="en-US" sz="3200" b="1" dirty="0">
                 <a:solidFill>
                   <a:srgbClr val="FFFFFF"/>
                 </a:solidFill>
@@ -1689,41 +1738,19 @@
                 <a:ea typeface="Inter" pitchFamily="34" charset="-122"/>
                 <a:cs typeface="Inter" pitchFamily="34" charset="-120"/>
               </a:rPr>
-              <a:t>APLICA TU SEGURO</a:t>
-            </a:r>
-            <a:endParaRPr lang="en-US" sz="1150" dirty="0"/>
-          </a:p>
-        </p:txBody>
-      </p:sp>
-      <p:sp>
-        <p:nvSpPr>
-          <p:cNvPr id="6" name="Text 2"/>
-          <p:cNvSpPr txBox="1"/>
-          <p:nvPr/>
-        </p:nvSpPr>
-        <p:spPr>
-          <a:xfrm>
-            <a:off x="777240" y="2286000"/>
-            <a:ext cx="9509760" cy="1828800"/>
-          </a:xfrm>
-          <a:prstGeom prst="rect">
-            <a:avLst/>
-          </a:prstGeom>
-          <a:noFill/>
-          <a:ln/>
-        </p:spPr>
-        <p:txBody>
-          <a:bodyPr wrap="square" lIns="0" tIns="0" rIns="0" bIns="0" rtlCol="0" anchor="t"/>
-          <a:lstStyle/>
-          <a:p>
-            <a:pPr algn="l" indent="0" marL="0">
-              <a:lnSpc>
-                <a:spcPct val="108000"/>
-              </a:lnSpc>
-              <a:buNone/>
-            </a:pPr>
-            <a:r>
-              <a:rPr lang="en-US" sz="4000" b="1" dirty="0">
+              <a:t>Todas tus coberturas de salud.</a:t>
+            </a:r>
+            <a:endParaRPr lang="en-US" sz="3200" dirty="0"/>
+          </a:p>
+          <a:p>
+            <a:pPr algn="l" indent="0" marL="0">
+              <a:lnSpc>
+                <a:spcPct val="110000"/>
+              </a:lnSpc>
+              <a:buNone/>
+            </a:pPr>
+            <a:r>
+              <a:rPr lang="en-US" sz="3200" b="1" dirty="0">
                 <a:solidFill>
                   <a:srgbClr val="FFFFFF"/>
                 </a:solidFill>
@@ -1731,42 +1758,47 @@
                 <a:ea typeface="Inter" pitchFamily="34" charset="-122"/>
                 <a:cs typeface="Inter" pitchFamily="34" charset="-120"/>
               </a:rPr>
-              <a:t>Todas tus coberturas de salud.</a:t>
-            </a:r>
-            <a:endParaRPr lang="en-US" sz="4000" dirty="0"/>
-          </a:p>
-          <a:p>
-            <a:pPr algn="l" indent="0" marL="0">
-              <a:lnSpc>
-                <a:spcPct val="108000"/>
-              </a:lnSpc>
-              <a:buNone/>
-            </a:pPr>
-            <a:r>
-              <a:rPr lang="en-US" sz="4000" b="1" dirty="0">
-                <a:solidFill>
-                  <a:srgbClr val="FFFFFF"/>
-                </a:solidFill>
-                <a:latin typeface="Inter" pitchFamily="34" charset="0"/>
-                <a:ea typeface="Inter" pitchFamily="34" charset="-122"/>
-                <a:cs typeface="Inter" pitchFamily="34" charset="-120"/>
-              </a:rPr>
               <a:t>Finalmente trabajando juntas.</a:t>
             </a:r>
-            <a:endParaRPr lang="en-US" sz="4000" dirty="0"/>
-          </a:p>
-        </p:txBody>
-      </p:sp>
-      <p:sp>
-        <p:nvSpPr>
-          <p:cNvPr id="7" name="Text 3"/>
-          <p:cNvSpPr txBox="1"/>
-          <p:nvPr/>
-        </p:nvSpPr>
-        <p:spPr>
-          <a:xfrm>
-            <a:off x="777240" y="4297680"/>
-            <a:ext cx="8138160" cy="822960"/>
+            <a:endParaRPr lang="en-US" sz="3200" dirty="0"/>
+          </a:p>
+        </p:txBody>
+      </p:sp>
+      <p:sp>
+        <p:nvSpPr>
+          <p:cNvPr id="7" name="Shape 3"/>
+          <p:cNvSpPr/>
+          <p:nvPr/>
+        </p:nvSpPr>
+        <p:spPr>
+          <a:xfrm>
+            <a:off x="777240" y="8961120"/>
+            <a:ext cx="1188720" cy="45720"/>
+          </a:xfrm>
+          <a:prstGeom prst="rect">
+            <a:avLst/>
+          </a:prstGeom>
+          <a:solidFill>
+            <a:srgbClr val="2F6FED"/>
+          </a:solidFill>
+          <a:ln w="12700">
+            <a:solidFill>
+              <a:srgbClr val="333333"/>
+            </a:solidFill>
+            <a:prstDash val="solid"/>
+          </a:ln>
+        </p:spPr>
+      </p:sp>
+      <p:sp>
+        <p:nvSpPr>
+          <p:cNvPr id="8" name="Text 4"/>
+          <p:cNvSpPr txBox="1"/>
+          <p:nvPr/>
+        </p:nvSpPr>
+        <p:spPr>
+          <a:xfrm>
+            <a:off x="777240" y="9372600"/>
+            <a:ext cx="7223760" cy="1188720"/>
           </a:xfrm>
           <a:prstGeom prst="rect">
             <a:avLst/>
@@ -1785,7 +1817,7 @@
               <a:buNone/>
             </a:pPr>
             <a:r>
-              <a:rPr lang="en-US" sz="1600" dirty="0">
+              <a:rPr lang="en-US" sz="1450" dirty="0">
                 <a:solidFill>
                   <a:srgbClr val="C8D8F0"/>
                 </a:solidFill>
@@ -1795,19 +1827,19 @@
               </a:rPr>
               <a:t>Una forma de ayudar a los colaboradores y sus familias a entender y aprovechar mejor los beneficios de salud que la empresa ya financia.</a:t>
             </a:r>
-            <a:endParaRPr lang="en-US" sz="1600" dirty="0"/>
-          </a:p>
-        </p:txBody>
-      </p:sp>
-      <p:sp>
-        <p:nvSpPr>
-          <p:cNvPr id="8" name="Text 4"/>
-          <p:cNvSpPr txBox="1"/>
-          <p:nvPr/>
-        </p:nvSpPr>
-        <p:spPr>
-          <a:xfrm>
-            <a:off x="777240" y="5870448"/>
+            <a:endParaRPr lang="en-US" sz="1450" dirty="0"/>
+          </a:p>
+        </p:txBody>
+      </p:sp>
+      <p:sp>
+        <p:nvSpPr>
+          <p:cNvPr id="9" name="Text 5"/>
+          <p:cNvSpPr txBox="1"/>
+          <p:nvPr/>
+        </p:nvSpPr>
+        <p:spPr>
+          <a:xfrm>
+            <a:off x="777240" y="11247120"/>
             <a:ext cx="6400800" cy="274320"/>
           </a:xfrm>
           <a:prstGeom prst="rect">
@@ -1873,9 +1905,113 @@
           <a:chExt cx="0" cy="0"/>
         </a:xfrm>
       </p:grpSpPr>
+      <p:sp>
+        <p:nvSpPr>
+          <p:cNvPr id="2" name="Text 0"/>
+          <p:cNvSpPr txBox="1"/>
+          <p:nvPr/>
+        </p:nvSpPr>
+        <p:spPr>
+          <a:xfrm>
+            <a:off x="777240" y="841248"/>
+            <a:ext cx="7589520" cy="237744"/>
+          </a:xfrm>
+          <a:prstGeom prst="rect">
+            <a:avLst/>
+          </a:prstGeom>
+          <a:noFill/>
+          <a:ln/>
+        </p:spPr>
+        <p:txBody>
+          <a:bodyPr wrap="square" lIns="0" tIns="0" rIns="0" bIns="0" rtlCol="0" anchor="t"/>
+          <a:lstStyle/>
+          <a:p>
+            <a:pPr algn="l" indent="0" marL="0">
+              <a:lnSpc>
+                <a:spcPct val="120000"/>
+              </a:lnSpc>
+              <a:buNone/>
+            </a:pPr>
+            <a:r>
+              <a:rPr lang="en-US" sz="1050" b="1" spc="240" kern="0" dirty="0">
+                <a:solidFill>
+                  <a:srgbClr val="6B7686"/>
+                </a:solidFill>
+                <a:latin typeface="Inter" pitchFamily="34" charset="0"/>
+                <a:ea typeface="Inter" pitchFamily="34" charset="-122"/>
+                <a:cs typeface="Inter" pitchFamily="34" charset="-120"/>
+              </a:rPr>
+              <a:t>EL PROBLEMA · CASO FICTICIO</a:t>
+            </a:r>
+            <a:endParaRPr lang="en-US" sz="1050" dirty="0"/>
+          </a:p>
+        </p:txBody>
+      </p:sp>
+      <p:sp>
+        <p:nvSpPr>
+          <p:cNvPr id="3" name="Text 1"/>
+          <p:cNvSpPr txBox="1"/>
+          <p:nvPr/>
+        </p:nvSpPr>
+        <p:spPr>
+          <a:xfrm>
+            <a:off x="777240" y="1243584"/>
+            <a:ext cx="7589520" cy="1828800"/>
+          </a:xfrm>
+          <a:prstGeom prst="rect">
+            <a:avLst/>
+          </a:prstGeom>
+          <a:noFill/>
+          <a:ln/>
+        </p:spPr>
+        <p:txBody>
+          <a:bodyPr wrap="square" lIns="0" tIns="0" rIns="0" bIns="0" rtlCol="0" anchor="t"/>
+          <a:lstStyle/>
+          <a:p>
+            <a:pPr algn="l" indent="0" marL="0">
+              <a:lnSpc>
+                <a:spcPct val="110000"/>
+              </a:lnSpc>
+              <a:buNone/>
+            </a:pPr>
+            <a:r>
+              <a:rPr lang="en-US" sz="2600" b="1" dirty="0">
+                <a:solidFill>
+                  <a:srgbClr val="0F172A"/>
+                </a:solidFill>
+                <a:latin typeface="Inter" pitchFamily="34" charset="0"/>
+                <a:ea typeface="Inter" pitchFamily="34" charset="-122"/>
+                <a:cs typeface="Inter" pitchFamily="34" charset="-120"/>
+              </a:rPr>
+              <a:t>María y su familia tienen cuatro</a:t>
+            </a:r>
+            <a:endParaRPr lang="en-US" sz="2600" dirty="0"/>
+          </a:p>
+          <a:p>
+            <a:pPr algn="l" indent="0" marL="0">
+              <a:lnSpc>
+                <a:spcPct val="110000"/>
+              </a:lnSpc>
+              <a:buNone/>
+            </a:pPr>
+            <a:r>
+              <a:rPr lang="en-US" sz="2600" b="1" dirty="0">
+                <a:solidFill>
+                  <a:srgbClr val="0F172A"/>
+                </a:solidFill>
+                <a:latin typeface="Inter" pitchFamily="34" charset="0"/>
+                <a:ea typeface="Inter" pitchFamily="34" charset="-122"/>
+                <a:cs typeface="Inter" pitchFamily="34" charset="-120"/>
+              </a:rPr>
+              <a:t>coberturas de salud activas.</a:t>
+            </a:r>
+            <a:endParaRPr lang="en-US" sz="2600" dirty="0"/>
+          </a:p>
+        </p:txBody>
+      </p:sp>
       <p:pic>
         <p:nvPicPr>
-          <p:cNvPr id="2" name="Image 0" descr="/home/user/Prototipo-comercial/presentacion/img/atacama.png">    </p:cNvPr>
+          <p:cNvPr id="4" name="Image 0" descr="/home/user/Prototipo-comercial/presentacion/img/atacama.jpg">    </p:cNvPr>
           <p:cNvPicPr>
             <a:picLocks noChangeAspect="1"/>
           </p:cNvPicPr>
@@ -1888,8 +2024,8 @@
         </p:blipFill>
         <p:spPr>
           <a:xfrm>
-            <a:off x="7635240" y="0"/>
-            <a:ext cx="4556455" cy="6858000"/>
+            <a:off x="0" y="2880360"/>
+            <a:ext cx="9144000" cy="2743200"/>
           </a:xfrm>
           <a:prstGeom prst="rect">
             <a:avLst/>
@@ -1898,14 +2034,41 @@
       </p:pic>
       <p:sp>
         <p:nvSpPr>
-          <p:cNvPr id="3" name="Text 0"/>
-          <p:cNvSpPr txBox="1"/>
-          <p:nvPr/>
-        </p:nvSpPr>
-        <p:spPr>
-          <a:xfrm>
-            <a:off x="777240" y="713232"/>
-            <a:ext cx="6400800" cy="237744"/>
+          <p:cNvPr id="5" name="Shape 2"/>
+          <p:cNvSpPr/>
+          <p:nvPr/>
+        </p:nvSpPr>
+        <p:spPr>
+          <a:xfrm>
+            <a:off x="0" y="2880360"/>
+            <a:ext cx="9144000" cy="2743200"/>
+          </a:xfrm>
+          <a:prstGeom prst="rect">
+            <a:avLst/>
+          </a:prstGeom>
+          <a:solidFill>
+            <a:srgbClr val="FFFFFF">
+              <a:alpha val="22000"/>
+            </a:srgbClr>
+          </a:solidFill>
+          <a:ln w="12700">
+            <a:solidFill>
+              <a:srgbClr val="333333"/>
+            </a:solidFill>
+            <a:prstDash val="solid"/>
+          </a:ln>
+        </p:spPr>
+      </p:sp>
+      <p:sp>
+        <p:nvSpPr>
+          <p:cNvPr id="6" name="Text 3"/>
+          <p:cNvSpPr txBox="1"/>
+          <p:nvPr/>
+        </p:nvSpPr>
+        <p:spPr>
+          <a:xfrm>
+            <a:off x="777240" y="6172200"/>
+            <a:ext cx="7589520" cy="365760"/>
           </a:xfrm>
           <a:prstGeom prst="rect">
             <a:avLst/>
@@ -1924,49 +2087,7 @@
               <a:buNone/>
             </a:pPr>
             <a:r>
-              <a:rPr lang="en-US" sz="1050" b="1" spc="240" kern="0" dirty="0">
-                <a:solidFill>
-                  <a:srgbClr val="6B7686"/>
-                </a:solidFill>
-                <a:latin typeface="Inter" pitchFamily="34" charset="0"/>
-                <a:ea typeface="Inter" pitchFamily="34" charset="-122"/>
-                <a:cs typeface="Inter" pitchFamily="34" charset="-120"/>
-              </a:rPr>
-              <a:t>EL PROBLEMA · CASO FICTICIO</a:t>
-            </a:r>
-            <a:endParaRPr lang="en-US" sz="1050" dirty="0"/>
-          </a:p>
-        </p:txBody>
-      </p:sp>
-      <p:sp>
-        <p:nvSpPr>
-          <p:cNvPr id="4" name="Text 1"/>
-          <p:cNvSpPr txBox="1"/>
-          <p:nvPr/>
-        </p:nvSpPr>
-        <p:spPr>
-          <a:xfrm>
-            <a:off x="777240" y="1078992"/>
-            <a:ext cx="6583680" cy="1554480"/>
-          </a:xfrm>
-          <a:prstGeom prst="rect">
-            <a:avLst/>
-          </a:prstGeom>
-          <a:noFill/>
-          <a:ln/>
-        </p:spPr>
-        <p:txBody>
-          <a:bodyPr wrap="square" lIns="0" tIns="0" rIns="0" bIns="0" rtlCol="0" anchor="t"/>
-          <a:lstStyle/>
-          <a:p>
-            <a:pPr algn="l" indent="0" marL="0">
-              <a:lnSpc>
-                <a:spcPct val="108000"/>
-              </a:lnSpc>
-              <a:buNone/>
-            </a:pPr>
-            <a:r>
-              <a:rPr lang="en-US" sz="2700" b="1" dirty="0">
+              <a:rPr lang="en-US" sz="1500" b="1" dirty="0">
                 <a:solidFill>
                   <a:srgbClr val="0F172A"/>
                 </a:solidFill>
@@ -1974,48 +2095,6 @@
                 <a:ea typeface="Inter" pitchFamily="34" charset="-122"/>
                 <a:cs typeface="Inter" pitchFamily="34" charset="-120"/>
               </a:rPr>
-              <a:t>María y su familia tienen cuatro coberturas de salud activas.</a:t>
-            </a:r>
-            <a:endParaRPr lang="en-US" sz="2700" dirty="0"/>
-          </a:p>
-        </p:txBody>
-      </p:sp>
-      <p:sp>
-        <p:nvSpPr>
-          <p:cNvPr id="5" name="Text 2"/>
-          <p:cNvSpPr txBox="1"/>
-          <p:nvPr/>
-        </p:nvSpPr>
-        <p:spPr>
-          <a:xfrm>
-            <a:off x="777240" y="2798064"/>
-            <a:ext cx="6309360" cy="365760"/>
-          </a:xfrm>
-          <a:prstGeom prst="rect">
-            <a:avLst/>
-          </a:prstGeom>
-          <a:noFill/>
-          <a:ln/>
-        </p:spPr>
-        <p:txBody>
-          <a:bodyPr wrap="square" lIns="0" tIns="0" rIns="0" bIns="0" rtlCol="0" anchor="t"/>
-          <a:lstStyle/>
-          <a:p>
-            <a:pPr algn="l" indent="0" marL="0">
-              <a:lnSpc>
-                <a:spcPct val="120000"/>
-              </a:lnSpc>
-              <a:buNone/>
-            </a:pPr>
-            <a:r>
-              <a:rPr lang="en-US" sz="1500" b="1" dirty="0">
-                <a:solidFill>
-                  <a:srgbClr val="0F172A"/>
-                </a:solidFill>
-                <a:latin typeface="Inter" pitchFamily="34" charset="0"/>
-                <a:ea typeface="Inter" pitchFamily="34" charset="-122"/>
-                <a:cs typeface="Inter" pitchFamily="34" charset="-120"/>
-              </a:rPr>
               <a:t>Cada una tiene condiciones, topes y procesos diferentes.</a:t>
             </a:r>
             <a:endParaRPr lang="en-US" sz="1500" dirty="0"/>
@@ -2024,13 +2103,13 @@
       </p:sp>
       <p:sp>
         <p:nvSpPr>
-          <p:cNvPr id="6" name="Shape 3"/>
+          <p:cNvPr id="7" name="Shape 4"/>
           <p:cNvSpPr/>
           <p:nvPr/>
         </p:nvSpPr>
         <p:spPr>
           <a:xfrm>
-            <a:off x="777240" y="3493008"/>
+            <a:off x="777240" y="6995160"/>
             <a:ext cx="310896" cy="310896"/>
           </a:xfrm>
           <a:prstGeom prst="ellipse">
@@ -2049,13 +2128,13 @@
       </p:sp>
       <p:sp>
         <p:nvSpPr>
-          <p:cNvPr id="7" name="Text 4"/>
-          <p:cNvSpPr txBox="1"/>
-          <p:nvPr/>
-        </p:nvSpPr>
-        <p:spPr>
-          <a:xfrm>
-            <a:off x="777240" y="3493008"/>
+          <p:cNvPr id="8" name="Text 5"/>
+          <p:cNvSpPr txBox="1"/>
+          <p:nvPr/>
+        </p:nvSpPr>
+        <p:spPr>
+          <a:xfrm>
+            <a:off x="777240" y="6995160"/>
             <a:ext cx="310896" cy="310896"/>
           </a:xfrm>
           <a:prstGeom prst="rect">
@@ -2091,14 +2170,14 @@
       </p:sp>
       <p:sp>
         <p:nvSpPr>
-          <p:cNvPr id="8" name="Text 5"/>
-          <p:cNvSpPr txBox="1"/>
-          <p:nvPr/>
-        </p:nvSpPr>
-        <p:spPr>
-          <a:xfrm>
-            <a:off x="1252728" y="3456432"/>
-            <a:ext cx="5943600" cy="292608"/>
+          <p:cNvPr id="9" name="Text 6"/>
+          <p:cNvSpPr txBox="1"/>
+          <p:nvPr/>
+        </p:nvSpPr>
+        <p:spPr>
+          <a:xfrm>
+            <a:off x="1289304" y="6967728"/>
+            <a:ext cx="6583680" cy="310896"/>
           </a:xfrm>
           <a:prstGeom prst="rect">
             <a:avLst/>
@@ -2117,7 +2196,7 @@
               <a:buNone/>
             </a:pPr>
             <a:r>
-              <a:rPr lang="en-US" sz="1400" b="1" dirty="0">
+              <a:rPr lang="en-US" sz="1450" b="1" dirty="0">
                 <a:solidFill>
                   <a:srgbClr val="0F172A"/>
                 </a:solidFill>
@@ -2127,39 +2206,39 @@
               </a:rPr>
               <a:t>No sabe cómo se coordinan sus coberturas</a:t>
             </a:r>
-            <a:endParaRPr lang="en-US" sz="1400" dirty="0"/>
-          </a:p>
-        </p:txBody>
-      </p:sp>
-      <p:sp>
-        <p:nvSpPr>
-          <p:cNvPr id="9" name="Text 6"/>
-          <p:cNvSpPr txBox="1"/>
-          <p:nvPr/>
-        </p:nvSpPr>
-        <p:spPr>
-          <a:xfrm>
-            <a:off x="1252728" y="3767328"/>
-            <a:ext cx="5943600" cy="402336"/>
-          </a:xfrm>
-          <a:prstGeom prst="rect">
-            <a:avLst/>
-          </a:prstGeom>
-          <a:noFill/>
-          <a:ln/>
-        </p:spPr>
-        <p:txBody>
-          <a:bodyPr wrap="square" lIns="0" tIns="0" rIns="0" bIns="0" rtlCol="0" anchor="t"/>
-          <a:lstStyle/>
-          <a:p>
-            <a:pPr algn="l" indent="0" marL="0">
-              <a:lnSpc>
-                <a:spcPct val="124000"/>
-              </a:lnSpc>
-              <a:buNone/>
-            </a:pPr>
-            <a:r>
-              <a:rPr lang="en-US" sz="1150" dirty="0">
+            <a:endParaRPr lang="en-US" sz="1450" dirty="0"/>
+          </a:p>
+        </p:txBody>
+      </p:sp>
+      <p:sp>
+        <p:nvSpPr>
+          <p:cNvPr id="10" name="Text 7"/>
+          <p:cNvSpPr txBox="1"/>
+          <p:nvPr/>
+        </p:nvSpPr>
+        <p:spPr>
+          <a:xfrm>
+            <a:off x="1289304" y="7324344"/>
+            <a:ext cx="6583680" cy="457200"/>
+          </a:xfrm>
+          <a:prstGeom prst="rect">
+            <a:avLst/>
+          </a:prstGeom>
+          <a:noFill/>
+          <a:ln/>
+        </p:spPr>
+        <p:txBody>
+          <a:bodyPr wrap="square" lIns="0" tIns="0" rIns="0" bIns="0" rtlCol="0" anchor="t"/>
+          <a:lstStyle/>
+          <a:p>
+            <a:pPr algn="l" indent="0" marL="0">
+              <a:lnSpc>
+                <a:spcPct val="126000"/>
+              </a:lnSpc>
+              <a:buNone/>
+            </a:pPr>
+            <a:r>
+              <a:rPr lang="en-US" sz="1200" dirty="0">
                 <a:solidFill>
                   <a:srgbClr val="6B7686"/>
                 </a:solidFill>
@@ -2169,19 +2248,19 @@
               </a:rPr>
               <a:t>Cada póliza tiene sus propias condiciones y su propio proceso.</a:t>
             </a:r>
-            <a:endParaRPr lang="en-US" sz="1150" dirty="0"/>
-          </a:p>
-        </p:txBody>
-      </p:sp>
-      <p:sp>
-        <p:nvSpPr>
-          <p:cNvPr id="10" name="Shape 7"/>
+            <a:endParaRPr lang="en-US" sz="1200" dirty="0"/>
+          </a:p>
+        </p:txBody>
+      </p:sp>
+      <p:sp>
+        <p:nvSpPr>
+          <p:cNvPr id="11" name="Shape 8"/>
           <p:cNvSpPr/>
           <p:nvPr/>
         </p:nvSpPr>
         <p:spPr>
           <a:xfrm>
-            <a:off x="777240" y="4334256"/>
+            <a:off x="777240" y="8321040"/>
             <a:ext cx="310896" cy="310896"/>
           </a:xfrm>
           <a:prstGeom prst="ellipse">
@@ -2200,13 +2279,13 @@
       </p:sp>
       <p:sp>
         <p:nvSpPr>
-          <p:cNvPr id="11" name="Text 8"/>
-          <p:cNvSpPr txBox="1"/>
-          <p:nvPr/>
-        </p:nvSpPr>
-        <p:spPr>
-          <a:xfrm>
-            <a:off x="777240" y="4334256"/>
+          <p:cNvPr id="12" name="Text 9"/>
+          <p:cNvSpPr txBox="1"/>
+          <p:nvPr/>
+        </p:nvSpPr>
+        <p:spPr>
+          <a:xfrm>
+            <a:off x="777240" y="8321040"/>
             <a:ext cx="310896" cy="310896"/>
           </a:xfrm>
           <a:prstGeom prst="rect">
@@ -2242,14 +2321,14 @@
       </p:sp>
       <p:sp>
         <p:nvSpPr>
-          <p:cNvPr id="12" name="Text 9"/>
-          <p:cNvSpPr txBox="1"/>
-          <p:nvPr/>
-        </p:nvSpPr>
-        <p:spPr>
-          <a:xfrm>
-            <a:off x="1252728" y="4297680"/>
-            <a:ext cx="5943600" cy="292608"/>
+          <p:cNvPr id="13" name="Text 10"/>
+          <p:cNvSpPr txBox="1"/>
+          <p:nvPr/>
+        </p:nvSpPr>
+        <p:spPr>
+          <a:xfrm>
+            <a:off x="1289304" y="8293608"/>
+            <a:ext cx="6583680" cy="310896"/>
           </a:xfrm>
           <a:prstGeom prst="rect">
             <a:avLst/>
@@ -2268,7 +2347,7 @@
               <a:buNone/>
             </a:pPr>
             <a:r>
-              <a:rPr lang="en-US" sz="1400" b="1" dirty="0">
+              <a:rPr lang="en-US" sz="1450" b="1" dirty="0">
                 <a:solidFill>
                   <a:srgbClr val="0F172A"/>
                 </a:solidFill>
@@ -2278,39 +2357,39 @@
               </a:rPr>
               <a:t>No sabe cuánto podría pagar antes de atenderse</a:t>
             </a:r>
-            <a:endParaRPr lang="en-US" sz="1400" dirty="0"/>
-          </a:p>
-        </p:txBody>
-      </p:sp>
-      <p:sp>
-        <p:nvSpPr>
-          <p:cNvPr id="13" name="Text 10"/>
-          <p:cNvSpPr txBox="1"/>
-          <p:nvPr/>
-        </p:nvSpPr>
-        <p:spPr>
-          <a:xfrm>
-            <a:off x="1252728" y="4608576"/>
-            <a:ext cx="5943600" cy="402336"/>
-          </a:xfrm>
-          <a:prstGeom prst="rect">
-            <a:avLst/>
-          </a:prstGeom>
-          <a:noFill/>
-          <a:ln/>
-        </p:spPr>
-        <p:txBody>
-          <a:bodyPr wrap="square" lIns="0" tIns="0" rIns="0" bIns="0" rtlCol="0" anchor="t"/>
-          <a:lstStyle/>
-          <a:p>
-            <a:pPr algn="l" indent="0" marL="0">
-              <a:lnSpc>
-                <a:spcPct val="124000"/>
-              </a:lnSpc>
-              <a:buNone/>
-            </a:pPr>
-            <a:r>
-              <a:rPr lang="en-US" sz="1150" dirty="0">
+            <a:endParaRPr lang="en-US" sz="1450" dirty="0"/>
+          </a:p>
+        </p:txBody>
+      </p:sp>
+      <p:sp>
+        <p:nvSpPr>
+          <p:cNvPr id="14" name="Text 11"/>
+          <p:cNvSpPr txBox="1"/>
+          <p:nvPr/>
+        </p:nvSpPr>
+        <p:spPr>
+          <a:xfrm>
+            <a:off x="1289304" y="8650224"/>
+            <a:ext cx="6583680" cy="457200"/>
+          </a:xfrm>
+          <a:prstGeom prst="rect">
+            <a:avLst/>
+          </a:prstGeom>
+          <a:noFill/>
+          <a:ln/>
+        </p:spPr>
+        <p:txBody>
+          <a:bodyPr wrap="square" lIns="0" tIns="0" rIns="0" bIns="0" rtlCol="0" anchor="t"/>
+          <a:lstStyle/>
+          <a:p>
+            <a:pPr algn="l" indent="0" marL="0">
+              <a:lnSpc>
+                <a:spcPct val="126000"/>
+              </a:lnSpc>
+              <a:buNone/>
+            </a:pPr>
+            <a:r>
+              <a:rPr lang="en-US" sz="1200" dirty="0">
                 <a:solidFill>
                   <a:srgbClr val="6B7686"/>
                 </a:solidFill>
@@ -2320,19 +2399,19 @@
               </a:rPr>
               <a:t>El monto a pagar aparece recién al momento de la atención.</a:t>
             </a:r>
-            <a:endParaRPr lang="en-US" sz="1150" dirty="0"/>
-          </a:p>
-        </p:txBody>
-      </p:sp>
-      <p:sp>
-        <p:nvSpPr>
-          <p:cNvPr id="14" name="Shape 11"/>
+            <a:endParaRPr lang="en-US" sz="1200" dirty="0"/>
+          </a:p>
+        </p:txBody>
+      </p:sp>
+      <p:sp>
+        <p:nvSpPr>
+          <p:cNvPr id="15" name="Shape 12"/>
           <p:cNvSpPr/>
           <p:nvPr/>
         </p:nvSpPr>
         <p:spPr>
           <a:xfrm>
-            <a:off x="777240" y="5175504"/>
+            <a:off x="777240" y="9646920"/>
             <a:ext cx="310896" cy="310896"/>
           </a:xfrm>
           <a:prstGeom prst="ellipse">
@@ -2351,13 +2430,13 @@
       </p:sp>
       <p:sp>
         <p:nvSpPr>
-          <p:cNvPr id="15" name="Text 12"/>
-          <p:cNvSpPr txBox="1"/>
-          <p:nvPr/>
-        </p:nvSpPr>
-        <p:spPr>
-          <a:xfrm>
-            <a:off x="777240" y="5175504"/>
+          <p:cNvPr id="16" name="Text 13"/>
+          <p:cNvSpPr txBox="1"/>
+          <p:nvPr/>
+        </p:nvSpPr>
+        <p:spPr>
+          <a:xfrm>
+            <a:off x="777240" y="9646920"/>
             <a:ext cx="310896" cy="310896"/>
           </a:xfrm>
           <a:prstGeom prst="rect">
@@ -2393,14 +2472,14 @@
       </p:sp>
       <p:sp>
         <p:nvSpPr>
-          <p:cNvPr id="16" name="Text 13"/>
-          <p:cNvSpPr txBox="1"/>
-          <p:nvPr/>
-        </p:nvSpPr>
-        <p:spPr>
-          <a:xfrm>
-            <a:off x="1252728" y="5138928"/>
-            <a:ext cx="5943600" cy="292608"/>
+          <p:cNvPr id="17" name="Text 14"/>
+          <p:cNvSpPr txBox="1"/>
+          <p:nvPr/>
+        </p:nvSpPr>
+        <p:spPr>
+          <a:xfrm>
+            <a:off x="1289304" y="9619488"/>
+            <a:ext cx="6583680" cy="310896"/>
           </a:xfrm>
           <a:prstGeom prst="rect">
             <a:avLst/>
@@ -2419,7 +2498,7 @@
               <a:buNone/>
             </a:pPr>
             <a:r>
-              <a:rPr lang="en-US" sz="1400" b="1" dirty="0">
+              <a:rPr lang="en-US" sz="1450" b="1" dirty="0">
                 <a:solidFill>
                   <a:srgbClr val="0F172A"/>
                 </a:solidFill>
@@ -2429,20 +2508,62 @@
               </a:rPr>
               <a:t>Puede dejar vencer beneficios o reembolsos</a:t>
             </a:r>
-            <a:endParaRPr lang="en-US" sz="1400" dirty="0"/>
-          </a:p>
-        </p:txBody>
-      </p:sp>
-      <p:sp>
-        <p:nvSpPr>
-          <p:cNvPr id="17" name="Text 14"/>
-          <p:cNvSpPr txBox="1"/>
-          <p:nvPr/>
-        </p:nvSpPr>
-        <p:spPr>
-          <a:xfrm>
-            <a:off x="1252728" y="5449824"/>
-            <a:ext cx="5943600" cy="402336"/>
+            <a:endParaRPr lang="en-US" sz="1450" dirty="0"/>
+          </a:p>
+        </p:txBody>
+      </p:sp>
+      <p:sp>
+        <p:nvSpPr>
+          <p:cNvPr id="18" name="Text 15"/>
+          <p:cNvSpPr txBox="1"/>
+          <p:nvPr/>
+        </p:nvSpPr>
+        <p:spPr>
+          <a:xfrm>
+            <a:off x="1289304" y="9976104"/>
+            <a:ext cx="6583680" cy="457200"/>
+          </a:xfrm>
+          <a:prstGeom prst="rect">
+            <a:avLst/>
+          </a:prstGeom>
+          <a:noFill/>
+          <a:ln/>
+        </p:spPr>
+        <p:txBody>
+          <a:bodyPr wrap="square" lIns="0" tIns="0" rIns="0" bIns="0" rtlCol="0" anchor="t"/>
+          <a:lstStyle/>
+          <a:p>
+            <a:pPr algn="l" indent="0" marL="0">
+              <a:lnSpc>
+                <a:spcPct val="126000"/>
+              </a:lnSpc>
+              <a:buNone/>
+            </a:pPr>
+            <a:r>
+              <a:rPr lang="en-US" sz="1200" dirty="0">
+                <a:solidFill>
+                  <a:srgbClr val="6B7686"/>
+                </a:solidFill>
+                <a:latin typeface="Inter" pitchFamily="34" charset="0"/>
+                <a:ea typeface="Inter" pitchFamily="34" charset="-122"/>
+                <a:cs typeface="Inter" pitchFamily="34" charset="-120"/>
+              </a:rPr>
+              <a:t>Topes anuales sin usar y solicitudes incompletas que caducan.</a:t>
+            </a:r>
+            <a:endParaRPr lang="en-US" sz="1200" dirty="0"/>
+          </a:p>
+        </p:txBody>
+      </p:sp>
+      <p:sp>
+        <p:nvSpPr>
+          <p:cNvPr id="19" name="Text 16"/>
+          <p:cNvSpPr txBox="1"/>
+          <p:nvPr/>
+        </p:nvSpPr>
+        <p:spPr>
+          <a:xfrm>
+            <a:off x="777240" y="11411712"/>
+            <a:ext cx="7589520" cy="457200"/>
           </a:xfrm>
           <a:prstGeom prst="rect">
             <a:avLst/>
@@ -2457,48 +2578,6 @@
             <a:pPr algn="l" indent="0" marL="0">
               <a:lnSpc>
                 <a:spcPct val="124000"/>
-              </a:lnSpc>
-              <a:buNone/>
-            </a:pPr>
-            <a:r>
-              <a:rPr lang="en-US" sz="1150" dirty="0">
-                <a:solidFill>
-                  <a:srgbClr val="6B7686"/>
-                </a:solidFill>
-                <a:latin typeface="Inter" pitchFamily="34" charset="0"/>
-                <a:ea typeface="Inter" pitchFamily="34" charset="-122"/>
-                <a:cs typeface="Inter" pitchFamily="34" charset="-120"/>
-              </a:rPr>
-              <a:t>Topes anuales sin usar y solicitudes incompletas que caducan.</a:t>
-            </a:r>
-            <a:endParaRPr lang="en-US" sz="1150" dirty="0"/>
-          </a:p>
-        </p:txBody>
-      </p:sp>
-      <p:sp>
-        <p:nvSpPr>
-          <p:cNvPr id="18" name="Text 15"/>
-          <p:cNvSpPr txBox="1"/>
-          <p:nvPr/>
-        </p:nvSpPr>
-        <p:spPr>
-          <a:xfrm>
-            <a:off x="777240" y="6345936"/>
-            <a:ext cx="6492240" cy="310896"/>
-          </a:xfrm>
-          <a:prstGeom prst="rect">
-            <a:avLst/>
-          </a:prstGeom>
-          <a:noFill/>
-          <a:ln/>
-        </p:spPr>
-        <p:txBody>
-          <a:bodyPr wrap="square" lIns="0" tIns="0" rIns="0" bIns="0" rtlCol="0" anchor="t"/>
-          <a:lstStyle/>
-          <a:p>
-            <a:pPr algn="l" indent="0" marL="0">
-              <a:lnSpc>
-                <a:spcPct val="122000"/>
               </a:lnSpc>
               <a:buNone/>
             </a:pPr>
@@ -2557,8 +2636,8 @@
         </p:nvSpPr>
         <p:spPr>
           <a:xfrm>
-            <a:off x="777240" y="713232"/>
-            <a:ext cx="6400800" cy="237744"/>
+            <a:off x="777240" y="841248"/>
+            <a:ext cx="7589520" cy="237744"/>
           </a:xfrm>
           <a:prstGeom prst="rect">
             <a:avLst/>
@@ -2599,27 +2678,27 @@
         </p:nvSpPr>
         <p:spPr>
           <a:xfrm>
-            <a:off x="777240" y="1078992"/>
-            <a:ext cx="9692640" cy="1554480"/>
-          </a:xfrm>
-          <a:prstGeom prst="rect">
-            <a:avLst/>
-          </a:prstGeom>
-          <a:noFill/>
-          <a:ln/>
-        </p:spPr>
-        <p:txBody>
-          <a:bodyPr wrap="square" lIns="0" tIns="0" rIns="0" bIns="0" rtlCol="0" anchor="t"/>
-          <a:lstStyle/>
-          <a:p>
-            <a:pPr algn="l" indent="0" marL="0">
-              <a:lnSpc>
-                <a:spcPct val="108000"/>
-              </a:lnSpc>
-              <a:buNone/>
-            </a:pPr>
-            <a:r>
-              <a:rPr lang="en-US" sz="2900" b="1" dirty="0">
+            <a:off x="777240" y="1243584"/>
+            <a:ext cx="7589520" cy="1828800"/>
+          </a:xfrm>
+          <a:prstGeom prst="rect">
+            <a:avLst/>
+          </a:prstGeom>
+          <a:noFill/>
+          <a:ln/>
+        </p:spPr>
+        <p:txBody>
+          <a:bodyPr wrap="square" lIns="0" tIns="0" rIns="0" bIns="0" rtlCol="0" anchor="t"/>
+          <a:lstStyle/>
+          <a:p>
+            <a:pPr algn="l" indent="0" marL="0">
+              <a:lnSpc>
+                <a:spcPct val="110000"/>
+              </a:lnSpc>
+              <a:buNone/>
+            </a:pPr>
+            <a:r>
+              <a:rPr lang="en-US" sz="2600" b="1" dirty="0">
                 <a:solidFill>
                   <a:srgbClr val="0F172A"/>
                 </a:solidFill>
@@ -2629,17 +2708,17 @@
               </a:rPr>
               <a:t>Las coberturas de una misma familia</a:t>
             </a:r>
-            <a:endParaRPr lang="en-US" sz="2900" dirty="0"/>
-          </a:p>
-          <a:p>
-            <a:pPr algn="l" indent="0" marL="0">
-              <a:lnSpc>
-                <a:spcPct val="108000"/>
-              </a:lnSpc>
-              <a:buNone/>
-            </a:pPr>
-            <a:r>
-              <a:rPr lang="en-US" sz="2900" b="1" dirty="0">
+            <a:endParaRPr lang="en-US" sz="2600" dirty="0"/>
+          </a:p>
+          <a:p>
+            <a:pPr algn="l" indent="0" marL="0">
+              <a:lnSpc>
+                <a:spcPct val="110000"/>
+              </a:lnSpc>
+              <a:buNone/>
+            </a:pPr>
+            <a:r>
+              <a:rPr lang="en-US" sz="2600" b="1" dirty="0">
                 <a:solidFill>
                   <a:srgbClr val="0F172A"/>
                 </a:solidFill>
@@ -2649,7 +2728,7 @@
               </a:rPr>
               <a:t>suelen administrarse por separado.</a:t>
             </a:r>
-            <a:endParaRPr lang="en-US" sz="2900" dirty="0"/>
+            <a:endParaRPr lang="en-US" sz="2600" dirty="0"/>
           </a:p>
         </p:txBody>
       </p:sp>
@@ -2661,8 +2740,8 @@
         </p:nvSpPr>
         <p:spPr>
           <a:xfrm>
-            <a:off x="777240" y="2487168"/>
-            <a:ext cx="9509760" cy="731520"/>
+            <a:off x="777240" y="2651760"/>
+            <a:ext cx="7589520" cy="822960"/>
           </a:xfrm>
           <a:prstGeom prst="rect">
             <a:avLst/>
@@ -2703,20 +2782,18 @@
         </p:nvSpPr>
         <p:spPr>
           <a:xfrm>
-            <a:off x="777240" y="3383280"/>
-            <a:ext cx="2468880" cy="1737360"/>
-          </a:xfrm>
-          <a:prstGeom prst="roundRect">
-            <a:avLst>
-              <a:gd name="adj" fmla="val 7368"/>
-            </a:avLst>
+            <a:off x="777240" y="3840480"/>
+            <a:ext cx="7589520" cy="18288"/>
+          </a:xfrm>
+          <a:prstGeom prst="rect">
+            <a:avLst/>
           </a:prstGeom>
           <a:solidFill>
-            <a:srgbClr val="F7F8FA"/>
+            <a:srgbClr val="E6E9EF"/>
           </a:solidFill>
           <a:ln w="12700">
             <a:solidFill>
-              <a:srgbClr val="E6E9EF"/>
+              <a:srgbClr val="333333"/>
             </a:solidFill>
             <a:prstDash val="solid"/>
           </a:ln>
@@ -2730,8 +2807,8 @@
         </p:nvSpPr>
         <p:spPr>
           <a:xfrm>
-            <a:off x="1014984" y="3657600"/>
-            <a:ext cx="1993392" cy="512064"/>
+            <a:off x="777240" y="4133088"/>
+            <a:ext cx="2606040" cy="548640"/>
           </a:xfrm>
           <a:prstGeom prst="rect">
             <a:avLst/>
@@ -2750,9 +2827,9 @@
               <a:buNone/>
             </a:pPr>
             <a:r>
-              <a:rPr lang="en-US" sz="1400" b="1" dirty="0">
-                <a:solidFill>
-                  <a:srgbClr val="0F172A"/>
+              <a:rPr lang="en-US" sz="1450" b="1" dirty="0">
+                <a:solidFill>
+                  <a:srgbClr val="2C3E5D"/>
                 </a:solidFill>
                 <a:latin typeface="Inter" pitchFamily="34" charset="0"/>
                 <a:ea typeface="Inter" pitchFamily="34" charset="-122"/>
@@ -2760,7 +2837,7 @@
               </a:rPr>
               <a:t>Isapre o Fonasa</a:t>
             </a:r>
-            <a:endParaRPr lang="en-US" sz="1400" dirty="0"/>
+            <a:endParaRPr lang="en-US" sz="1450" dirty="0"/>
           </a:p>
         </p:txBody>
       </p:sp>
@@ -2772,27 +2849,27 @@
         </p:nvSpPr>
         <p:spPr>
           <a:xfrm>
-            <a:off x="1014984" y="4242816"/>
-            <a:ext cx="1993392" cy="713232"/>
-          </a:xfrm>
-          <a:prstGeom prst="rect">
-            <a:avLst/>
-          </a:prstGeom>
-          <a:noFill/>
-          <a:ln/>
-        </p:spPr>
-        <p:txBody>
-          <a:bodyPr wrap="square" lIns="0" tIns="0" rIns="0" bIns="0" rtlCol="0" anchor="t"/>
-          <a:lstStyle/>
-          <a:p>
-            <a:pPr algn="l" indent="0" marL="0">
-              <a:lnSpc>
-                <a:spcPct val="126000"/>
-              </a:lnSpc>
-              <a:buNone/>
-            </a:pPr>
-            <a:r>
-              <a:rPr lang="en-US" sz="1100" dirty="0">
+            <a:off x="3566160" y="4133088"/>
+            <a:ext cx="4800600" cy="640080"/>
+          </a:xfrm>
+          <a:prstGeom prst="rect">
+            <a:avLst/>
+          </a:prstGeom>
+          <a:noFill/>
+          <a:ln/>
+        </p:spPr>
+        <p:txBody>
+          <a:bodyPr wrap="square" lIns="0" tIns="0" rIns="0" bIns="0" rtlCol="0" anchor="t"/>
+          <a:lstStyle/>
+          <a:p>
+            <a:pPr algn="l" indent="0" marL="0">
+              <a:lnSpc>
+                <a:spcPct val="130000"/>
+              </a:lnSpc>
+              <a:buNone/>
+            </a:pPr>
+            <a:r>
+              <a:rPr lang="en-US" sz="1200" dirty="0">
                 <a:solidFill>
                   <a:srgbClr val="6B7686"/>
                 </a:solidFill>
@@ -2802,7 +2879,7 @@
               </a:rPr>
               <a:t>Condiciones y coberturas definidas por el sistema de salud de cada persona</a:t>
             </a:r>
-            <a:endParaRPr lang="en-US" sz="1100" dirty="0"/>
+            <a:endParaRPr lang="en-US" sz="1200" dirty="0"/>
           </a:p>
         </p:txBody>
       </p:sp>
@@ -2814,20 +2891,18 @@
         </p:nvSpPr>
         <p:spPr>
           <a:xfrm>
-            <a:off x="3502152" y="3383280"/>
-            <a:ext cx="2468880" cy="1737360"/>
-          </a:xfrm>
-          <a:prstGeom prst="roundRect">
-            <a:avLst>
-              <a:gd name="adj" fmla="val 7368"/>
-            </a:avLst>
+            <a:off x="777240" y="5212080"/>
+            <a:ext cx="7589520" cy="18288"/>
+          </a:xfrm>
+          <a:prstGeom prst="rect">
+            <a:avLst/>
           </a:prstGeom>
           <a:solidFill>
-            <a:srgbClr val="F7F8FA"/>
+            <a:srgbClr val="E6E9EF"/>
           </a:solidFill>
           <a:ln w="12700">
             <a:solidFill>
-              <a:srgbClr val="E6E9EF"/>
+              <a:srgbClr val="333333"/>
             </a:solidFill>
             <a:prstDash val="solid"/>
           </a:ln>
@@ -2841,8 +2916,8 @@
         </p:nvSpPr>
         <p:spPr>
           <a:xfrm>
-            <a:off x="3739896" y="3657600"/>
-            <a:ext cx="1993392" cy="512064"/>
+            <a:off x="777240" y="5504688"/>
+            <a:ext cx="2606040" cy="548640"/>
           </a:xfrm>
           <a:prstGeom prst="rect">
             <a:avLst/>
@@ -2861,9 +2936,9 @@
               <a:buNone/>
             </a:pPr>
             <a:r>
-              <a:rPr lang="en-US" sz="1400" b="1" dirty="0">
-                <a:solidFill>
-                  <a:srgbClr val="0F172A"/>
+              <a:rPr lang="en-US" sz="1450" b="1" dirty="0">
+                <a:solidFill>
+                  <a:srgbClr val="2C3E5D"/>
                 </a:solidFill>
                 <a:latin typeface="Inter" pitchFamily="34" charset="0"/>
                 <a:ea typeface="Inter" pitchFamily="34" charset="-122"/>
@@ -2871,7 +2946,7 @@
               </a:rPr>
               <a:t>Seguro complementario</a:t>
             </a:r>
-            <a:endParaRPr lang="en-US" sz="1400" dirty="0"/>
+            <a:endParaRPr lang="en-US" sz="1450" dirty="0"/>
           </a:p>
         </p:txBody>
       </p:sp>
@@ -2883,27 +2958,27 @@
         </p:nvSpPr>
         <p:spPr>
           <a:xfrm>
-            <a:off x="3739896" y="4242816"/>
-            <a:ext cx="1993392" cy="713232"/>
-          </a:xfrm>
-          <a:prstGeom prst="rect">
-            <a:avLst/>
-          </a:prstGeom>
-          <a:noFill/>
-          <a:ln/>
-        </p:spPr>
-        <p:txBody>
-          <a:bodyPr wrap="square" lIns="0" tIns="0" rIns="0" bIns="0" rtlCol="0" anchor="t"/>
-          <a:lstStyle/>
-          <a:p>
-            <a:pPr algn="l" indent="0" marL="0">
-              <a:lnSpc>
-                <a:spcPct val="126000"/>
-              </a:lnSpc>
-              <a:buNone/>
-            </a:pPr>
-            <a:r>
-              <a:rPr lang="en-US" sz="1100" dirty="0">
+            <a:off x="3566160" y="5504688"/>
+            <a:ext cx="4800600" cy="640080"/>
+          </a:xfrm>
+          <a:prstGeom prst="rect">
+            <a:avLst/>
+          </a:prstGeom>
+          <a:noFill/>
+          <a:ln/>
+        </p:spPr>
+        <p:txBody>
+          <a:bodyPr wrap="square" lIns="0" tIns="0" rIns="0" bIns="0" rtlCol="0" anchor="t"/>
+          <a:lstStyle/>
+          <a:p>
+            <a:pPr algn="l" indent="0" marL="0">
+              <a:lnSpc>
+                <a:spcPct val="130000"/>
+              </a:lnSpc>
+              <a:buNone/>
+            </a:pPr>
+            <a:r>
+              <a:rPr lang="en-US" sz="1200" dirty="0">
                 <a:solidFill>
                   <a:srgbClr val="6B7686"/>
                 </a:solidFill>
@@ -2913,7 +2988,7 @@
               </a:rPr>
               <a:t>Deducible, topes y reembolsos definidos por la póliza colectiva</a:t>
             </a:r>
-            <a:endParaRPr lang="en-US" sz="1100" dirty="0"/>
+            <a:endParaRPr lang="en-US" sz="1200" dirty="0"/>
           </a:p>
         </p:txBody>
       </p:sp>
@@ -2925,20 +3000,18 @@
         </p:nvSpPr>
         <p:spPr>
           <a:xfrm>
-            <a:off x="6227064" y="3383280"/>
-            <a:ext cx="2468880" cy="1737360"/>
-          </a:xfrm>
-          <a:prstGeom prst="roundRect">
-            <a:avLst>
-              <a:gd name="adj" fmla="val 7368"/>
-            </a:avLst>
+            <a:off x="777240" y="6583680"/>
+            <a:ext cx="7589520" cy="18288"/>
+          </a:xfrm>
+          <a:prstGeom prst="rect">
+            <a:avLst/>
           </a:prstGeom>
           <a:solidFill>
-            <a:srgbClr val="F7F8FA"/>
+            <a:srgbClr val="E6E9EF"/>
           </a:solidFill>
           <a:ln w="12700">
             <a:solidFill>
-              <a:srgbClr val="E6E9EF"/>
+              <a:srgbClr val="333333"/>
             </a:solidFill>
             <a:prstDash val="solid"/>
           </a:ln>
@@ -2952,8 +3025,8 @@
         </p:nvSpPr>
         <p:spPr>
           <a:xfrm>
-            <a:off x="6464808" y="3657600"/>
-            <a:ext cx="1993392" cy="512064"/>
+            <a:off x="777240" y="6876288"/>
+            <a:ext cx="2606040" cy="548640"/>
           </a:xfrm>
           <a:prstGeom prst="rect">
             <a:avLst/>
@@ -2972,9 +3045,9 @@
               <a:buNone/>
             </a:pPr>
             <a:r>
-              <a:rPr lang="en-US" sz="1400" b="1" dirty="0">
-                <a:solidFill>
-                  <a:srgbClr val="0F172A"/>
+              <a:rPr lang="en-US" sz="1450" b="1" dirty="0">
+                <a:solidFill>
+                  <a:srgbClr val="2C3E5D"/>
                 </a:solidFill>
                 <a:latin typeface="Inter" pitchFamily="34" charset="0"/>
                 <a:ea typeface="Inter" pitchFamily="34" charset="-122"/>
@@ -2982,7 +3055,7 @@
               </a:rPr>
               <a:t>Seguro dental</a:t>
             </a:r>
-            <a:endParaRPr lang="en-US" sz="1400" dirty="0"/>
+            <a:endParaRPr lang="en-US" sz="1450" dirty="0"/>
           </a:p>
         </p:txBody>
       </p:sp>
@@ -2994,27 +3067,27 @@
         </p:nvSpPr>
         <p:spPr>
           <a:xfrm>
-            <a:off x="6464808" y="4242816"/>
-            <a:ext cx="1993392" cy="713232"/>
-          </a:xfrm>
-          <a:prstGeom prst="rect">
-            <a:avLst/>
-          </a:prstGeom>
-          <a:noFill/>
-          <a:ln/>
-        </p:spPr>
-        <p:txBody>
-          <a:bodyPr wrap="square" lIns="0" tIns="0" rIns="0" bIns="0" rtlCol="0" anchor="t"/>
-          <a:lstStyle/>
-          <a:p>
-            <a:pPr algn="l" indent="0" marL="0">
-              <a:lnSpc>
-                <a:spcPct val="126000"/>
-              </a:lnSpc>
-              <a:buNone/>
-            </a:pPr>
-            <a:r>
-              <a:rPr lang="en-US" sz="1100" dirty="0">
+            <a:off x="3566160" y="6876288"/>
+            <a:ext cx="4800600" cy="640080"/>
+          </a:xfrm>
+          <a:prstGeom prst="rect">
+            <a:avLst/>
+          </a:prstGeom>
+          <a:noFill/>
+          <a:ln/>
+        </p:spPr>
+        <p:txBody>
+          <a:bodyPr wrap="square" lIns="0" tIns="0" rIns="0" bIns="0" rtlCol="0" anchor="t"/>
+          <a:lstStyle/>
+          <a:p>
+            <a:pPr algn="l" indent="0" marL="0">
+              <a:lnSpc>
+                <a:spcPct val="130000"/>
+              </a:lnSpc>
+              <a:buNone/>
+            </a:pPr>
+            <a:r>
+              <a:rPr lang="en-US" sz="1200" dirty="0">
                 <a:solidFill>
                   <a:srgbClr val="6B7686"/>
                 </a:solidFill>
@@ -3024,7 +3097,7 @@
               </a:rPr>
               <a:t>Tope anual y prestaciones definidos por la póliza</a:t>
             </a:r>
-            <a:endParaRPr lang="en-US" sz="1100" dirty="0"/>
+            <a:endParaRPr lang="en-US" sz="1200" dirty="0"/>
           </a:p>
         </p:txBody>
       </p:sp>
@@ -3036,20 +3109,18 @@
         </p:nvSpPr>
         <p:spPr>
           <a:xfrm>
-            <a:off x="8951976" y="3383280"/>
-            <a:ext cx="2468880" cy="1737360"/>
-          </a:xfrm>
-          <a:prstGeom prst="roundRect">
-            <a:avLst>
-              <a:gd name="adj" fmla="val 7368"/>
-            </a:avLst>
+            <a:off x="777240" y="7955280"/>
+            <a:ext cx="7589520" cy="18288"/>
+          </a:xfrm>
+          <a:prstGeom prst="rect">
+            <a:avLst/>
           </a:prstGeom>
           <a:solidFill>
-            <a:srgbClr val="F7F8FA"/>
+            <a:srgbClr val="E6E9EF"/>
           </a:solidFill>
           <a:ln w="12700">
             <a:solidFill>
-              <a:srgbClr val="E6E9EF"/>
+              <a:srgbClr val="333333"/>
             </a:solidFill>
             <a:prstDash val="solid"/>
           </a:ln>
@@ -3063,8 +3134,8 @@
         </p:nvSpPr>
         <p:spPr>
           <a:xfrm>
-            <a:off x="9189720" y="3657600"/>
-            <a:ext cx="1993392" cy="512064"/>
+            <a:off x="777240" y="8247888"/>
+            <a:ext cx="2606040" cy="548640"/>
           </a:xfrm>
           <a:prstGeom prst="rect">
             <a:avLst/>
@@ -3083,9 +3154,9 @@
               <a:buNone/>
             </a:pPr>
             <a:r>
-              <a:rPr lang="en-US" sz="1400" b="1" dirty="0">
-                <a:solidFill>
-                  <a:srgbClr val="0F172A"/>
+              <a:rPr lang="en-US" sz="1450" b="1" dirty="0">
+                <a:solidFill>
+                  <a:srgbClr val="2C3E5D"/>
                 </a:solidFill>
                 <a:latin typeface="Inter" pitchFamily="34" charset="0"/>
                 <a:ea typeface="Inter" pitchFamily="34" charset="-122"/>
@@ -3093,7 +3164,7 @@
               </a:rPr>
               <a:t>Seguro de accidentes</a:t>
             </a:r>
-            <a:endParaRPr lang="en-US" sz="1400" dirty="0"/>
+            <a:endParaRPr lang="en-US" sz="1450" dirty="0"/>
           </a:p>
         </p:txBody>
       </p:sp>
@@ -3105,27 +3176,27 @@
         </p:nvSpPr>
         <p:spPr>
           <a:xfrm>
-            <a:off x="9189720" y="4242816"/>
-            <a:ext cx="1993392" cy="713232"/>
-          </a:xfrm>
-          <a:prstGeom prst="rect">
-            <a:avLst/>
-          </a:prstGeom>
-          <a:noFill/>
-          <a:ln/>
-        </p:spPr>
-        <p:txBody>
-          <a:bodyPr wrap="square" lIns="0" tIns="0" rIns="0" bIns="0" rtlCol="0" anchor="t"/>
-          <a:lstStyle/>
-          <a:p>
-            <a:pPr algn="l" indent="0" marL="0">
-              <a:lnSpc>
-                <a:spcPct val="126000"/>
-              </a:lnSpc>
-              <a:buNone/>
-            </a:pPr>
-            <a:r>
-              <a:rPr lang="en-US" sz="1100" dirty="0">
+            <a:off x="3566160" y="8247888"/>
+            <a:ext cx="4800600" cy="640080"/>
+          </a:xfrm>
+          <a:prstGeom prst="rect">
+            <a:avLst/>
+          </a:prstGeom>
+          <a:noFill/>
+          <a:ln/>
+        </p:spPr>
+        <p:txBody>
+          <a:bodyPr wrap="square" lIns="0" tIns="0" rIns="0" bIns="0" rtlCol="0" anchor="t"/>
+          <a:lstStyle/>
+          <a:p>
+            <a:pPr algn="l" indent="0" marL="0">
+              <a:lnSpc>
+                <a:spcPct val="130000"/>
+              </a:lnSpc>
+              <a:buNone/>
+            </a:pPr>
+            <a:r>
+              <a:rPr lang="en-US" sz="1200" dirty="0">
                 <a:solidFill>
                   <a:srgbClr val="6B7686"/>
                 </a:solidFill>
@@ -3135,7 +3206,7 @@
               </a:rPr>
               <a:t>Cobertura y condiciones definidas por la póliza</a:t>
             </a:r>
-            <a:endParaRPr lang="en-US" sz="1100" dirty="0"/>
+            <a:endParaRPr lang="en-US" sz="1200" dirty="0"/>
           </a:p>
         </p:txBody>
       </p:sp>
@@ -3147,12 +3218,37 @@
         </p:nvSpPr>
         <p:spPr>
           <a:xfrm>
-            <a:off x="777240" y="5431536"/>
-            <a:ext cx="10637215" cy="786384"/>
+            <a:off x="777240" y="9326880"/>
+            <a:ext cx="7589520" cy="18288"/>
+          </a:xfrm>
+          <a:prstGeom prst="rect">
+            <a:avLst/>
+          </a:prstGeom>
+          <a:solidFill>
+            <a:srgbClr val="E6E9EF"/>
+          </a:solidFill>
+          <a:ln w="12700">
+            <a:solidFill>
+              <a:srgbClr val="333333"/>
+            </a:solidFill>
+            <a:prstDash val="solid"/>
+          </a:ln>
+        </p:spPr>
+      </p:sp>
+      <p:sp>
+        <p:nvSpPr>
+          <p:cNvPr id="18" name="Shape 16"/>
+          <p:cNvSpPr/>
+          <p:nvPr/>
+        </p:nvSpPr>
+        <p:spPr>
+          <a:xfrm>
+            <a:off x="777240" y="9784080"/>
+            <a:ext cx="7589520" cy="1097280"/>
           </a:xfrm>
           <a:prstGeom prst="roundRect">
             <a:avLst>
-              <a:gd name="adj" fmla="val 16279"/>
+              <a:gd name="adj" fmla="val 11667"/>
             </a:avLst>
           </a:prstGeom>
           <a:solidFill>
@@ -3168,33 +3264,33 @@
       </p:sp>
       <p:sp>
         <p:nvSpPr>
-          <p:cNvPr id="18" name="Text 16"/>
-          <p:cNvSpPr txBox="1"/>
-          <p:nvPr/>
-        </p:nvSpPr>
-        <p:spPr>
-          <a:xfrm>
-            <a:off x="1088136" y="5650992"/>
-            <a:ext cx="10015423" cy="365760"/>
-          </a:xfrm>
-          <a:prstGeom prst="rect">
-            <a:avLst/>
-          </a:prstGeom>
-          <a:noFill/>
-          <a:ln/>
-        </p:spPr>
-        <p:txBody>
-          <a:bodyPr wrap="square" lIns="0" tIns="0" rIns="0" bIns="0" rtlCol="0" anchor="t"/>
-          <a:lstStyle/>
-          <a:p>
-            <a:pPr algn="l" indent="0" marL="0">
-              <a:lnSpc>
-                <a:spcPct val="120000"/>
-              </a:lnSpc>
-              <a:buNone/>
-            </a:pPr>
-            <a:r>
-              <a:rPr lang="en-US" sz="1350" dirty="0">
+          <p:cNvPr id="19" name="Text 17"/>
+          <p:cNvSpPr txBox="1"/>
+          <p:nvPr/>
+        </p:nvSpPr>
+        <p:spPr>
+          <a:xfrm>
+            <a:off x="1088136" y="10058400"/>
+            <a:ext cx="6967728" cy="603504"/>
+          </a:xfrm>
+          <a:prstGeom prst="rect">
+            <a:avLst/>
+          </a:prstGeom>
+          <a:noFill/>
+          <a:ln/>
+        </p:spPr>
+        <p:txBody>
+          <a:bodyPr wrap="square" lIns="0" tIns="0" rIns="0" bIns="0" rtlCol="0" anchor="t"/>
+          <a:lstStyle/>
+          <a:p>
+            <a:pPr algn="l" indent="0" marL="0">
+              <a:lnSpc>
+                <a:spcPct val="128000"/>
+              </a:lnSpc>
+              <a:buNone/>
+            </a:pPr>
+            <a:r>
+              <a:rPr lang="en-US" sz="1300" dirty="0">
                 <a:solidFill>
                   <a:srgbClr val="3F4A5C"/>
                 </a:solidFill>
@@ -3204,34 +3300,34 @@
               </a:rPr>
               <a:t>Las condiciones y el orden en que opera cada cobertura dependen de cada póliza en particular.</a:t>
             </a:r>
-            <a:endParaRPr lang="en-US" sz="1350" dirty="0"/>
-          </a:p>
-        </p:txBody>
-      </p:sp>
-      <p:sp>
-        <p:nvSpPr>
-          <p:cNvPr id="19" name="Text 17"/>
-          <p:cNvSpPr txBox="1"/>
-          <p:nvPr/>
-        </p:nvSpPr>
-        <p:spPr>
-          <a:xfrm>
-            <a:off x="777240" y="6345936"/>
-            <a:ext cx="10637215" cy="310896"/>
-          </a:xfrm>
-          <a:prstGeom prst="rect">
-            <a:avLst/>
-          </a:prstGeom>
-          <a:noFill/>
-          <a:ln/>
-        </p:spPr>
-        <p:txBody>
-          <a:bodyPr wrap="square" lIns="0" tIns="0" rIns="0" bIns="0" rtlCol="0" anchor="t"/>
-          <a:lstStyle/>
-          <a:p>
-            <a:pPr algn="l" indent="0" marL="0">
-              <a:lnSpc>
-                <a:spcPct val="122000"/>
+            <a:endParaRPr lang="en-US" sz="1300" dirty="0"/>
+          </a:p>
+        </p:txBody>
+      </p:sp>
+      <p:sp>
+        <p:nvSpPr>
+          <p:cNvPr id="20" name="Text 18"/>
+          <p:cNvSpPr txBox="1"/>
+          <p:nvPr/>
+        </p:nvSpPr>
+        <p:spPr>
+          <a:xfrm>
+            <a:off x="777240" y="11411712"/>
+            <a:ext cx="7589520" cy="457200"/>
+          </a:xfrm>
+          <a:prstGeom prst="rect">
+            <a:avLst/>
+          </a:prstGeom>
+          <a:noFill/>
+          <a:ln/>
+        </p:spPr>
+        <p:txBody>
+          <a:bodyPr wrap="square" lIns="0" tIns="0" rIns="0" bIns="0" rtlCol="0" anchor="t"/>
+          <a:lstStyle/>
+          <a:p>
+            <a:pPr algn="l" indent="0" marL="0">
+              <a:lnSpc>
+                <a:spcPct val="124000"/>
               </a:lnSpc>
               <a:buNone/>
             </a:pPr>
@@ -3261,6 +3357,13 @@
 <file path=ppt/slides/slide4.xml><?xml version="1.0" encoding="utf-8"?>
 <p:sld xmlns:a="http://schemas.openxmlformats.org/drawingml/2006/main" xmlns:r="http://schemas.openxmlformats.org/officeDocument/2006/relationships" xmlns:p="http://schemas.openxmlformats.org/presentationml/2006/main">
   <p:cSld name="Slide 4">
+    <p:bg>
+      <p:bgPr>
+        <a:solidFill>
+          <a:srgbClr val="16233A"/>
+        </a:solidFill>
+      </p:bgPr>
+    </p:bg>
     <p:spTree>
       <p:nvGrpSpPr>
         <p:cNvPr id="1" name=""/>
@@ -3277,7 +3380,7 @@
       </p:grpSpPr>
       <p:pic>
         <p:nvPicPr>
-          <p:cNvPr id="2" name="Image 0" descr="/home/user/Prototipo-comercial/presentacion/img/altiplano.png">    </p:cNvPr>
+          <p:cNvPr id="2" name="Image 0" descr="/home/user/Prototipo-comercial/presentacion/img/patagonia-fondo.jpg">    </p:cNvPr>
           <p:cNvPicPr>
             <a:picLocks noChangeAspect="1"/>
           </p:cNvPicPr>
@@ -3291,7 +3394,7 @@
         <p:spPr>
           <a:xfrm>
             <a:off x="0" y="0"/>
-            <a:ext cx="12191695" cy="6858000"/>
+            <a:ext cx="9144000" cy="12191695"/>
           </a:xfrm>
           <a:prstGeom prst="rect">
             <a:avLst/>
@@ -3307,14 +3410,14 @@
         <p:spPr>
           <a:xfrm>
             <a:off x="0" y="0"/>
-            <a:ext cx="12191695" cy="6858000"/>
+            <a:ext cx="9144000" cy="12191695"/>
           </a:xfrm>
           <a:prstGeom prst="rect">
             <a:avLst/>
           </a:prstGeom>
           <a:solidFill>
             <a:srgbClr val="16233A">
-              <a:alpha val="80000"/>
+              <a:alpha val="83000"/>
             </a:srgbClr>
           </a:solidFill>
           <a:ln w="12700">
@@ -3333,8 +3436,8 @@
         </p:nvSpPr>
         <p:spPr>
           <a:xfrm>
-            <a:off x="777240" y="713232"/>
-            <a:ext cx="6400800" cy="237744"/>
+            <a:off x="777240" y="841248"/>
+            <a:ext cx="7589520" cy="237744"/>
           </a:xfrm>
           <a:prstGeom prst="rect">
             <a:avLst/>
@@ -3375,27 +3478,27 @@
         </p:nvSpPr>
         <p:spPr>
           <a:xfrm>
-            <a:off x="777240" y="1078992"/>
-            <a:ext cx="5943600" cy="1554480"/>
-          </a:xfrm>
-          <a:prstGeom prst="rect">
-            <a:avLst/>
-          </a:prstGeom>
-          <a:noFill/>
-          <a:ln/>
-        </p:spPr>
-        <p:txBody>
-          <a:bodyPr wrap="square" lIns="0" tIns="0" rIns="0" bIns="0" rtlCol="0" anchor="t"/>
-          <a:lstStyle/>
-          <a:p>
-            <a:pPr algn="l" indent="0" marL="0">
-              <a:lnSpc>
-                <a:spcPct val="108000"/>
-              </a:lnSpc>
-              <a:buNone/>
-            </a:pPr>
-            <a:r>
-              <a:rPr lang="en-US" sz="3100" b="1" dirty="0">
+            <a:off x="777240" y="1243584"/>
+            <a:ext cx="7589520" cy="1828800"/>
+          </a:xfrm>
+          <a:prstGeom prst="rect">
+            <a:avLst/>
+          </a:prstGeom>
+          <a:noFill/>
+          <a:ln/>
+        </p:spPr>
+        <p:txBody>
+          <a:bodyPr wrap="square" lIns="0" tIns="0" rIns="0" bIns="0" rtlCol="0" anchor="t"/>
+          <a:lstStyle/>
+          <a:p>
+            <a:pPr algn="l" indent="0" marL="0">
+              <a:lnSpc>
+                <a:spcPct val="110000"/>
+              </a:lnSpc>
+              <a:buNone/>
+            </a:pPr>
+            <a:r>
+              <a:rPr lang="en-US" sz="3000" b="1" dirty="0">
                 <a:solidFill>
                   <a:srgbClr val="FFFFFF"/>
                 </a:solidFill>
@@ -3405,17 +3508,17 @@
               </a:rPr>
               <a:t>Aplica tu Seguro</a:t>
             </a:r>
-            <a:endParaRPr lang="en-US" sz="3100" dirty="0"/>
-          </a:p>
-          <a:p>
-            <a:pPr algn="l" indent="0" marL="0">
-              <a:lnSpc>
-                <a:spcPct val="108000"/>
-              </a:lnSpc>
-              <a:buNone/>
-            </a:pPr>
-            <a:r>
-              <a:rPr lang="en-US" sz="3100" b="1" dirty="0">
+            <a:endParaRPr lang="en-US" sz="3000" dirty="0"/>
+          </a:p>
+          <a:p>
+            <a:pPr algn="l" indent="0" marL="0">
+              <a:lnSpc>
+                <a:spcPct val="110000"/>
+              </a:lnSpc>
+              <a:buNone/>
+            </a:pPr>
+            <a:r>
+              <a:rPr lang="en-US" sz="3000" b="1" dirty="0">
                 <a:solidFill>
                   <a:srgbClr val="FFFFFF"/>
                 </a:solidFill>
@@ -3425,7 +3528,7 @@
               </a:rPr>
               <a:t>no es otro seguro.</a:t>
             </a:r>
-            <a:endParaRPr lang="en-US" sz="3100" dirty="0"/>
+            <a:endParaRPr lang="en-US" sz="3000" dirty="0"/>
           </a:p>
         </p:txBody>
       </p:sp>
@@ -3437,8 +3540,8 @@
         </p:nvSpPr>
         <p:spPr>
           <a:xfrm>
-            <a:off x="777240" y="3200400"/>
-            <a:ext cx="5577840" cy="822960"/>
+            <a:off x="777240" y="2651760"/>
+            <a:ext cx="7223760" cy="822960"/>
           </a:xfrm>
           <a:prstGeom prst="rect">
             <a:avLst/>
@@ -3479,8 +3582,8 @@
         </p:nvSpPr>
         <p:spPr>
           <a:xfrm>
-            <a:off x="777240" y="4133088"/>
-            <a:ext cx="5577840" cy="548640"/>
+            <a:off x="777240" y="3520440"/>
+            <a:ext cx="7223760" cy="640080"/>
           </a:xfrm>
           <a:prstGeom prst="rect">
             <a:avLst/>
@@ -3499,7 +3602,7 @@
               <a:buNone/>
             </a:pPr>
             <a:r>
-              <a:rPr lang="en-US" sz="1150" dirty="0">
+              <a:rPr lang="en-US" sz="1200" dirty="0">
                 <a:solidFill>
                   <a:srgbClr val="8FA9D0"/>
                 </a:solidFill>
@@ -3509,7 +3612,7 @@
               </a:rPr>
               <a:t>No vende ni intermedia seguros, y no reemplaza a una Isapre, Fonasa, aseguradora, corredor ni prestador médico.</a:t>
             </a:r>
-            <a:endParaRPr lang="en-US" sz="1150" dirty="0"/>
+            <a:endParaRPr lang="en-US" sz="1200" dirty="0"/>
           </a:p>
         </p:txBody>
       </p:sp>
@@ -3521,7 +3624,7 @@
         </p:nvSpPr>
         <p:spPr>
           <a:xfrm>
-            <a:off x="777240" y="4828032"/>
+            <a:off x="777240" y="4315968"/>
             <a:ext cx="1247242" cy="384048"/>
           </a:xfrm>
           <a:prstGeom prst="roundRect">
@@ -3552,7 +3655,7 @@
         </p:nvSpPr>
         <p:spPr>
           <a:xfrm>
-            <a:off x="777240" y="4828032"/>
+            <a:off x="777240" y="4315968"/>
             <a:ext cx="1247242" cy="384048"/>
           </a:xfrm>
           <a:prstGeom prst="rect">
@@ -3594,7 +3697,7 @@
         </p:nvSpPr>
         <p:spPr>
           <a:xfrm>
-            <a:off x="2170786" y="4828032"/>
+            <a:off x="2170786" y="4315968"/>
             <a:ext cx="1247242" cy="384048"/>
           </a:xfrm>
           <a:prstGeom prst="roundRect">
@@ -3625,7 +3728,7 @@
         </p:nvSpPr>
         <p:spPr>
           <a:xfrm>
-            <a:off x="2170786" y="4828032"/>
+            <a:off x="2170786" y="4315968"/>
             <a:ext cx="1247242" cy="384048"/>
           </a:xfrm>
           <a:prstGeom prst="rect">
@@ -3667,7 +3770,7 @@
         </p:nvSpPr>
         <p:spPr>
           <a:xfrm>
-            <a:off x="3564331" y="4828032"/>
+            <a:off x="3564331" y="4315968"/>
             <a:ext cx="1148486" cy="384048"/>
           </a:xfrm>
           <a:prstGeom prst="roundRect">
@@ -3698,7 +3801,7 @@
         </p:nvSpPr>
         <p:spPr>
           <a:xfrm>
-            <a:off x="3564331" y="4828032"/>
+            <a:off x="3564331" y="4315968"/>
             <a:ext cx="1148486" cy="384048"/>
           </a:xfrm>
           <a:prstGeom prst="rect">
@@ -3740,7 +3843,7 @@
         </p:nvSpPr>
         <p:spPr>
           <a:xfrm>
-            <a:off x="4859122" y="4828032"/>
+            <a:off x="4859122" y="4315968"/>
             <a:ext cx="1049731" cy="384048"/>
           </a:xfrm>
           <a:prstGeom prst="roundRect">
@@ -3771,7 +3874,7 @@
         </p:nvSpPr>
         <p:spPr>
           <a:xfrm>
-            <a:off x="4859122" y="4828032"/>
+            <a:off x="4859122" y="4315968"/>
             <a:ext cx="1049731" cy="384048"/>
           </a:xfrm>
           <a:prstGeom prst="rect">
@@ -3813,7 +3916,7 @@
         </p:nvSpPr>
         <p:spPr>
           <a:xfrm>
-            <a:off x="6055157" y="4828032"/>
+            <a:off x="6055157" y="4315968"/>
             <a:ext cx="852221" cy="384048"/>
           </a:xfrm>
           <a:prstGeom prst="roundRect">
@@ -3844,7 +3947,7 @@
         </p:nvSpPr>
         <p:spPr>
           <a:xfrm>
-            <a:off x="6055157" y="4828032"/>
+            <a:off x="6055157" y="4315968"/>
             <a:ext cx="852221" cy="384048"/>
           </a:xfrm>
           <a:prstGeom prst="rect">
@@ -3886,12 +3989,12 @@
         </p:nvSpPr>
         <p:spPr>
           <a:xfrm>
-            <a:off x="7086600" y="1097280"/>
-            <a:ext cx="4315968" cy="4663440"/>
+            <a:off x="777240" y="5193792"/>
+            <a:ext cx="7589520" cy="5779008"/>
           </a:xfrm>
           <a:prstGeom prst="roundRect">
             <a:avLst>
-              <a:gd name="adj" fmla="val 3390"/>
+              <a:gd name="adj" fmla="val 2532"/>
             </a:avLst>
           </a:prstGeom>
           <a:solidFill>
@@ -3920,8 +4023,8 @@
         </p:nvSpPr>
         <p:spPr>
           <a:xfrm>
-            <a:off x="7470648" y="1463040"/>
-            <a:ext cx="3547872" cy="237744"/>
+            <a:off x="1234440" y="5577840"/>
+            <a:ext cx="6675120" cy="237744"/>
           </a:xfrm>
           <a:prstGeom prst="rect">
             <a:avLst/>
@@ -3962,8 +4065,8 @@
         </p:nvSpPr>
         <p:spPr>
           <a:xfrm>
-            <a:off x="7470648" y="1792224"/>
-            <a:ext cx="3547872" cy="694944"/>
+            <a:off x="1234440" y="5943600"/>
+            <a:ext cx="6675120" cy="914400"/>
           </a:xfrm>
           <a:prstGeom prst="rect">
             <a:avLst/>
@@ -3982,7 +4085,7 @@
               <a:buNone/>
             </a:pPr>
             <a:r>
-              <a:rPr lang="en-US" sz="1700" b="1" dirty="0">
+              <a:rPr lang="en-US" sz="2100" b="1" dirty="0">
                 <a:solidFill>
                   <a:srgbClr val="0F172A"/>
                 </a:solidFill>
@@ -3990,9 +4093,29 @@
                 <a:ea typeface="Inter" pitchFamily="34" charset="-122"/>
                 <a:cs typeface="Inter" pitchFamily="34" charset="-120"/>
               </a:rPr>
-              <a:t>La hija de María necesita una resonancia de rodilla.</a:t>
-            </a:r>
-            <a:endParaRPr lang="en-US" sz="1700" dirty="0"/>
+              <a:t>La hija de María necesita</a:t>
+            </a:r>
+            <a:endParaRPr lang="en-US" sz="2100" dirty="0"/>
+          </a:p>
+          <a:p>
+            <a:pPr algn="l" indent="0" marL="0">
+              <a:lnSpc>
+                <a:spcPct val="114000"/>
+              </a:lnSpc>
+              <a:buNone/>
+            </a:pPr>
+            <a:r>
+              <a:rPr lang="en-US" sz="2100" b="1" dirty="0">
+                <a:solidFill>
+                  <a:srgbClr val="0F172A"/>
+                </a:solidFill>
+                <a:latin typeface="Inter" pitchFamily="34" charset="0"/>
+                <a:ea typeface="Inter" pitchFamily="34" charset="-122"/>
+                <a:cs typeface="Inter" pitchFamily="34" charset="-120"/>
+              </a:rPr>
+              <a:t>una resonancia de rodilla.</a:t>
+            </a:r>
+            <a:endParaRPr lang="en-US" sz="2100" dirty="0"/>
           </a:p>
         </p:txBody>
       </p:sp>
@@ -4004,8 +4127,8 @@
         </p:nvSpPr>
         <p:spPr>
           <a:xfrm>
-            <a:off x="7470648" y="2578608"/>
-            <a:ext cx="3547872" cy="786384"/>
+            <a:off x="1234440" y="7040880"/>
+            <a:ext cx="6675120" cy="822960"/>
           </a:xfrm>
           <a:prstGeom prst="rect">
             <a:avLst/>
@@ -4024,7 +4147,7 @@
               <a:buNone/>
             </a:pPr>
             <a:r>
-              <a:rPr lang="en-US" sz="1150" dirty="0">
+              <a:rPr lang="en-US" sz="1250" dirty="0">
                 <a:solidFill>
                   <a:srgbClr val="3F4A5C"/>
                 </a:solidFill>
@@ -4034,7 +4157,7 @@
               </a:rPr>
               <a:t>Con los datos preparados para este ejemplo, Aplica tu Seguro mostraría tres alternativas y cuánto pagaría María de su bolsillo en cada una.</a:t>
             </a:r>
-            <a:endParaRPr lang="en-US" sz="1150" dirty="0"/>
+            <a:endParaRPr lang="en-US" sz="1250" dirty="0"/>
           </a:p>
         </p:txBody>
       </p:sp>
@@ -4046,12 +4169,12 @@
         </p:nvSpPr>
         <p:spPr>
           <a:xfrm>
-            <a:off x="7470648" y="3474720"/>
-            <a:ext cx="3547872" cy="420624"/>
+            <a:off x="1234440" y="8028432"/>
+            <a:ext cx="6675120" cy="566928"/>
           </a:xfrm>
           <a:prstGeom prst="roundRect">
             <a:avLst>
-              <a:gd name="adj" fmla="val 21739"/>
+              <a:gd name="adj" fmla="val 19355"/>
             </a:avLst>
           </a:prstGeom>
           <a:solidFill>
@@ -4073,8 +4196,8 @@
         </p:nvSpPr>
         <p:spPr>
           <a:xfrm>
-            <a:off x="7671816" y="3474720"/>
-            <a:ext cx="1645920" cy="420624"/>
+            <a:off x="1490472" y="8028432"/>
+            <a:ext cx="2011680" cy="566928"/>
           </a:xfrm>
           <a:prstGeom prst="rect">
             <a:avLst/>
@@ -4093,7 +4216,7 @@
               <a:buNone/>
             </a:pPr>
             <a:r>
-              <a:rPr lang="en-US" sz="1200" dirty="0">
+              <a:rPr lang="en-US" sz="1300" dirty="0">
                 <a:solidFill>
                   <a:srgbClr val="3F4A5C"/>
                 </a:solidFill>
@@ -4103,7 +4226,7 @@
               </a:rPr>
               <a:t>Centro A</a:t>
             </a:r>
-            <a:endParaRPr lang="en-US" sz="1200" dirty="0"/>
+            <a:endParaRPr lang="en-US" sz="1300" dirty="0"/>
           </a:p>
         </p:txBody>
       </p:sp>
@@ -4115,8 +4238,8 @@
         </p:nvSpPr>
         <p:spPr>
           <a:xfrm>
-            <a:off x="7671816" y="3474720"/>
-            <a:ext cx="3127248" cy="420624"/>
+            <a:off x="1490472" y="8028432"/>
+            <a:ext cx="6163056" cy="566928"/>
           </a:xfrm>
           <a:prstGeom prst="rect">
             <a:avLst/>
@@ -4135,7 +4258,7 @@
               <a:buNone/>
             </a:pPr>
             <a:r>
-              <a:rPr lang="en-US" sz="1200" b="1" dirty="0">
+              <a:rPr lang="en-US" sz="1300" b="1" dirty="0">
                 <a:solidFill>
                   <a:srgbClr val="3F4A5C"/>
                 </a:solidFill>
@@ -4145,7 +4268,7 @@
               </a:rPr>
               <a:t>$30.000</a:t>
             </a:r>
-            <a:endParaRPr lang="en-US" sz="1200" dirty="0"/>
+            <a:endParaRPr lang="en-US" sz="1300" dirty="0"/>
           </a:p>
         </p:txBody>
       </p:sp>
@@ -4157,12 +4280,12 @@
         </p:nvSpPr>
         <p:spPr>
           <a:xfrm>
-            <a:off x="7470648" y="3986784"/>
-            <a:ext cx="3547872" cy="420624"/>
+            <a:off x="1234440" y="8705088"/>
+            <a:ext cx="6675120" cy="566928"/>
           </a:xfrm>
           <a:prstGeom prst="roundRect">
             <a:avLst>
-              <a:gd name="adj" fmla="val 21739"/>
+              <a:gd name="adj" fmla="val 19355"/>
             </a:avLst>
           </a:prstGeom>
           <a:solidFill>
@@ -4184,8 +4307,8 @@
         </p:nvSpPr>
         <p:spPr>
           <a:xfrm>
-            <a:off x="7671816" y="3986784"/>
-            <a:ext cx="1645920" cy="420624"/>
+            <a:off x="1490472" y="8705088"/>
+            <a:ext cx="2011680" cy="566928"/>
           </a:xfrm>
           <a:prstGeom prst="rect">
             <a:avLst/>
@@ -4204,7 +4327,7 @@
               <a:buNone/>
             </a:pPr>
             <a:r>
-              <a:rPr lang="en-US" sz="1200" b="1" dirty="0">
+              <a:rPr lang="en-US" sz="1300" b="1" dirty="0">
                 <a:solidFill>
                   <a:srgbClr val="0F172A"/>
                 </a:solidFill>
@@ -4214,7 +4337,7 @@
               </a:rPr>
               <a:t>Centro B</a:t>
             </a:r>
-            <a:endParaRPr lang="en-US" sz="1200" dirty="0"/>
+            <a:endParaRPr lang="en-US" sz="1300" dirty="0"/>
           </a:p>
         </p:txBody>
       </p:sp>
@@ -4226,8 +4349,8 @@
         </p:nvSpPr>
         <p:spPr>
           <a:xfrm>
-            <a:off x="7671816" y="3986784"/>
-            <a:ext cx="3127248" cy="420624"/>
+            <a:off x="1490472" y="8705088"/>
+            <a:ext cx="6163056" cy="566928"/>
           </a:xfrm>
           <a:prstGeom prst="rect">
             <a:avLst/>
@@ -4246,7 +4369,7 @@
               <a:buNone/>
             </a:pPr>
             <a:r>
-              <a:rPr lang="en-US" sz="1200" b="1" dirty="0">
+              <a:rPr lang="en-US" sz="1300" b="1" dirty="0">
                 <a:solidFill>
                   <a:srgbClr val="16A34A"/>
                 </a:solidFill>
@@ -4256,7 +4379,7 @@
               </a:rPr>
               <a:t>$25.000  ·  menor gasto estimado</a:t>
             </a:r>
-            <a:endParaRPr lang="en-US" sz="1200" dirty="0"/>
+            <a:endParaRPr lang="en-US" sz="1300" dirty="0"/>
           </a:p>
         </p:txBody>
       </p:sp>
@@ -4268,12 +4391,12 @@
         </p:nvSpPr>
         <p:spPr>
           <a:xfrm>
-            <a:off x="7470648" y="4498848"/>
-            <a:ext cx="3547872" cy="420624"/>
+            <a:off x="1234440" y="9381744"/>
+            <a:ext cx="6675120" cy="566928"/>
           </a:xfrm>
           <a:prstGeom prst="roundRect">
             <a:avLst>
-              <a:gd name="adj" fmla="val 21739"/>
+              <a:gd name="adj" fmla="val 19355"/>
             </a:avLst>
           </a:prstGeom>
           <a:solidFill>
@@ -4295,8 +4418,8 @@
         </p:nvSpPr>
         <p:spPr>
           <a:xfrm>
-            <a:off x="7671816" y="4498848"/>
-            <a:ext cx="1645920" cy="420624"/>
+            <a:off x="1490472" y="9381744"/>
+            <a:ext cx="2011680" cy="566928"/>
           </a:xfrm>
           <a:prstGeom prst="rect">
             <a:avLst/>
@@ -4315,7 +4438,7 @@
               <a:buNone/>
             </a:pPr>
             <a:r>
-              <a:rPr lang="en-US" sz="1200" dirty="0">
+              <a:rPr lang="en-US" sz="1300" dirty="0">
                 <a:solidFill>
                   <a:srgbClr val="3F4A5C"/>
                 </a:solidFill>
@@ -4325,7 +4448,7 @@
               </a:rPr>
               <a:t>Centro C</a:t>
             </a:r>
-            <a:endParaRPr lang="en-US" sz="1200" dirty="0"/>
+            <a:endParaRPr lang="en-US" sz="1300" dirty="0"/>
           </a:p>
         </p:txBody>
       </p:sp>
@@ -4337,8 +4460,8 @@
         </p:nvSpPr>
         <p:spPr>
           <a:xfrm>
-            <a:off x="7671816" y="4498848"/>
-            <a:ext cx="3127248" cy="420624"/>
+            <a:off x="1490472" y="9381744"/>
+            <a:ext cx="6163056" cy="566928"/>
           </a:xfrm>
           <a:prstGeom prst="rect">
             <a:avLst/>
@@ -4357,7 +4480,7 @@
               <a:buNone/>
             </a:pPr>
             <a:r>
-              <a:rPr lang="en-US" sz="1200" b="1" dirty="0">
+              <a:rPr lang="en-US" sz="1300" b="1" dirty="0">
                 <a:solidFill>
                   <a:srgbClr val="3F4A5C"/>
                 </a:solidFill>
@@ -4367,7 +4490,7 @@
               </a:rPr>
               <a:t>$35.000</a:t>
             </a:r>
-            <a:endParaRPr lang="en-US" sz="1200" dirty="0"/>
+            <a:endParaRPr lang="en-US" sz="1300" dirty="0"/>
           </a:p>
         </p:txBody>
       </p:sp>
@@ -4379,8 +4502,8 @@
         </p:nvSpPr>
         <p:spPr>
           <a:xfrm>
-            <a:off x="7470648" y="5138928"/>
-            <a:ext cx="3547872" cy="457200"/>
+            <a:off x="1234440" y="10222992"/>
+            <a:ext cx="6675120" cy="365760"/>
           </a:xfrm>
           <a:prstGeom prst="rect">
             <a:avLst/>
@@ -4453,8 +4576,8 @@
         </p:nvSpPr>
         <p:spPr>
           <a:xfrm>
-            <a:off x="777240" y="713232"/>
-            <a:ext cx="6400800" cy="237744"/>
+            <a:off x="777240" y="841248"/>
+            <a:ext cx="7589520" cy="237744"/>
           </a:xfrm>
           <a:prstGeom prst="rect">
             <a:avLst/>
@@ -4495,27 +4618,27 @@
         </p:nvSpPr>
         <p:spPr>
           <a:xfrm>
-            <a:off x="777240" y="1078992"/>
-            <a:ext cx="9692640" cy="1554480"/>
-          </a:xfrm>
-          <a:prstGeom prst="rect">
-            <a:avLst/>
-          </a:prstGeom>
-          <a:noFill/>
-          <a:ln/>
-        </p:spPr>
-        <p:txBody>
-          <a:bodyPr wrap="square" lIns="0" tIns="0" rIns="0" bIns="0" rtlCol="0" anchor="t"/>
-          <a:lstStyle/>
-          <a:p>
-            <a:pPr algn="l" indent="0" marL="0">
-              <a:lnSpc>
-                <a:spcPct val="108000"/>
-              </a:lnSpc>
-              <a:buNone/>
-            </a:pPr>
-            <a:r>
-              <a:rPr lang="en-US" sz="2900" b="1" dirty="0">
+            <a:off x="777240" y="1243584"/>
+            <a:ext cx="7589520" cy="1828800"/>
+          </a:xfrm>
+          <a:prstGeom prst="rect">
+            <a:avLst/>
+          </a:prstGeom>
+          <a:noFill/>
+          <a:ln/>
+        </p:spPr>
+        <p:txBody>
+          <a:bodyPr wrap="square" lIns="0" tIns="0" rIns="0" bIns="0" rtlCol="0" anchor="t"/>
+          <a:lstStyle/>
+          <a:p>
+            <a:pPr algn="l" indent="0" marL="0">
+              <a:lnSpc>
+                <a:spcPct val="110000"/>
+              </a:lnSpc>
+              <a:buNone/>
+            </a:pPr>
+            <a:r>
+              <a:rPr lang="en-US" sz="2700" b="1" dirty="0">
                 <a:solidFill>
                   <a:srgbClr val="0F172A"/>
                 </a:solidFill>
@@ -4525,17 +4648,17 @@
               </a:rPr>
               <a:t>Qué esperamos que aporte,</a:t>
             </a:r>
-            <a:endParaRPr lang="en-US" sz="2900" dirty="0"/>
-          </a:p>
-          <a:p>
-            <a:pPr algn="l" indent="0" marL="0">
-              <a:lnSpc>
-                <a:spcPct val="108000"/>
-              </a:lnSpc>
-              <a:buNone/>
-            </a:pPr>
-            <a:r>
-              <a:rPr lang="en-US" sz="2900" b="1" dirty="0">
+            <a:endParaRPr lang="en-US" sz="2700" dirty="0"/>
+          </a:p>
+          <a:p>
+            <a:pPr algn="l" indent="0" marL="0">
+              <a:lnSpc>
+                <a:spcPct val="110000"/>
+              </a:lnSpc>
+              <a:buNone/>
+            </a:pPr>
+            <a:r>
+              <a:rPr lang="en-US" sz="2700" b="1" dirty="0">
                 <a:solidFill>
                   <a:srgbClr val="0F172A"/>
                 </a:solidFill>
@@ -4545,7 +4668,7 @@
               </a:rPr>
               <a:t>y qué queremos validar.</a:t>
             </a:r>
-            <a:endParaRPr lang="en-US" sz="2900" dirty="0"/>
+            <a:endParaRPr lang="en-US" sz="2700" dirty="0"/>
           </a:p>
         </p:txBody>
       </p:sp>
@@ -4557,8 +4680,8 @@
         </p:nvSpPr>
         <p:spPr>
           <a:xfrm>
-            <a:off x="777240" y="2487168"/>
-            <a:ext cx="9509760" cy="365760"/>
+            <a:off x="777240" y="2834640"/>
+            <a:ext cx="7589520" cy="365760"/>
           </a:xfrm>
           <a:prstGeom prst="rect">
             <a:avLst/>
@@ -4599,12 +4722,12 @@
         </p:nvSpPr>
         <p:spPr>
           <a:xfrm>
-            <a:off x="777240" y="3017520"/>
-            <a:ext cx="3374136" cy="1481328"/>
+            <a:off x="777240" y="3657600"/>
+            <a:ext cx="7589520" cy="1417320"/>
           </a:xfrm>
           <a:prstGeom prst="roundRect">
             <a:avLst>
-              <a:gd name="adj" fmla="val 8642"/>
+              <a:gd name="adj" fmla="val 9032"/>
             </a:avLst>
           </a:prstGeom>
           <a:solidFill>
@@ -4626,8 +4749,8 @@
         </p:nvSpPr>
         <p:spPr>
           <a:xfrm>
-            <a:off x="1051560" y="3291840"/>
-            <a:ext cx="2825496" cy="274320"/>
+            <a:off x="1106424" y="3968496"/>
+            <a:ext cx="6931152" cy="310896"/>
           </a:xfrm>
           <a:prstGeom prst="rect">
             <a:avLst/>
@@ -4646,7 +4769,7 @@
               <a:buNone/>
             </a:pPr>
             <a:r>
-              <a:rPr lang="en-US" sz="1450" b="1" dirty="0">
+              <a:rPr lang="en-US" sz="1500" b="1" dirty="0">
                 <a:solidFill>
                   <a:srgbClr val="2C3E5D"/>
                 </a:solidFill>
@@ -4656,7 +4779,7 @@
               </a:rPr>
               <a:t>Para el colaborador</a:t>
             </a:r>
-            <a:endParaRPr lang="en-US" sz="1450" dirty="0"/>
+            <a:endParaRPr lang="en-US" sz="1500" dirty="0"/>
           </a:p>
         </p:txBody>
       </p:sp>
@@ -4668,8 +4791,8 @@
         </p:nvSpPr>
         <p:spPr>
           <a:xfrm>
-            <a:off x="1051560" y="3657600"/>
-            <a:ext cx="2825496" cy="749808"/>
+            <a:off x="1106424" y="4407408"/>
+            <a:ext cx="6931152" cy="548640"/>
           </a:xfrm>
           <a:prstGeom prst="rect">
             <a:avLst/>
@@ -4688,7 +4811,7 @@
               <a:buNone/>
             </a:pPr>
             <a:r>
-              <a:rPr lang="en-US" sz="1150" dirty="0">
+              <a:rPr lang="en-US" sz="1250" dirty="0">
                 <a:solidFill>
                   <a:srgbClr val="3F4A5C"/>
                 </a:solidFill>
@@ -4698,7 +4821,7 @@
               </a:rPr>
               <a:t>Mayor claridad sobre sus coberturas, los gastos estimados y los próximos pasos.</a:t>
             </a:r>
-            <a:endParaRPr lang="en-US" sz="1150" dirty="0"/>
+            <a:endParaRPr lang="en-US" sz="1250" dirty="0"/>
           </a:p>
         </p:txBody>
       </p:sp>
@@ -4710,12 +4833,12 @@
         </p:nvSpPr>
         <p:spPr>
           <a:xfrm>
-            <a:off x="4407408" y="3017520"/>
-            <a:ext cx="3374136" cy="1481328"/>
+            <a:off x="777240" y="5349240"/>
+            <a:ext cx="7589520" cy="1417320"/>
           </a:xfrm>
           <a:prstGeom prst="roundRect">
             <a:avLst>
-              <a:gd name="adj" fmla="val 8642"/>
+              <a:gd name="adj" fmla="val 9032"/>
             </a:avLst>
           </a:prstGeom>
           <a:solidFill>
@@ -4737,8 +4860,8 @@
         </p:nvSpPr>
         <p:spPr>
           <a:xfrm>
-            <a:off x="4681728" y="3291840"/>
-            <a:ext cx="2825496" cy="274320"/>
+            <a:off x="1106424" y="5660136"/>
+            <a:ext cx="6931152" cy="310896"/>
           </a:xfrm>
           <a:prstGeom prst="rect">
             <a:avLst/>
@@ -4757,7 +4880,7 @@
               <a:buNone/>
             </a:pPr>
             <a:r>
-              <a:rPr lang="en-US" sz="1450" b="1" dirty="0">
+              <a:rPr lang="en-US" sz="1500" b="1" dirty="0">
                 <a:solidFill>
                   <a:srgbClr val="2C3E5D"/>
                 </a:solidFill>
@@ -4767,7 +4890,7 @@
               </a:rPr>
               <a:t>Para Recursos Humanos</a:t>
             </a:r>
-            <a:endParaRPr lang="en-US" sz="1450" dirty="0"/>
+            <a:endParaRPr lang="en-US" sz="1500" dirty="0"/>
           </a:p>
         </p:txBody>
       </p:sp>
@@ -4779,8 +4902,8 @@
         </p:nvSpPr>
         <p:spPr>
           <a:xfrm>
-            <a:off x="4681728" y="3657600"/>
-            <a:ext cx="2825496" cy="749808"/>
+            <a:off x="1106424" y="6099048"/>
+            <a:ext cx="6931152" cy="548640"/>
           </a:xfrm>
           <a:prstGeom prst="rect">
             <a:avLst/>
@@ -4799,7 +4922,7 @@
               <a:buNone/>
             </a:pPr>
             <a:r>
-              <a:rPr lang="en-US" sz="1150" dirty="0">
+              <a:rPr lang="en-US" sz="1250" dirty="0">
                 <a:solidFill>
                   <a:srgbClr val="3F4A5C"/>
                 </a:solidFill>
@@ -4809,7 +4932,7 @@
               </a:rPr>
               <a:t>Información agregada para evaluar adopción y utilización del beneficio.</a:t>
             </a:r>
-            <a:endParaRPr lang="en-US" sz="1150" dirty="0"/>
+            <a:endParaRPr lang="en-US" sz="1250" dirty="0"/>
           </a:p>
         </p:txBody>
       </p:sp>
@@ -4821,12 +4944,12 @@
         </p:nvSpPr>
         <p:spPr>
           <a:xfrm>
-            <a:off x="8037576" y="3017520"/>
-            <a:ext cx="3374136" cy="1481328"/>
+            <a:off x="777240" y="7040880"/>
+            <a:ext cx="7589520" cy="1417320"/>
           </a:xfrm>
           <a:prstGeom prst="roundRect">
             <a:avLst>
-              <a:gd name="adj" fmla="val 8642"/>
+              <a:gd name="adj" fmla="val 9032"/>
             </a:avLst>
           </a:prstGeom>
           <a:solidFill>
@@ -4848,8 +4971,8 @@
         </p:nvSpPr>
         <p:spPr>
           <a:xfrm>
-            <a:off x="8311896" y="3291840"/>
-            <a:ext cx="2825496" cy="274320"/>
+            <a:off x="1106424" y="7351776"/>
+            <a:ext cx="6931152" cy="310896"/>
           </a:xfrm>
           <a:prstGeom prst="rect">
             <a:avLst/>
@@ -4868,7 +4991,7 @@
               <a:buNone/>
             </a:pPr>
             <a:r>
-              <a:rPr lang="en-US" sz="1450" b="1" dirty="0">
+              <a:rPr lang="en-US" sz="1500" b="1" dirty="0">
                 <a:solidFill>
                   <a:srgbClr val="2C3E5D"/>
                 </a:solidFill>
@@ -4878,7 +5001,7 @@
               </a:rPr>
               <a:t>Para la empresa</a:t>
             </a:r>
-            <a:endParaRPr lang="en-US" sz="1450" dirty="0"/>
+            <a:endParaRPr lang="en-US" sz="1500" dirty="0"/>
           </a:p>
         </p:txBody>
       </p:sp>
@@ -4890,8 +5013,8 @@
         </p:nvSpPr>
         <p:spPr>
           <a:xfrm>
-            <a:off x="8311896" y="3657600"/>
-            <a:ext cx="2825496" cy="749808"/>
+            <a:off x="1106424" y="7790688"/>
+            <a:ext cx="6931152" cy="548640"/>
           </a:xfrm>
           <a:prstGeom prst="rect">
             <a:avLst/>
@@ -4910,7 +5033,7 @@
               <a:buNone/>
             </a:pPr>
             <a:r>
-              <a:rPr lang="en-US" sz="1150" dirty="0">
+              <a:rPr lang="en-US" sz="1250" dirty="0">
                 <a:solidFill>
                   <a:srgbClr val="3F4A5C"/>
                 </a:solidFill>
@@ -4920,7 +5043,7 @@
               </a:rPr>
               <a:t>Una oportunidad de aumentar el valor percibido de beneficios que ya financia.</a:t>
             </a:r>
-            <a:endParaRPr lang="en-US" sz="1150" dirty="0"/>
+            <a:endParaRPr lang="en-US" sz="1250" dirty="0"/>
           </a:p>
         </p:txBody>
       </p:sp>
@@ -4932,12 +5055,12 @@
         </p:nvSpPr>
         <p:spPr>
           <a:xfrm>
-            <a:off x="777240" y="4828032"/>
-            <a:ext cx="10637215" cy="1371600"/>
+            <a:off x="777240" y="9098280"/>
+            <a:ext cx="7589520" cy="2011680"/>
           </a:xfrm>
           <a:prstGeom prst="roundRect">
             <a:avLst>
-              <a:gd name="adj" fmla="val 10667"/>
+              <a:gd name="adj" fmla="val 7273"/>
             </a:avLst>
           </a:prstGeom>
           <a:solidFill>
@@ -4959,8 +5082,8 @@
         </p:nvSpPr>
         <p:spPr>
           <a:xfrm>
-            <a:off x="1161288" y="5029200"/>
-            <a:ext cx="9869119" cy="237744"/>
+            <a:off x="1234440" y="9418320"/>
+            <a:ext cx="6675120" cy="237744"/>
           </a:xfrm>
           <a:prstGeom prst="rect">
             <a:avLst/>
@@ -5001,22 +5124,22 @@
         </p:nvSpPr>
         <p:spPr>
           <a:xfrm>
-            <a:off x="1161288" y="5358384"/>
-            <a:ext cx="9869119" cy="694944"/>
-          </a:xfrm>
-          <a:prstGeom prst="rect">
-            <a:avLst/>
-          </a:prstGeom>
-          <a:noFill/>
-          <a:ln/>
-        </p:spPr>
-        <p:txBody>
-          <a:bodyPr wrap="square" lIns="0" tIns="0" rIns="0" bIns="0" rtlCol="0" anchor="t"/>
-          <a:lstStyle/>
-          <a:p>
-            <a:pPr algn="l" indent="0" marL="0">
-              <a:lnSpc>
-                <a:spcPct val="130000"/>
+            <a:off x="1234440" y="9802368"/>
+            <a:ext cx="6675120" cy="1005840"/>
+          </a:xfrm>
+          <a:prstGeom prst="rect">
+            <a:avLst/>
+          </a:prstGeom>
+          <a:noFill/>
+          <a:ln/>
+        </p:spPr>
+        <p:txBody>
+          <a:bodyPr wrap="square" lIns="0" tIns="0" rIns="0" bIns="0" rtlCol="0" anchor="t"/>
+          <a:lstStyle/>
+          <a:p>
+            <a:pPr algn="l" indent="0" marL="0">
+              <a:lnSpc>
+                <a:spcPct val="132000"/>
               </a:lnSpc>
               <a:buNone/>
             </a:pPr>
@@ -5033,7 +5156,7 @@
             </a:r>
             <a:pPr algn="l" indent="0" marL="0">
               <a:lnSpc>
-                <a:spcPct val="130000"/>
+                <a:spcPct val="132000"/>
               </a:lnSpc>
               <a:buNone/>
             </a:pPr>
@@ -5092,8 +5215,8 @@
         </p:nvSpPr>
         <p:spPr>
           <a:xfrm>
-            <a:off x="777240" y="713232"/>
-            <a:ext cx="6400800" cy="237744"/>
+            <a:off x="777240" y="841248"/>
+            <a:ext cx="7589520" cy="237744"/>
           </a:xfrm>
           <a:prstGeom prst="rect">
             <a:avLst/>
@@ -5134,27 +5257,27 @@
         </p:nvSpPr>
         <p:spPr>
           <a:xfrm>
-            <a:off x="777240" y="1078992"/>
-            <a:ext cx="10424160" cy="1554480"/>
-          </a:xfrm>
-          <a:prstGeom prst="rect">
-            <a:avLst/>
-          </a:prstGeom>
-          <a:noFill/>
-          <a:ln/>
-        </p:spPr>
-        <p:txBody>
-          <a:bodyPr wrap="square" lIns="0" tIns="0" rIns="0" bIns="0" rtlCol="0" anchor="t"/>
-          <a:lstStyle/>
-          <a:p>
-            <a:pPr algn="l" indent="0" marL="0">
-              <a:lnSpc>
-                <a:spcPct val="108000"/>
-              </a:lnSpc>
-              <a:buNone/>
-            </a:pPr>
-            <a:r>
-              <a:rPr lang="en-US" sz="2600" b="1" dirty="0">
+            <a:off x="777240" y="1243584"/>
+            <a:ext cx="7589520" cy="1828800"/>
+          </a:xfrm>
+          <a:prstGeom prst="rect">
+            <a:avLst/>
+          </a:prstGeom>
+          <a:noFill/>
+          <a:ln/>
+        </p:spPr>
+        <p:txBody>
+          <a:bodyPr wrap="square" lIns="0" tIns="0" rIns="0" bIns="0" rtlCol="0" anchor="t"/>
+          <a:lstStyle/>
+          <a:p>
+            <a:pPr algn="l" indent="0" marL="0">
+              <a:lnSpc>
+                <a:spcPct val="110000"/>
+              </a:lnSpc>
+              <a:buNone/>
+            </a:pPr>
+            <a:r>
+              <a:rPr lang="en-US" sz="2400" b="1" dirty="0">
                 <a:solidFill>
                   <a:srgbClr val="0F172A"/>
                 </a:solidFill>
@@ -5162,19 +5285,19 @@
                 <a:ea typeface="Inter" pitchFamily="34" charset="-122"/>
                 <a:cs typeface="Inter" pitchFamily="34" charset="-120"/>
               </a:rPr>
-              <a:t>El diseño propuesto separa la experiencia individual</a:t>
-            </a:r>
-            <a:endParaRPr lang="en-US" sz="2600" dirty="0"/>
-          </a:p>
-          <a:p>
-            <a:pPr algn="l" indent="0" marL="0">
-              <a:lnSpc>
-                <a:spcPct val="108000"/>
-              </a:lnSpc>
-              <a:buNone/>
-            </a:pPr>
-            <a:r>
-              <a:rPr lang="en-US" sz="2600" b="1" dirty="0">
+              <a:t>El diseño propuesto separa la experiencia</a:t>
+            </a:r>
+            <a:endParaRPr lang="en-US" sz="2400" dirty="0"/>
+          </a:p>
+          <a:p>
+            <a:pPr algn="l" indent="0" marL="0">
+              <a:lnSpc>
+                <a:spcPct val="110000"/>
+              </a:lnSpc>
+              <a:buNone/>
+            </a:pPr>
+            <a:r>
+              <a:rPr lang="en-US" sz="2400" b="1" dirty="0">
                 <a:solidFill>
                   <a:srgbClr val="0F172A"/>
                 </a:solidFill>
@@ -5182,9 +5305,9 @@
                 <a:ea typeface="Inter" pitchFamily="34" charset="-122"/>
                 <a:cs typeface="Inter" pitchFamily="34" charset="-120"/>
               </a:rPr>
-              <a:t>del dashboard corporativo.</a:t>
-            </a:r>
-            <a:endParaRPr lang="en-US" sz="2600" dirty="0"/>
+              <a:t>individual del dashboard corporativo.</a:t>
+            </a:r>
+            <a:endParaRPr lang="en-US" sz="2400" dirty="0"/>
           </a:p>
         </p:txBody>
       </p:sp>
@@ -5196,12 +5319,12 @@
         </p:nvSpPr>
         <p:spPr>
           <a:xfrm>
-            <a:off x="777240" y="2505456"/>
-            <a:ext cx="5138928" cy="2212848"/>
+            <a:off x="777240" y="3017520"/>
+            <a:ext cx="7589520" cy="2560320"/>
           </a:xfrm>
           <a:prstGeom prst="roundRect">
             <a:avLst>
-              <a:gd name="adj" fmla="val 5785"/>
+              <a:gd name="adj" fmla="val 5000"/>
             </a:avLst>
           </a:prstGeom>
           <a:solidFill>
@@ -5223,8 +5346,8 @@
         </p:nvSpPr>
         <p:spPr>
           <a:xfrm>
-            <a:off x="1051560" y="2724912"/>
-            <a:ext cx="4572000" cy="237744"/>
+            <a:off x="1106424" y="3282696"/>
+            <a:ext cx="6931152" cy="237744"/>
           </a:xfrm>
           <a:prstGeom prst="rect">
             <a:avLst/>
@@ -5265,8 +5388,8 @@
         </p:nvSpPr>
         <p:spPr>
           <a:xfrm>
-            <a:off x="1069848" y="3136392"/>
-            <a:ext cx="82296" cy="82296"/>
+            <a:off x="1124712" y="3867912"/>
+            <a:ext cx="91440" cy="91440"/>
           </a:xfrm>
           <a:prstGeom prst="ellipse">
             <a:avLst/>
@@ -5290,8 +5413,8 @@
         </p:nvSpPr>
         <p:spPr>
           <a:xfrm>
-            <a:off x="1271016" y="3054096"/>
-            <a:ext cx="4389120" cy="256032"/>
+            <a:off x="1362456" y="3776472"/>
+            <a:ext cx="6675120" cy="274320"/>
           </a:xfrm>
           <a:prstGeom prst="rect">
             <a:avLst/>
@@ -5310,7 +5433,7 @@
               <a:buNone/>
             </a:pPr>
             <a:r>
-              <a:rPr lang="en-US" sz="1150" dirty="0">
+              <a:rPr lang="en-US" sz="1200" dirty="0">
                 <a:solidFill>
                   <a:srgbClr val="3F4A5C"/>
                 </a:solidFill>
@@ -5320,7 +5443,7 @@
               </a:rPr>
               <a:t>Diagnósticos</a:t>
             </a:r>
-            <a:endParaRPr lang="en-US" sz="1150" dirty="0"/>
+            <a:endParaRPr lang="en-US" sz="1200" dirty="0"/>
           </a:p>
         </p:txBody>
       </p:sp>
@@ -5332,8 +5455,8 @@
         </p:nvSpPr>
         <p:spPr>
           <a:xfrm>
-            <a:off x="1069848" y="3401568"/>
-            <a:ext cx="82296" cy="82296"/>
+            <a:off x="1124712" y="4169664"/>
+            <a:ext cx="91440" cy="91440"/>
           </a:xfrm>
           <a:prstGeom prst="ellipse">
             <a:avLst/>
@@ -5357,8 +5480,8 @@
         </p:nvSpPr>
         <p:spPr>
           <a:xfrm>
-            <a:off x="1271016" y="3319272"/>
-            <a:ext cx="4389120" cy="256032"/>
+            <a:off x="1362456" y="4078224"/>
+            <a:ext cx="6675120" cy="274320"/>
           </a:xfrm>
           <a:prstGeom prst="rect">
             <a:avLst/>
@@ -5377,7 +5500,7 @@
               <a:buNone/>
             </a:pPr>
             <a:r>
-              <a:rPr lang="en-US" sz="1150" dirty="0">
+              <a:rPr lang="en-US" sz="1200" dirty="0">
                 <a:solidFill>
                   <a:srgbClr val="3F4A5C"/>
                 </a:solidFill>
@@ -5387,7 +5510,7 @@
               </a:rPr>
               <a:t>Documentos médicos</a:t>
             </a:r>
-            <a:endParaRPr lang="en-US" sz="1150" dirty="0"/>
+            <a:endParaRPr lang="en-US" sz="1200" dirty="0"/>
           </a:p>
         </p:txBody>
       </p:sp>
@@ -5399,8 +5522,8 @@
         </p:nvSpPr>
         <p:spPr>
           <a:xfrm>
-            <a:off x="1069848" y="3666744"/>
-            <a:ext cx="82296" cy="82296"/>
+            <a:off x="1124712" y="4471416"/>
+            <a:ext cx="91440" cy="91440"/>
           </a:xfrm>
           <a:prstGeom prst="ellipse">
             <a:avLst/>
@@ -5424,8 +5547,8 @@
         </p:nvSpPr>
         <p:spPr>
           <a:xfrm>
-            <a:off x="1271016" y="3584448"/>
-            <a:ext cx="4389120" cy="256032"/>
+            <a:off x="1362456" y="4379976"/>
+            <a:ext cx="6675120" cy="274320"/>
           </a:xfrm>
           <a:prstGeom prst="rect">
             <a:avLst/>
@@ -5444,7 +5567,7 @@
               <a:buNone/>
             </a:pPr>
             <a:r>
-              <a:rPr lang="en-US" sz="1150" dirty="0">
+              <a:rPr lang="en-US" sz="1200" dirty="0">
                 <a:solidFill>
                   <a:srgbClr val="3F4A5C"/>
                 </a:solidFill>
@@ -5454,7 +5577,7 @@
               </a:rPr>
               <a:t>Consultas individuales</a:t>
             </a:r>
-            <a:endParaRPr lang="en-US" sz="1150" dirty="0"/>
+            <a:endParaRPr lang="en-US" sz="1200" dirty="0"/>
           </a:p>
         </p:txBody>
       </p:sp>
@@ -5466,8 +5589,8 @@
         </p:nvSpPr>
         <p:spPr>
           <a:xfrm>
-            <a:off x="1069848" y="3931920"/>
-            <a:ext cx="82296" cy="82296"/>
+            <a:off x="1124712" y="4773168"/>
+            <a:ext cx="91440" cy="91440"/>
           </a:xfrm>
           <a:prstGeom prst="ellipse">
             <a:avLst/>
@@ -5491,8 +5614,8 @@
         </p:nvSpPr>
         <p:spPr>
           <a:xfrm>
-            <a:off x="1271016" y="3849624"/>
-            <a:ext cx="4389120" cy="256032"/>
+            <a:off x="1362456" y="4681728"/>
+            <a:ext cx="6675120" cy="274320"/>
           </a:xfrm>
           <a:prstGeom prst="rect">
             <a:avLst/>
@@ -5511,7 +5634,7 @@
               <a:buNone/>
             </a:pPr>
             <a:r>
-              <a:rPr lang="en-US" sz="1150" dirty="0">
+              <a:rPr lang="en-US" sz="1200" dirty="0">
                 <a:solidFill>
                   <a:srgbClr val="3F4A5C"/>
                 </a:solidFill>
@@ -5521,7 +5644,7 @@
               </a:rPr>
               <a:t>Gastos individuales</a:t>
             </a:r>
-            <a:endParaRPr lang="en-US" sz="1150" dirty="0"/>
+            <a:endParaRPr lang="en-US" sz="1200" dirty="0"/>
           </a:p>
         </p:txBody>
       </p:sp>
@@ -5533,8 +5656,8 @@
         </p:nvSpPr>
         <p:spPr>
           <a:xfrm>
-            <a:off x="1069848" y="4197096"/>
-            <a:ext cx="82296" cy="82296"/>
+            <a:off x="1124712" y="5074920"/>
+            <a:ext cx="91440" cy="91440"/>
           </a:xfrm>
           <a:prstGeom prst="ellipse">
             <a:avLst/>
@@ -5558,8 +5681,8 @@
         </p:nvSpPr>
         <p:spPr>
           <a:xfrm>
-            <a:off x="1271016" y="4114800"/>
-            <a:ext cx="4389120" cy="256032"/>
+            <a:off x="1362456" y="4983480"/>
+            <a:ext cx="6675120" cy="274320"/>
           </a:xfrm>
           <a:prstGeom prst="rect">
             <a:avLst/>
@@ -5578,7 +5701,7 @@
               <a:buNone/>
             </a:pPr>
             <a:r>
-              <a:rPr lang="en-US" sz="1150" dirty="0">
+              <a:rPr lang="en-US" sz="1200" dirty="0">
                 <a:solidFill>
                   <a:srgbClr val="3F4A5C"/>
                 </a:solidFill>
@@ -5588,7 +5711,7 @@
               </a:rPr>
               <a:t>Pólizas personales</a:t>
             </a:r>
-            <a:endParaRPr lang="en-US" sz="1150" dirty="0"/>
+            <a:endParaRPr lang="en-US" sz="1200" dirty="0"/>
           </a:p>
         </p:txBody>
       </p:sp>
@@ -5600,8 +5723,8 @@
         </p:nvSpPr>
         <p:spPr>
           <a:xfrm>
-            <a:off x="1069848" y="4462272"/>
-            <a:ext cx="82296" cy="82296"/>
+            <a:off x="1124712" y="5376672"/>
+            <a:ext cx="91440" cy="91440"/>
           </a:xfrm>
           <a:prstGeom prst="ellipse">
             <a:avLst/>
@@ -5625,8 +5748,8 @@
         </p:nvSpPr>
         <p:spPr>
           <a:xfrm>
-            <a:off x="1271016" y="4379976"/>
-            <a:ext cx="4389120" cy="256032"/>
+            <a:off x="1362456" y="5285232"/>
+            <a:ext cx="6675120" cy="274320"/>
           </a:xfrm>
           <a:prstGeom prst="rect">
             <a:avLst/>
@@ -5645,7 +5768,7 @@
               <a:buNone/>
             </a:pPr>
             <a:r>
-              <a:rPr lang="en-US" sz="1150" dirty="0">
+              <a:rPr lang="en-US" sz="1200" dirty="0">
                 <a:solidFill>
                   <a:srgbClr val="3F4A5C"/>
                 </a:solidFill>
@@ -5655,7 +5778,7 @@
               </a:rPr>
               <a:t>Reembolsos individuales</a:t>
             </a:r>
-            <a:endParaRPr lang="en-US" sz="1150" dirty="0"/>
+            <a:endParaRPr lang="en-US" sz="1200" dirty="0"/>
           </a:p>
         </p:txBody>
       </p:sp>
@@ -5667,12 +5790,12 @@
         </p:nvSpPr>
         <p:spPr>
           <a:xfrm>
-            <a:off x="6172200" y="2505456"/>
-            <a:ext cx="5129784" cy="2212848"/>
+            <a:off x="777240" y="5897880"/>
+            <a:ext cx="7589520" cy="2331720"/>
           </a:xfrm>
           <a:prstGeom prst="roundRect">
             <a:avLst>
-              <a:gd name="adj" fmla="val 5785"/>
+              <a:gd name="adj" fmla="val 5490"/>
             </a:avLst>
           </a:prstGeom>
           <a:solidFill>
@@ -5694,8 +5817,8 @@
         </p:nvSpPr>
         <p:spPr>
           <a:xfrm>
-            <a:off x="6446520" y="2724912"/>
-            <a:ext cx="4572000" cy="237744"/>
+            <a:off x="1106424" y="6163056"/>
+            <a:ext cx="6931152" cy="237744"/>
           </a:xfrm>
           <a:prstGeom prst="rect">
             <a:avLst/>
@@ -5736,8 +5859,8 @@
         </p:nvSpPr>
         <p:spPr>
           <a:xfrm>
-            <a:off x="6464808" y="3136392"/>
-            <a:ext cx="82296" cy="82296"/>
+            <a:off x="1124712" y="6748272"/>
+            <a:ext cx="91440" cy="91440"/>
           </a:xfrm>
           <a:prstGeom prst="ellipse">
             <a:avLst/>
@@ -5761,27 +5884,27 @@
         </p:nvSpPr>
         <p:spPr>
           <a:xfrm>
-            <a:off x="6665976" y="3054096"/>
-            <a:ext cx="4389120" cy="310896"/>
-          </a:xfrm>
-          <a:prstGeom prst="rect">
-            <a:avLst/>
-          </a:prstGeom>
-          <a:noFill/>
-          <a:ln/>
-        </p:spPr>
-        <p:txBody>
-          <a:bodyPr wrap="square" lIns="0" tIns="0" rIns="0" bIns="0" rtlCol="0" anchor="t"/>
-          <a:lstStyle/>
-          <a:p>
-            <a:pPr algn="l" indent="0" marL="0">
-              <a:lnSpc>
-                <a:spcPct val="114000"/>
-              </a:lnSpc>
-              <a:buNone/>
-            </a:pPr>
-            <a:r>
-              <a:rPr lang="en-US" sz="1150" dirty="0">
+            <a:off x="1362456" y="6656832"/>
+            <a:ext cx="6675120" cy="274320"/>
+          </a:xfrm>
+          <a:prstGeom prst="rect">
+            <a:avLst/>
+          </a:prstGeom>
+          <a:noFill/>
+          <a:ln/>
+        </p:spPr>
+        <p:txBody>
+          <a:bodyPr wrap="square" lIns="0" tIns="0" rIns="0" bIns="0" rtlCol="0" anchor="t"/>
+          <a:lstStyle/>
+          <a:p>
+            <a:pPr algn="l" indent="0" marL="0">
+              <a:lnSpc>
+                <a:spcPct val="120000"/>
+              </a:lnSpc>
+              <a:buNone/>
+            </a:pPr>
+            <a:r>
+              <a:rPr lang="en-US" sz="1200" dirty="0">
                 <a:solidFill>
                   <a:srgbClr val="3F4A5C"/>
                 </a:solidFill>
@@ -5791,7 +5914,7 @@
               </a:rPr>
               <a:t>Activación</a:t>
             </a:r>
-            <a:endParaRPr lang="en-US" sz="1150" dirty="0"/>
+            <a:endParaRPr lang="en-US" sz="1200" dirty="0"/>
           </a:p>
         </p:txBody>
       </p:sp>
@@ -5803,8 +5926,8 @@
         </p:nvSpPr>
         <p:spPr>
           <a:xfrm>
-            <a:off x="6464808" y="3401568"/>
-            <a:ext cx="82296" cy="82296"/>
+            <a:off x="1124712" y="7050024"/>
+            <a:ext cx="91440" cy="91440"/>
           </a:xfrm>
           <a:prstGeom prst="ellipse">
             <a:avLst/>
@@ -5828,27 +5951,27 @@
         </p:nvSpPr>
         <p:spPr>
           <a:xfrm>
-            <a:off x="6665976" y="3319272"/>
-            <a:ext cx="4389120" cy="310896"/>
-          </a:xfrm>
-          <a:prstGeom prst="rect">
-            <a:avLst/>
-          </a:prstGeom>
-          <a:noFill/>
-          <a:ln/>
-        </p:spPr>
-        <p:txBody>
-          <a:bodyPr wrap="square" lIns="0" tIns="0" rIns="0" bIns="0" rtlCol="0" anchor="t"/>
-          <a:lstStyle/>
-          <a:p>
-            <a:pPr algn="l" indent="0" marL="0">
-              <a:lnSpc>
-                <a:spcPct val="114000"/>
-              </a:lnSpc>
-              <a:buNone/>
-            </a:pPr>
-            <a:r>
-              <a:rPr lang="en-US" sz="1150" dirty="0">
+            <a:off x="1362456" y="6958584"/>
+            <a:ext cx="6675120" cy="274320"/>
+          </a:xfrm>
+          <a:prstGeom prst="rect">
+            <a:avLst/>
+          </a:prstGeom>
+          <a:noFill/>
+          <a:ln/>
+        </p:spPr>
+        <p:txBody>
+          <a:bodyPr wrap="square" lIns="0" tIns="0" rIns="0" bIns="0" rtlCol="0" anchor="t"/>
+          <a:lstStyle/>
+          <a:p>
+            <a:pPr algn="l" indent="0" marL="0">
+              <a:lnSpc>
+                <a:spcPct val="120000"/>
+              </a:lnSpc>
+              <a:buNone/>
+            </a:pPr>
+            <a:r>
+              <a:rPr lang="en-US" sz="1200" dirty="0">
                 <a:solidFill>
                   <a:srgbClr val="3F4A5C"/>
                 </a:solidFill>
@@ -5858,7 +5981,7 @@
               </a:rPr>
               <a:t>Adopción</a:t>
             </a:r>
-            <a:endParaRPr lang="en-US" sz="1150" dirty="0"/>
+            <a:endParaRPr lang="en-US" sz="1200" dirty="0"/>
           </a:p>
         </p:txBody>
       </p:sp>
@@ -5870,8 +5993,8 @@
         </p:nvSpPr>
         <p:spPr>
           <a:xfrm>
-            <a:off x="6464808" y="3666744"/>
-            <a:ext cx="82296" cy="82296"/>
+            <a:off x="1124712" y="7351776"/>
+            <a:ext cx="91440" cy="91440"/>
           </a:xfrm>
           <a:prstGeom prst="ellipse">
             <a:avLst/>
@@ -5895,27 +6018,27 @@
         </p:nvSpPr>
         <p:spPr>
           <a:xfrm>
-            <a:off x="6665976" y="3584448"/>
-            <a:ext cx="4389120" cy="310896"/>
-          </a:xfrm>
-          <a:prstGeom prst="rect">
-            <a:avLst/>
-          </a:prstGeom>
-          <a:noFill/>
-          <a:ln/>
-        </p:spPr>
-        <p:txBody>
-          <a:bodyPr wrap="square" lIns="0" tIns="0" rIns="0" bIns="0" rtlCol="0" anchor="t"/>
-          <a:lstStyle/>
-          <a:p>
-            <a:pPr algn="l" indent="0" marL="0">
-              <a:lnSpc>
-                <a:spcPct val="114000"/>
-              </a:lnSpc>
-              <a:buNone/>
-            </a:pPr>
-            <a:r>
-              <a:rPr lang="en-US" sz="1150" dirty="0">
+            <a:off x="1362456" y="7260336"/>
+            <a:ext cx="6675120" cy="274320"/>
+          </a:xfrm>
+          <a:prstGeom prst="rect">
+            <a:avLst/>
+          </a:prstGeom>
+          <a:noFill/>
+          <a:ln/>
+        </p:spPr>
+        <p:txBody>
+          <a:bodyPr wrap="square" lIns="0" tIns="0" rIns="0" bIns="0" rtlCol="0" anchor="t"/>
+          <a:lstStyle/>
+          <a:p>
+            <a:pPr algn="l" indent="0" marL="0">
+              <a:lnSpc>
+                <a:spcPct val="120000"/>
+              </a:lnSpc>
+              <a:buNone/>
+            </a:pPr>
+            <a:r>
+              <a:rPr lang="en-US" sz="1200" dirty="0">
                 <a:solidFill>
                   <a:srgbClr val="3F4A5C"/>
                 </a:solidFill>
@@ -5925,7 +6048,7 @@
               </a:rPr>
               <a:t>Utilización agregada</a:t>
             </a:r>
-            <a:endParaRPr lang="en-US" sz="1150" dirty="0"/>
+            <a:endParaRPr lang="en-US" sz="1200" dirty="0"/>
           </a:p>
         </p:txBody>
       </p:sp>
@@ -5937,8 +6060,8 @@
         </p:nvSpPr>
         <p:spPr>
           <a:xfrm>
-            <a:off x="6464808" y="3931920"/>
-            <a:ext cx="82296" cy="82296"/>
+            <a:off x="1124712" y="7653528"/>
+            <a:ext cx="91440" cy="91440"/>
           </a:xfrm>
           <a:prstGeom prst="ellipse">
             <a:avLst/>
@@ -5962,27 +6085,27 @@
         </p:nvSpPr>
         <p:spPr>
           <a:xfrm>
-            <a:off x="6665976" y="3849624"/>
-            <a:ext cx="4389120" cy="310896"/>
-          </a:xfrm>
-          <a:prstGeom prst="rect">
-            <a:avLst/>
-          </a:prstGeom>
-          <a:noFill/>
-          <a:ln/>
-        </p:spPr>
-        <p:txBody>
-          <a:bodyPr wrap="square" lIns="0" tIns="0" rIns="0" bIns="0" rtlCol="0" anchor="t"/>
-          <a:lstStyle/>
-          <a:p>
-            <a:pPr algn="l" indent="0" marL="0">
-              <a:lnSpc>
-                <a:spcPct val="114000"/>
-              </a:lnSpc>
-              <a:buNone/>
-            </a:pPr>
-            <a:r>
-              <a:rPr lang="en-US" sz="1150" dirty="0">
+            <a:off x="1362456" y="7562088"/>
+            <a:ext cx="6675120" cy="274320"/>
+          </a:xfrm>
+          <a:prstGeom prst="rect">
+            <a:avLst/>
+          </a:prstGeom>
+          <a:noFill/>
+          <a:ln/>
+        </p:spPr>
+        <p:txBody>
+          <a:bodyPr wrap="square" lIns="0" tIns="0" rIns="0" bIns="0" rtlCol="0" anchor="t"/>
+          <a:lstStyle/>
+          <a:p>
+            <a:pPr algn="l" indent="0" marL="0">
+              <a:lnSpc>
+                <a:spcPct val="120000"/>
+              </a:lnSpc>
+              <a:buNone/>
+            </a:pPr>
+            <a:r>
+              <a:rPr lang="en-US" sz="1200" dirty="0">
                 <a:solidFill>
                   <a:srgbClr val="3F4A5C"/>
                 </a:solidFill>
@@ -5992,7 +6115,7 @@
               </a:rPr>
               <a:t>Indicadores económicos agregados</a:t>
             </a:r>
-            <a:endParaRPr lang="en-US" sz="1150" dirty="0"/>
+            <a:endParaRPr lang="en-US" sz="1200" dirty="0"/>
           </a:p>
         </p:txBody>
       </p:sp>
@@ -6004,8 +6127,8 @@
         </p:nvSpPr>
         <p:spPr>
           <a:xfrm>
-            <a:off x="6464808" y="4197096"/>
-            <a:ext cx="82296" cy="82296"/>
+            <a:off x="1124712" y="7955280"/>
+            <a:ext cx="91440" cy="91440"/>
           </a:xfrm>
           <a:prstGeom prst="ellipse">
             <a:avLst/>
@@ -6029,27 +6152,27 @@
         </p:nvSpPr>
         <p:spPr>
           <a:xfrm>
-            <a:off x="6665976" y="4114800"/>
-            <a:ext cx="4389120" cy="310896"/>
-          </a:xfrm>
-          <a:prstGeom prst="rect">
-            <a:avLst/>
-          </a:prstGeom>
-          <a:noFill/>
-          <a:ln/>
-        </p:spPr>
-        <p:txBody>
-          <a:bodyPr wrap="square" lIns="0" tIns="0" rIns="0" bIns="0" rtlCol="0" anchor="t"/>
-          <a:lstStyle/>
-          <a:p>
-            <a:pPr algn="l" indent="0" marL="0">
-              <a:lnSpc>
-                <a:spcPct val="114000"/>
-              </a:lnSpc>
-              <a:buNone/>
-            </a:pPr>
-            <a:r>
-              <a:rPr lang="en-US" sz="1150" dirty="0">
+            <a:off x="1362456" y="7863840"/>
+            <a:ext cx="6675120" cy="274320"/>
+          </a:xfrm>
+          <a:prstGeom prst="rect">
+            <a:avLst/>
+          </a:prstGeom>
+          <a:noFill/>
+          <a:ln/>
+        </p:spPr>
+        <p:txBody>
+          <a:bodyPr wrap="square" lIns="0" tIns="0" rIns="0" bIns="0" rtlCol="0" anchor="t"/>
+          <a:lstStyle/>
+          <a:p>
+            <a:pPr algn="l" indent="0" marL="0">
+              <a:lnSpc>
+                <a:spcPct val="120000"/>
+              </a:lnSpc>
+              <a:buNone/>
+            </a:pPr>
+            <a:r>
+              <a:rPr lang="en-US" sz="1200" dirty="0">
                 <a:solidFill>
                   <a:srgbClr val="3F4A5C"/>
                 </a:solidFill>
@@ -6059,7 +6182,7 @@
               </a:rPr>
               <a:t>Información anonimizada o suprimida conforme al diseño definitivo</a:t>
             </a:r>
-            <a:endParaRPr lang="en-US" sz="1150" dirty="0"/>
+            <a:endParaRPr lang="en-US" sz="1200" dirty="0"/>
           </a:p>
         </p:txBody>
       </p:sp>
@@ -6071,7 +6194,7 @@
         </p:nvSpPr>
         <p:spPr>
           <a:xfrm>
-            <a:off x="777240" y="4901184"/>
+            <a:off x="777240" y="8641080"/>
             <a:ext cx="4572000" cy="274320"/>
           </a:xfrm>
           <a:prstGeom prst="rect">
@@ -6091,7 +6214,7 @@
               <a:buNone/>
             </a:pPr>
             <a:r>
-              <a:rPr lang="en-US" sz="1450" b="1" dirty="0">
+              <a:rPr lang="en-US" sz="1500" b="1" dirty="0">
                 <a:solidFill>
                   <a:srgbClr val="0F172A"/>
                 </a:solidFill>
@@ -6101,7 +6224,7 @@
               </a:rPr>
               <a:t>El mismo registro, dos miradas</a:t>
             </a:r>
-            <a:endParaRPr lang="en-US" sz="1450" dirty="0"/>
+            <a:endParaRPr lang="en-US" sz="1500" dirty="0"/>
           </a:p>
         </p:txBody>
       </p:sp>
@@ -6113,20 +6236,20 @@
         </p:nvSpPr>
         <p:spPr>
           <a:xfrm>
-            <a:off x="3611880" y="4919472"/>
-            <a:ext cx="3657600" cy="256032"/>
-          </a:xfrm>
-          <a:prstGeom prst="rect">
-            <a:avLst/>
-          </a:prstGeom>
-          <a:noFill/>
-          <a:ln/>
-        </p:spPr>
-        <p:txBody>
-          <a:bodyPr wrap="square" lIns="0" tIns="0" rIns="0" bIns="0" rtlCol="0" anchor="t"/>
-          <a:lstStyle/>
-          <a:p>
-            <a:pPr algn="l" indent="0" marL="0">
+            <a:off x="4434840" y="8677656"/>
+            <a:ext cx="3931920" cy="256032"/>
+          </a:xfrm>
+          <a:prstGeom prst="rect">
+            <a:avLst/>
+          </a:prstGeom>
+          <a:noFill/>
+          <a:ln/>
+        </p:spPr>
+        <p:txBody>
+          <a:bodyPr wrap="square" lIns="0" tIns="0" rIns="0" bIns="0" rtlCol="0" anchor="t"/>
+          <a:lstStyle/>
+          <a:p>
+            <a:pPr algn="r" indent="0" marL="0">
               <a:lnSpc>
                 <a:spcPct val="120000"/>
               </a:lnSpc>
@@ -6155,12 +6278,12 @@
         </p:nvSpPr>
         <p:spPr>
           <a:xfrm>
-            <a:off x="777240" y="5266944"/>
-            <a:ext cx="5138928" cy="932688"/>
+            <a:off x="777240" y="9144000"/>
+            <a:ext cx="3657600" cy="1600200"/>
           </a:xfrm>
           <a:prstGeom prst="roundRect">
             <a:avLst>
-              <a:gd name="adj" fmla="val 13725"/>
+              <a:gd name="adj" fmla="val 8000"/>
             </a:avLst>
           </a:prstGeom>
           <a:solidFill>
@@ -6182,8 +6305,8 @@
         </p:nvSpPr>
         <p:spPr>
           <a:xfrm>
-            <a:off x="1014984" y="5394960"/>
-            <a:ext cx="2194560" cy="219456"/>
+            <a:off x="1033272" y="9381744"/>
+            <a:ext cx="3145536" cy="219456"/>
           </a:xfrm>
           <a:prstGeom prst="rect">
             <a:avLst/>
@@ -6224,8 +6347,8 @@
         </p:nvSpPr>
         <p:spPr>
           <a:xfrm>
-            <a:off x="1014984" y="5650992"/>
-            <a:ext cx="1463040" cy="182880"/>
+            <a:off x="1033272" y="9784080"/>
+            <a:ext cx="1280160" cy="219456"/>
           </a:xfrm>
           <a:prstGeom prst="rect">
             <a:avLst/>
@@ -6266,8 +6389,8 @@
         </p:nvSpPr>
         <p:spPr>
           <a:xfrm>
-            <a:off x="2514600" y="5650992"/>
-            <a:ext cx="3200400" cy="182880"/>
+            <a:off x="2258568" y="9784080"/>
+            <a:ext cx="1920240" cy="219456"/>
           </a:xfrm>
           <a:prstGeom prst="rect">
             <a:avLst/>
@@ -6308,8 +6431,8 @@
         </p:nvSpPr>
         <p:spPr>
           <a:xfrm>
-            <a:off x="1014984" y="5833872"/>
-            <a:ext cx="1463040" cy="182880"/>
+            <a:off x="1033272" y="10058400"/>
+            <a:ext cx="1280160" cy="219456"/>
           </a:xfrm>
           <a:prstGeom prst="rect">
             <a:avLst/>
@@ -6350,8 +6473,8 @@
         </p:nvSpPr>
         <p:spPr>
           <a:xfrm>
-            <a:off x="2514600" y="5833872"/>
-            <a:ext cx="3200400" cy="182880"/>
+            <a:off x="2258568" y="10058400"/>
+            <a:ext cx="1920240" cy="219456"/>
           </a:xfrm>
           <a:prstGeom prst="rect">
             <a:avLst/>
@@ -6392,8 +6515,8 @@
         </p:nvSpPr>
         <p:spPr>
           <a:xfrm>
-            <a:off x="1014984" y="6016752"/>
-            <a:ext cx="1463040" cy="182880"/>
+            <a:off x="1033272" y="10332720"/>
+            <a:ext cx="1280160" cy="219456"/>
           </a:xfrm>
           <a:prstGeom prst="rect">
             <a:avLst/>
@@ -6434,8 +6557,8 @@
         </p:nvSpPr>
         <p:spPr>
           <a:xfrm>
-            <a:off x="2514600" y="6016752"/>
-            <a:ext cx="3200400" cy="182880"/>
+            <a:off x="2258568" y="10332720"/>
+            <a:ext cx="1920240" cy="219456"/>
           </a:xfrm>
           <a:prstGeom prst="rect">
             <a:avLst/>
@@ -6476,12 +6599,12 @@
         </p:nvSpPr>
         <p:spPr>
           <a:xfrm>
-            <a:off x="6172200" y="5266944"/>
-            <a:ext cx="5129784" cy="932688"/>
+            <a:off x="4709160" y="9144000"/>
+            <a:ext cx="3657600" cy="1600200"/>
           </a:xfrm>
           <a:prstGeom prst="roundRect">
             <a:avLst>
-              <a:gd name="adj" fmla="val 13725"/>
+              <a:gd name="adj" fmla="val 8000"/>
             </a:avLst>
           </a:prstGeom>
           <a:solidFill>
@@ -6503,8 +6626,8 @@
         </p:nvSpPr>
         <p:spPr>
           <a:xfrm>
-            <a:off x="6409944" y="5394960"/>
-            <a:ext cx="2377440" cy="219456"/>
+            <a:off x="4965192" y="9381744"/>
+            <a:ext cx="3145536" cy="219456"/>
           </a:xfrm>
           <a:prstGeom prst="rect">
             <a:avLst/>
@@ -6545,8 +6668,8 @@
         </p:nvSpPr>
         <p:spPr>
           <a:xfrm>
-            <a:off x="6409944" y="5650992"/>
-            <a:ext cx="1463040" cy="182880"/>
+            <a:off x="4965192" y="9784080"/>
+            <a:ext cx="1280160" cy="219456"/>
           </a:xfrm>
           <a:prstGeom prst="rect">
             <a:avLst/>
@@ -6587,8 +6710,50 @@
         </p:nvSpPr>
         <p:spPr>
           <a:xfrm>
-            <a:off x="7909560" y="5650992"/>
-            <a:ext cx="3200400" cy="182880"/>
+            <a:off x="6190488" y="9784080"/>
+            <a:ext cx="1920240" cy="274320"/>
+          </a:xfrm>
+          <a:prstGeom prst="rect">
+            <a:avLst/>
+          </a:prstGeom>
+          <a:noFill/>
+          <a:ln/>
+        </p:spPr>
+        <p:txBody>
+          <a:bodyPr wrap="square" lIns="0" tIns="0" rIns="0" bIns="0" rtlCol="0" anchor="t"/>
+          <a:lstStyle/>
+          <a:p>
+            <a:pPr algn="l" indent="0" marL="0">
+              <a:lnSpc>
+                <a:spcPct val="114000"/>
+              </a:lnSpc>
+              <a:buNone/>
+            </a:pPr>
+            <a:r>
+              <a:rPr lang="en-US" sz="1000" dirty="0">
+                <a:solidFill>
+                  <a:srgbClr val="6B7686"/>
+                </a:solidFill>
+                <a:latin typeface="Inter" pitchFamily="34" charset="0"/>
+                <a:ea typeface="Inter" pitchFamily="34" charset="-122"/>
+                <a:cs typeface="Inter" pitchFamily="34" charset="-120"/>
+              </a:rPr>
+              <a:t>No disponible</a:t>
+            </a:r>
+            <a:endParaRPr lang="en-US" sz="1000" dirty="0"/>
+          </a:p>
+        </p:txBody>
+      </p:sp>
+      <p:sp>
+        <p:nvSpPr>
+          <p:cNvPr id="44" name="Text 42"/>
+          <p:cNvSpPr txBox="1"/>
+          <p:nvPr/>
+        </p:nvSpPr>
+        <p:spPr>
+          <a:xfrm>
+            <a:off x="4965192" y="10058400"/>
+            <a:ext cx="1280160" cy="219456"/>
           </a:xfrm>
           <a:prstGeom prst="rect">
             <a:avLst/>
@@ -6615,6 +6780,48 @@
                 <a:ea typeface="Inter" pitchFamily="34" charset="-122"/>
                 <a:cs typeface="Inter" pitchFamily="34" charset="-120"/>
               </a:rPr>
+              <a:t>Prestación</a:t>
+            </a:r>
+            <a:endParaRPr lang="en-US" sz="1000" dirty="0"/>
+          </a:p>
+        </p:txBody>
+      </p:sp>
+      <p:sp>
+        <p:nvSpPr>
+          <p:cNvPr id="45" name="Text 43"/>
+          <p:cNvSpPr txBox="1"/>
+          <p:nvPr/>
+        </p:nvSpPr>
+        <p:spPr>
+          <a:xfrm>
+            <a:off x="6190488" y="10058400"/>
+            <a:ext cx="1920240" cy="274320"/>
+          </a:xfrm>
+          <a:prstGeom prst="rect">
+            <a:avLst/>
+          </a:prstGeom>
+          <a:noFill/>
+          <a:ln/>
+        </p:spPr>
+        <p:txBody>
+          <a:bodyPr wrap="square" lIns="0" tIns="0" rIns="0" bIns="0" rtlCol="0" anchor="t"/>
+          <a:lstStyle/>
+          <a:p>
+            <a:pPr algn="l" indent="0" marL="0">
+              <a:lnSpc>
+                <a:spcPct val="114000"/>
+              </a:lnSpc>
+              <a:buNone/>
+            </a:pPr>
+            <a:r>
+              <a:rPr lang="en-US" sz="1000" dirty="0">
+                <a:solidFill>
+                  <a:srgbClr val="6B7686"/>
+                </a:solidFill>
+                <a:latin typeface="Inter" pitchFamily="34" charset="0"/>
+                <a:ea typeface="Inter" pitchFamily="34" charset="-122"/>
+                <a:cs typeface="Inter" pitchFamily="34" charset="-120"/>
+              </a:rPr>
               <a:t>No disponible</a:t>
             </a:r>
             <a:endParaRPr lang="en-US" sz="1000" dirty="0"/>
@@ -6623,14 +6830,14 @@
       </p:sp>
       <p:sp>
         <p:nvSpPr>
-          <p:cNvPr id="44" name="Text 42"/>
-          <p:cNvSpPr txBox="1"/>
-          <p:nvPr/>
-        </p:nvSpPr>
-        <p:spPr>
-          <a:xfrm>
-            <a:off x="6409944" y="5833872"/>
-            <a:ext cx="1463040" cy="182880"/>
+          <p:cNvPr id="46" name="Text 44"/>
+          <p:cNvSpPr txBox="1"/>
+          <p:nvPr/>
+        </p:nvSpPr>
+        <p:spPr>
+          <a:xfrm>
+            <a:off x="4965192" y="10332720"/>
+            <a:ext cx="1280160" cy="219456"/>
           </a:xfrm>
           <a:prstGeom prst="rect">
             <a:avLst/>
@@ -6657,7 +6864,7 @@
                 <a:ea typeface="Inter" pitchFamily="34" charset="-122"/>
                 <a:cs typeface="Inter" pitchFamily="34" charset="-120"/>
               </a:rPr>
-              <a:t>Prestación</a:t>
+              <a:t>Pago estimado</a:t>
             </a:r>
             <a:endParaRPr lang="en-US" sz="1000" dirty="0"/>
           </a:p>
@@ -6665,28 +6872,28 @@
       </p:sp>
       <p:sp>
         <p:nvSpPr>
-          <p:cNvPr id="45" name="Text 43"/>
-          <p:cNvSpPr txBox="1"/>
-          <p:nvPr/>
-        </p:nvSpPr>
-        <p:spPr>
-          <a:xfrm>
-            <a:off x="7909560" y="5833872"/>
-            <a:ext cx="3200400" cy="182880"/>
-          </a:xfrm>
-          <a:prstGeom prst="rect">
-            <a:avLst/>
-          </a:prstGeom>
-          <a:noFill/>
-          <a:ln/>
-        </p:spPr>
-        <p:txBody>
-          <a:bodyPr wrap="square" lIns="0" tIns="0" rIns="0" bIns="0" rtlCol="0" anchor="t"/>
-          <a:lstStyle/>
-          <a:p>
-            <a:pPr algn="l" indent="0" marL="0">
-              <a:lnSpc>
-                <a:spcPct val="120000"/>
+          <p:cNvPr id="47" name="Text 45"/>
+          <p:cNvSpPr txBox="1"/>
+          <p:nvPr/>
+        </p:nvSpPr>
+        <p:spPr>
+          <a:xfrm>
+            <a:off x="6190488" y="10332720"/>
+            <a:ext cx="1920240" cy="274320"/>
+          </a:xfrm>
+          <a:prstGeom prst="rect">
+            <a:avLst/>
+          </a:prstGeom>
+          <a:noFill/>
+          <a:ln/>
+        </p:spPr>
+        <p:txBody>
+          <a:bodyPr wrap="square" lIns="0" tIns="0" rIns="0" bIns="0" rtlCol="0" anchor="t"/>
+          <a:lstStyle/>
+          <a:p>
+            <a:pPr algn="l" indent="0" marL="0">
+              <a:lnSpc>
+                <a:spcPct val="114000"/>
               </a:lnSpc>
               <a:buNone/>
             </a:pPr>
@@ -6699,7 +6906,7 @@
                 <a:ea typeface="Inter" pitchFamily="34" charset="-122"/>
                 <a:cs typeface="Inter" pitchFamily="34" charset="-120"/>
               </a:rPr>
-              <a:t>No disponible</a:t>
+              <a:t>Incluido en el total agregado</a:t>
             </a:r>
             <a:endParaRPr lang="en-US" sz="1000" dirty="0"/>
           </a:p>
@@ -6707,112 +6914,28 @@
       </p:sp>
       <p:sp>
         <p:nvSpPr>
-          <p:cNvPr id="46" name="Text 44"/>
-          <p:cNvSpPr txBox="1"/>
-          <p:nvPr/>
-        </p:nvSpPr>
-        <p:spPr>
-          <a:xfrm>
-            <a:off x="6409944" y="6016752"/>
-            <a:ext cx="1463040" cy="182880"/>
-          </a:xfrm>
-          <a:prstGeom prst="rect">
-            <a:avLst/>
-          </a:prstGeom>
-          <a:noFill/>
-          <a:ln/>
-        </p:spPr>
-        <p:txBody>
-          <a:bodyPr wrap="square" lIns="0" tIns="0" rIns="0" bIns="0" rtlCol="0" anchor="t"/>
-          <a:lstStyle/>
-          <a:p>
-            <a:pPr algn="l" indent="0" marL="0">
-              <a:lnSpc>
-                <a:spcPct val="120000"/>
-              </a:lnSpc>
-              <a:buNone/>
-            </a:pPr>
-            <a:r>
-              <a:rPr lang="en-US" sz="1000" dirty="0">
-                <a:solidFill>
-                  <a:srgbClr val="6B7686"/>
-                </a:solidFill>
-                <a:latin typeface="Inter" pitchFamily="34" charset="0"/>
-                <a:ea typeface="Inter" pitchFamily="34" charset="-122"/>
-                <a:cs typeface="Inter" pitchFamily="34" charset="-120"/>
-              </a:rPr>
-              <a:t>Pago estimado</a:t>
-            </a:r>
-            <a:endParaRPr lang="en-US" sz="1000" dirty="0"/>
-          </a:p>
-        </p:txBody>
-      </p:sp>
-      <p:sp>
-        <p:nvSpPr>
-          <p:cNvPr id="47" name="Text 45"/>
-          <p:cNvSpPr txBox="1"/>
-          <p:nvPr/>
-        </p:nvSpPr>
-        <p:spPr>
-          <a:xfrm>
-            <a:off x="7909560" y="6016752"/>
-            <a:ext cx="3200400" cy="182880"/>
-          </a:xfrm>
-          <a:prstGeom prst="rect">
-            <a:avLst/>
-          </a:prstGeom>
-          <a:noFill/>
-          <a:ln/>
-        </p:spPr>
-        <p:txBody>
-          <a:bodyPr wrap="square" lIns="0" tIns="0" rIns="0" bIns="0" rtlCol="0" anchor="t"/>
-          <a:lstStyle/>
-          <a:p>
-            <a:pPr algn="l" indent="0" marL="0">
-              <a:lnSpc>
-                <a:spcPct val="120000"/>
-              </a:lnSpc>
-              <a:buNone/>
-            </a:pPr>
-            <a:r>
-              <a:rPr lang="en-US" sz="1000" dirty="0">
-                <a:solidFill>
-                  <a:srgbClr val="6B7686"/>
-                </a:solidFill>
-                <a:latin typeface="Inter" pitchFamily="34" charset="0"/>
-                <a:ea typeface="Inter" pitchFamily="34" charset="-122"/>
-                <a:cs typeface="Inter" pitchFamily="34" charset="-120"/>
-              </a:rPr>
-              <a:t>Incluido en el total agregado</a:t>
-            </a:r>
-            <a:endParaRPr lang="en-US" sz="1000" dirty="0"/>
-          </a:p>
-        </p:txBody>
-      </p:sp>
-      <p:sp>
-        <p:nvSpPr>
           <p:cNvPr id="48" name="Text 46"/>
           <p:cNvSpPr txBox="1"/>
           <p:nvPr/>
         </p:nvSpPr>
         <p:spPr>
           <a:xfrm>
-            <a:off x="777240" y="6364224"/>
-            <a:ext cx="10637215" cy="310896"/>
-          </a:xfrm>
-          <a:prstGeom prst="rect">
-            <a:avLst/>
-          </a:prstGeom>
-          <a:noFill/>
-          <a:ln/>
-        </p:spPr>
-        <p:txBody>
-          <a:bodyPr wrap="square" lIns="0" tIns="0" rIns="0" bIns="0" rtlCol="0" anchor="t"/>
-          <a:lstStyle/>
-          <a:p>
-            <a:pPr algn="l" indent="0" marL="0">
-              <a:lnSpc>
-                <a:spcPct val="122000"/>
+            <a:off x="777240" y="11155680"/>
+            <a:ext cx="7589520" cy="457200"/>
+          </a:xfrm>
+          <a:prstGeom prst="rect">
+            <a:avLst/>
+          </a:prstGeom>
+          <a:noFill/>
+          <a:ln/>
+        </p:spPr>
+        <p:txBody>
+          <a:bodyPr wrap="square" lIns="0" tIns="0" rIns="0" bIns="0" rtlCol="0" anchor="t"/>
+          <a:lstStyle/>
+          <a:p>
+            <a:pPr algn="l" indent="0" marL="0">
+              <a:lnSpc>
+                <a:spcPct val="124000"/>
               </a:lnSpc>
               <a:buNone/>
             </a:pPr>
@@ -6871,8 +6994,8 @@
         </p:nvSpPr>
         <p:spPr>
           <a:xfrm>
-            <a:off x="777240" y="713232"/>
-            <a:ext cx="6400800" cy="237744"/>
+            <a:off x="777240" y="841248"/>
+            <a:ext cx="7589520" cy="237744"/>
           </a:xfrm>
           <a:prstGeom prst="rect">
             <a:avLst/>
@@ -6913,27 +7036,27 @@
         </p:nvSpPr>
         <p:spPr>
           <a:xfrm>
-            <a:off x="777240" y="1078992"/>
-            <a:ext cx="9692640" cy="1554480"/>
-          </a:xfrm>
-          <a:prstGeom prst="rect">
-            <a:avLst/>
-          </a:prstGeom>
-          <a:noFill/>
-          <a:ln/>
-        </p:spPr>
-        <p:txBody>
-          <a:bodyPr wrap="square" lIns="0" tIns="0" rIns="0" bIns="0" rtlCol="0" anchor="t"/>
-          <a:lstStyle/>
-          <a:p>
-            <a:pPr algn="l" indent="0" marL="0">
-              <a:lnSpc>
-                <a:spcPct val="108000"/>
-              </a:lnSpc>
-              <a:buNone/>
-            </a:pPr>
-            <a:r>
-              <a:rPr lang="en-US" sz="2900" b="1" dirty="0">
+            <a:off x="777240" y="1243584"/>
+            <a:ext cx="7589520" cy="1828800"/>
+          </a:xfrm>
+          <a:prstGeom prst="rect">
+            <a:avLst/>
+          </a:prstGeom>
+          <a:noFill/>
+          <a:ln/>
+        </p:spPr>
+        <p:txBody>
+          <a:bodyPr wrap="square" lIns="0" tIns="0" rIns="0" bIns="0" rtlCol="0" anchor="t"/>
+          <a:lstStyle/>
+          <a:p>
+            <a:pPr algn="l" indent="0" marL="0">
+              <a:lnSpc>
+                <a:spcPct val="110000"/>
+              </a:lnSpc>
+              <a:buNone/>
+            </a:pPr>
+            <a:r>
+              <a:rPr lang="en-US" sz="2700" b="1" dirty="0">
                 <a:solidFill>
                   <a:srgbClr val="0F172A"/>
                 </a:solidFill>
@@ -6943,7 +7066,7 @@
               </a:rPr>
               <a:t>Explora el prototipo comercial.</a:t>
             </a:r>
-            <a:endParaRPr lang="en-US" sz="2900" dirty="0"/>
+            <a:endParaRPr lang="en-US" sz="2700" dirty="0"/>
           </a:p>
         </p:txBody>
       </p:sp>
@@ -6955,12 +7078,12 @@
         </p:nvSpPr>
         <p:spPr>
           <a:xfrm>
-            <a:off x="685800" y="2139696"/>
-            <a:ext cx="6967728" cy="3950208"/>
+            <a:off x="667512" y="2331720"/>
+            <a:ext cx="7808976" cy="4965192"/>
           </a:xfrm>
           <a:prstGeom prst="roundRect">
             <a:avLst>
-              <a:gd name="adj" fmla="val 3241"/>
+              <a:gd name="adj" fmla="val 2578"/>
             </a:avLst>
           </a:prstGeom>
           <a:solidFill>
@@ -6996,8 +7119,8 @@
         </p:blipFill>
         <p:spPr>
           <a:xfrm>
-            <a:off x="777240" y="2231136"/>
-            <a:ext cx="6784848" cy="3767328"/>
+            <a:off x="777240" y="2441448"/>
+            <a:ext cx="7589520" cy="4745736"/>
           </a:xfrm>
           <a:prstGeom prst="rect">
             <a:avLst/>
@@ -7012,8 +7135,8 @@
         </p:nvSpPr>
         <p:spPr>
           <a:xfrm>
-            <a:off x="8101584" y="2231136"/>
-            <a:ext cx="3310128" cy="1371600"/>
+            <a:off x="777240" y="7726680"/>
+            <a:ext cx="7589520" cy="822960"/>
           </a:xfrm>
           <a:prstGeom prst="rect">
             <a:avLst/>
@@ -7032,7 +7155,7 @@
               <a:buNone/>
             </a:pPr>
             <a:r>
-              <a:rPr lang="en-US" sz="1250" dirty="0">
+              <a:rPr lang="en-US" sz="1300" dirty="0">
                 <a:solidFill>
                   <a:srgbClr val="3F4A5C"/>
                 </a:solidFill>
@@ -7042,7 +7165,7 @@
               </a:rPr>
               <a:t>El prototipo permite recorrer la experiencia propuesta para María, su familia y Recursos Humanos. Utiliza datos 100% simulados y no está conectado a Isapres, aseguradoras ni prestadores.</a:t>
             </a:r>
-            <a:endParaRPr lang="en-US" sz="1250" dirty="0"/>
+            <a:endParaRPr lang="en-US" sz="1300" dirty="0"/>
           </a:p>
         </p:txBody>
       </p:sp>
@@ -7061,8 +7184,8 @@
         </p:blipFill>
         <p:spPr>
           <a:xfrm>
-            <a:off x="8101584" y="3767328"/>
-            <a:ext cx="1371600" cy="1371600"/>
+            <a:off x="777240" y="8869680"/>
+            <a:ext cx="1463040" cy="1463040"/>
           </a:xfrm>
           <a:prstGeom prst="rect">
             <a:avLst/>
@@ -7077,8 +7200,8 @@
         </p:nvSpPr>
         <p:spPr>
           <a:xfrm>
-            <a:off x="9656064" y="3840480"/>
-            <a:ext cx="1755648" cy="274320"/>
+            <a:off x="2514600" y="9006840"/>
+            <a:ext cx="5852160" cy="274320"/>
           </a:xfrm>
           <a:prstGeom prst="rect">
             <a:avLst/>
@@ -7097,7 +7220,7 @@
               <a:buNone/>
             </a:pPr>
             <a:r>
-              <a:rPr lang="en-US" sz="1100" b="1" dirty="0">
+              <a:rPr lang="en-US" sz="1200" b="1" dirty="0">
                 <a:solidFill>
                   <a:srgbClr val="0F172A"/>
                 </a:solidFill>
@@ -7107,7 +7230,7 @@
               </a:rPr>
               <a:t>Escanea o abre el enlace</a:t>
             </a:r>
-            <a:endParaRPr lang="en-US" sz="1100" dirty="0"/>
+            <a:endParaRPr lang="en-US" sz="1200" dirty="0"/>
           </a:p>
         </p:txBody>
       </p:sp>
@@ -7121,27 +7244,27 @@
         </p:nvSpPr>
         <p:spPr>
           <a:xfrm>
-            <a:off x="9637776" y="4151376"/>
-            <a:ext cx="1810512" cy="640080"/>
-          </a:xfrm>
-          <a:prstGeom prst="rect">
-            <a:avLst/>
-          </a:prstGeom>
-          <a:noFill/>
-          <a:ln/>
-        </p:spPr>
-        <p:txBody>
-          <a:bodyPr wrap="square" lIns="0" tIns="0" rIns="0" bIns="0" rtlCol="0" anchor="t"/>
-          <a:lstStyle/>
-          <a:p>
-            <a:pPr algn="l" indent="0" marL="0">
-              <a:lnSpc>
-                <a:spcPct val="122000"/>
-              </a:lnSpc>
-              <a:buNone/>
-            </a:pPr>
-            <a:r>
-              <a:rPr lang="en-US" sz="1000" u="sng" dirty="0">
+            <a:off x="2514600" y="9345168"/>
+            <a:ext cx="5852160" cy="640080"/>
+          </a:xfrm>
+          <a:prstGeom prst="rect">
+            <a:avLst/>
+          </a:prstGeom>
+          <a:noFill/>
+          <a:ln/>
+        </p:spPr>
+        <p:txBody>
+          <a:bodyPr wrap="square" lIns="0" tIns="0" rIns="0" bIns="0" rtlCol="0" anchor="t"/>
+          <a:lstStyle/>
+          <a:p>
+            <a:pPr algn="l" indent="0" marL="0">
+              <a:lnSpc>
+                <a:spcPct val="124000"/>
+              </a:lnSpc>
+              <a:buNone/>
+            </a:pPr>
+            <a:r>
+              <a:rPr lang="en-US" sz="1100" u="sng" dirty="0">
                 <a:solidFill>
                   <a:srgbClr val="2F6FED"/>
                 </a:solidFill>
@@ -7158,17 +7281,17 @@
               </a:rPr>
               <a:t>claude.ai/artifact/</a:t>
             </a:r>
-            <a:endParaRPr lang="en-US" sz="1000" dirty="0"/>
-          </a:p>
-          <a:p>
-            <a:pPr algn="l" indent="0" marL="0">
-              <a:lnSpc>
-                <a:spcPct val="122000"/>
-              </a:lnSpc>
-              <a:buNone/>
-            </a:pPr>
-            <a:r>
-              <a:rPr lang="en-US" sz="1000" u="sng" dirty="0">
+            <a:endParaRPr lang="en-US" sz="1100" dirty="0"/>
+          </a:p>
+          <a:p>
+            <a:pPr algn="l" indent="0" marL="0">
+              <a:lnSpc>
+                <a:spcPct val="124000"/>
+              </a:lnSpc>
+              <a:buNone/>
+            </a:pPr>
+            <a:r>
+              <a:rPr lang="en-US" sz="1100" u="sng" dirty="0">
                 <a:solidFill>
                   <a:srgbClr val="2F6FED"/>
                 </a:solidFill>
@@ -7185,7 +7308,7 @@
               </a:rPr>
               <a:t>NSb5DKAfVGnkGbQdXLfkYX</a:t>
             </a:r>
-            <a:endParaRPr lang="en-US" sz="1000" dirty="0"/>
+            <a:endParaRPr lang="en-US" sz="1100" dirty="0"/>
           </a:p>
         </p:txBody>
       </p:sp>
@@ -7197,12 +7320,12 @@
         </p:nvSpPr>
         <p:spPr>
           <a:xfrm>
-            <a:off x="8101584" y="5321808"/>
-            <a:ext cx="3310128" cy="768096"/>
+            <a:off x="777240" y="10607040"/>
+            <a:ext cx="7589520" cy="749808"/>
           </a:xfrm>
           <a:prstGeom prst="roundRect">
             <a:avLst>
-              <a:gd name="adj" fmla="val 16667"/>
+              <a:gd name="adj" fmla="val 17073"/>
             </a:avLst>
           </a:prstGeom>
           <a:solidFill>
@@ -7224,8 +7347,8 @@
         </p:nvSpPr>
         <p:spPr>
           <a:xfrm>
-            <a:off x="8339328" y="5504688"/>
-            <a:ext cx="2834640" cy="457200"/>
+            <a:off x="1088136" y="10817352"/>
+            <a:ext cx="6967728" cy="365760"/>
           </a:xfrm>
           <a:prstGeom prst="rect">
             <a:avLst/>
@@ -7244,7 +7367,7 @@
               <a:buNone/>
             </a:pPr>
             <a:r>
-              <a:rPr lang="en-US" sz="1050" dirty="0">
+              <a:rPr lang="en-US" sz="1100" dirty="0">
                 <a:solidFill>
                   <a:srgbClr val="3F4A5C"/>
                 </a:solidFill>
@@ -7254,7 +7377,7 @@
               </a:rPr>
               <a:t>Prototipo alojado temporalmente en un entorno de demostración.</a:t>
             </a:r>
-            <a:endParaRPr lang="en-US" sz="1050" dirty="0"/>
+            <a:endParaRPr lang="en-US" sz="1100" dirty="0"/>
           </a:p>
         </p:txBody>
       </p:sp>
@@ -7266,22 +7389,22 @@
         </p:nvSpPr>
         <p:spPr>
           <a:xfrm>
-            <a:off x="777240" y="6345936"/>
-            <a:ext cx="10637215" cy="310896"/>
-          </a:xfrm>
-          <a:prstGeom prst="rect">
-            <a:avLst/>
-          </a:prstGeom>
-          <a:noFill/>
-          <a:ln/>
-        </p:spPr>
-        <p:txBody>
-          <a:bodyPr wrap="square" lIns="0" tIns="0" rIns="0" bIns="0" rtlCol="0" anchor="t"/>
-          <a:lstStyle/>
-          <a:p>
-            <a:pPr algn="l" indent="0" marL="0">
-              <a:lnSpc>
-                <a:spcPct val="122000"/>
+            <a:off x="777240" y="11631168"/>
+            <a:ext cx="7589520" cy="457200"/>
+          </a:xfrm>
+          <a:prstGeom prst="rect">
+            <a:avLst/>
+          </a:prstGeom>
+          <a:noFill/>
+          <a:ln/>
+        </p:spPr>
+        <p:txBody>
+          <a:bodyPr wrap="square" lIns="0" tIns="0" rIns="0" bIns="0" rtlCol="0" anchor="t"/>
+          <a:lstStyle/>
+          <a:p>
+            <a:pPr algn="l" indent="0" marL="0">
+              <a:lnSpc>
+                <a:spcPct val="124000"/>
               </a:lnSpc>
               <a:buNone/>
             </a:pPr>
@@ -7332,39 +7455,16 @@
           <a:chExt cx="0" cy="0"/>
         </a:xfrm>
       </p:grpSpPr>
-      <p:pic>
-        <p:nvPicPr>
-          <p:cNvPr id="2" name="Image 0" descr="/home/user/Prototipo-comercial/presentacion/img/fiordos.png">    </p:cNvPr>
-          <p:cNvPicPr>
-            <a:picLocks noChangeAspect="1"/>
-          </p:cNvPicPr>
-          <p:nvPr/>
-        </p:nvPicPr>
-        <p:blipFill>
-          <a:blip r:embed="rId1"/>
-          <a:srcRect l="0" r="0" t="0" b="0"/>
-          <a:stretch/>
-        </p:blipFill>
-        <p:spPr>
-          <a:xfrm>
-            <a:off x="7635240" y="0"/>
-            <a:ext cx="4556455" cy="6858000"/>
-          </a:xfrm>
-          <a:prstGeom prst="rect">
-            <a:avLst/>
-          </a:prstGeom>
-        </p:spPr>
-      </p:pic>
-      <p:sp>
-        <p:nvSpPr>
-          <p:cNvPr id="3" name="Text 0"/>
-          <p:cNvSpPr txBox="1"/>
-          <p:nvPr/>
-        </p:nvSpPr>
-        <p:spPr>
-          <a:xfrm>
-            <a:off x="777240" y="713232"/>
-            <a:ext cx="6400800" cy="237744"/>
+      <p:sp>
+        <p:nvSpPr>
+          <p:cNvPr id="2" name="Text 0"/>
+          <p:cNvSpPr txBox="1"/>
+          <p:nvPr/>
+        </p:nvSpPr>
+        <p:spPr>
+          <a:xfrm>
+            <a:off x="777240" y="841248"/>
+            <a:ext cx="7589520" cy="237744"/>
           </a:xfrm>
           <a:prstGeom prst="rect">
             <a:avLst/>
@@ -7399,33 +7499,33 @@
       </p:sp>
       <p:sp>
         <p:nvSpPr>
-          <p:cNvPr id="4" name="Text 1"/>
-          <p:cNvSpPr txBox="1"/>
-          <p:nvPr/>
-        </p:nvSpPr>
-        <p:spPr>
-          <a:xfrm>
-            <a:off x="777240" y="1078992"/>
-            <a:ext cx="6492240" cy="1554480"/>
-          </a:xfrm>
-          <a:prstGeom prst="rect">
-            <a:avLst/>
-          </a:prstGeom>
-          <a:noFill/>
-          <a:ln/>
-        </p:spPr>
-        <p:txBody>
-          <a:bodyPr wrap="square" lIns="0" tIns="0" rIns="0" bIns="0" rtlCol="0" anchor="t"/>
-          <a:lstStyle/>
-          <a:p>
-            <a:pPr algn="l" indent="0" marL="0">
-              <a:lnSpc>
-                <a:spcPct val="108000"/>
-              </a:lnSpc>
-              <a:buNone/>
-            </a:pPr>
-            <a:r>
-              <a:rPr lang="en-US" sz="2900" b="1" dirty="0">
+          <p:cNvPr id="3" name="Text 1"/>
+          <p:cNvSpPr txBox="1"/>
+          <p:nvPr/>
+        </p:nvSpPr>
+        <p:spPr>
+          <a:xfrm>
+            <a:off x="777240" y="1243584"/>
+            <a:ext cx="7589520" cy="1828800"/>
+          </a:xfrm>
+          <a:prstGeom prst="rect">
+            <a:avLst/>
+          </a:prstGeom>
+          <a:noFill/>
+          <a:ln/>
+        </p:spPr>
+        <p:txBody>
+          <a:bodyPr wrap="square" lIns="0" tIns="0" rIns="0" bIns="0" rtlCol="0" anchor="t"/>
+          <a:lstStyle/>
+          <a:p>
+            <a:pPr algn="l" indent="0" marL="0">
+              <a:lnSpc>
+                <a:spcPct val="110000"/>
+              </a:lnSpc>
+              <a:buNone/>
+            </a:pPr>
+            <a:r>
+              <a:rPr lang="en-US" sz="2800" b="1" dirty="0">
                 <a:solidFill>
                   <a:srgbClr val="0F172A"/>
                 </a:solidFill>
@@ -7435,17 +7535,17 @@
               </a:rPr>
               <a:t>Piloto corporativo</a:t>
             </a:r>
-            <a:endParaRPr lang="en-US" sz="2900" dirty="0"/>
-          </a:p>
-          <a:p>
-            <a:pPr algn="l" indent="0" marL="0">
-              <a:lnSpc>
-                <a:spcPct val="108000"/>
-              </a:lnSpc>
-              <a:buNone/>
-            </a:pPr>
-            <a:r>
-              <a:rPr lang="en-US" sz="2900" b="1" dirty="0">
+            <a:endParaRPr lang="en-US" sz="2800" dirty="0"/>
+          </a:p>
+          <a:p>
+            <a:pPr algn="l" indent="0" marL="0">
+              <a:lnSpc>
+                <a:spcPct val="110000"/>
+              </a:lnSpc>
+              <a:buNone/>
+            </a:pPr>
+            <a:r>
+              <a:rPr lang="en-US" sz="2800" b="1" dirty="0">
                 <a:solidFill>
                   <a:srgbClr val="0F172A"/>
                 </a:solidFill>
@@ -7455,20 +7555,20 @@
               </a:rPr>
               <a:t>de 90 días.</a:t>
             </a:r>
-            <a:endParaRPr lang="en-US" sz="2900" dirty="0"/>
-          </a:p>
-        </p:txBody>
-      </p:sp>
-      <p:sp>
-        <p:nvSpPr>
-          <p:cNvPr id="5" name="Shape 2"/>
+            <a:endParaRPr lang="en-US" sz="2800" dirty="0"/>
+          </a:p>
+        </p:txBody>
+      </p:sp>
+      <p:sp>
+        <p:nvSpPr>
+          <p:cNvPr id="4" name="Shape 2"/>
           <p:cNvSpPr/>
           <p:nvPr/>
         </p:nvSpPr>
         <p:spPr>
           <a:xfrm>
-            <a:off x="804672" y="2871216"/>
-            <a:ext cx="137160" cy="137160"/>
+            <a:off x="804672" y="3063240"/>
+            <a:ext cx="146304" cy="146304"/>
           </a:xfrm>
           <a:prstGeom prst="ellipse">
             <a:avLst/>
@@ -7486,28 +7586,28 @@
       </p:sp>
       <p:sp>
         <p:nvSpPr>
-          <p:cNvPr id="6" name="Text 3"/>
-          <p:cNvSpPr txBox="1"/>
-          <p:nvPr/>
-        </p:nvSpPr>
-        <p:spPr>
-          <a:xfrm>
-            <a:off x="1088136" y="2798064"/>
-            <a:ext cx="2926080" cy="274320"/>
-          </a:xfrm>
-          <a:prstGeom prst="rect">
-            <a:avLst/>
-          </a:prstGeom>
-          <a:noFill/>
-          <a:ln/>
-        </p:spPr>
-        <p:txBody>
-          <a:bodyPr wrap="square" lIns="0" tIns="0" rIns="0" bIns="0" rtlCol="0" anchor="t"/>
-          <a:lstStyle/>
-          <a:p>
-            <a:pPr algn="l" indent="0" marL="0">
-              <a:lnSpc>
-                <a:spcPct val="120000"/>
+          <p:cNvPr id="5" name="Text 3"/>
+          <p:cNvSpPr txBox="1"/>
+          <p:nvPr/>
+        </p:nvSpPr>
+        <p:spPr>
+          <a:xfrm>
+            <a:off x="1106424" y="2971800"/>
+            <a:ext cx="3383280" cy="548640"/>
+          </a:xfrm>
+          <a:prstGeom prst="rect">
+            <a:avLst/>
+          </a:prstGeom>
+          <a:noFill/>
+          <a:ln/>
+        </p:spPr>
+        <p:txBody>
+          <a:bodyPr wrap="square" lIns="0" tIns="0" rIns="0" bIns="0" rtlCol="0" anchor="t"/>
+          <a:lstStyle/>
+          <a:p>
+            <a:pPr algn="l" indent="0" marL="0">
+              <a:lnSpc>
+                <a:spcPct val="122000"/>
               </a:lnSpc>
               <a:buNone/>
             </a:pPr>
@@ -7528,14 +7628,14 @@
       </p:sp>
       <p:sp>
         <p:nvSpPr>
-          <p:cNvPr id="7" name="Shape 4"/>
+          <p:cNvPr id="6" name="Shape 4"/>
           <p:cNvSpPr/>
           <p:nvPr/>
         </p:nvSpPr>
         <p:spPr>
           <a:xfrm>
-            <a:off x="4050792" y="2871216"/>
-            <a:ext cx="137160" cy="137160"/>
+            <a:off x="4690872" y="3063240"/>
+            <a:ext cx="146304" cy="146304"/>
           </a:xfrm>
           <a:prstGeom prst="ellipse">
             <a:avLst/>
@@ -7553,28 +7653,28 @@
       </p:sp>
       <p:sp>
         <p:nvSpPr>
-          <p:cNvPr id="8" name="Text 5"/>
-          <p:cNvSpPr txBox="1"/>
-          <p:nvPr/>
-        </p:nvSpPr>
-        <p:spPr>
-          <a:xfrm>
-            <a:off x="4334256" y="2798064"/>
-            <a:ext cx="2926080" cy="274320"/>
-          </a:xfrm>
-          <a:prstGeom prst="rect">
-            <a:avLst/>
-          </a:prstGeom>
-          <a:noFill/>
-          <a:ln/>
-        </p:spPr>
-        <p:txBody>
-          <a:bodyPr wrap="square" lIns="0" tIns="0" rIns="0" bIns="0" rtlCol="0" anchor="t"/>
-          <a:lstStyle/>
-          <a:p>
-            <a:pPr algn="l" indent="0" marL="0">
-              <a:lnSpc>
-                <a:spcPct val="120000"/>
+          <p:cNvPr id="7" name="Text 5"/>
+          <p:cNvSpPr txBox="1"/>
+          <p:nvPr/>
+        </p:nvSpPr>
+        <p:spPr>
+          <a:xfrm>
+            <a:off x="4992624" y="2971800"/>
+            <a:ext cx="3383280" cy="548640"/>
+          </a:xfrm>
+          <a:prstGeom prst="rect">
+            <a:avLst/>
+          </a:prstGeom>
+          <a:noFill/>
+          <a:ln/>
+        </p:spPr>
+        <p:txBody>
+          <a:bodyPr wrap="square" lIns="0" tIns="0" rIns="0" bIns="0" rtlCol="0" anchor="t"/>
+          <a:lstStyle/>
+          <a:p>
+            <a:pPr algn="l" indent="0" marL="0">
+              <a:lnSpc>
+                <a:spcPct val="122000"/>
               </a:lnSpc>
               <a:buNone/>
             </a:pPr>
@@ -7595,14 +7695,14 @@
       </p:sp>
       <p:sp>
         <p:nvSpPr>
-          <p:cNvPr id="9" name="Shape 6"/>
+          <p:cNvPr id="8" name="Shape 6"/>
           <p:cNvSpPr/>
           <p:nvPr/>
         </p:nvSpPr>
         <p:spPr>
           <a:xfrm>
-            <a:off x="804672" y="3383280"/>
-            <a:ext cx="137160" cy="137160"/>
+            <a:off x="804672" y="3776472"/>
+            <a:ext cx="146304" cy="146304"/>
           </a:xfrm>
           <a:prstGeom prst="ellipse">
             <a:avLst/>
@@ -7620,28 +7720,28 @@
       </p:sp>
       <p:sp>
         <p:nvSpPr>
-          <p:cNvPr id="10" name="Text 7"/>
-          <p:cNvSpPr txBox="1"/>
-          <p:nvPr/>
-        </p:nvSpPr>
-        <p:spPr>
-          <a:xfrm>
-            <a:off x="1088136" y="3310128"/>
-            <a:ext cx="2926080" cy="274320"/>
-          </a:xfrm>
-          <a:prstGeom prst="rect">
-            <a:avLst/>
-          </a:prstGeom>
-          <a:noFill/>
-          <a:ln/>
-        </p:spPr>
-        <p:txBody>
-          <a:bodyPr wrap="square" lIns="0" tIns="0" rIns="0" bIns="0" rtlCol="0" anchor="t"/>
-          <a:lstStyle/>
-          <a:p>
-            <a:pPr algn="l" indent="0" marL="0">
-              <a:lnSpc>
-                <a:spcPct val="120000"/>
+          <p:cNvPr id="9" name="Text 7"/>
+          <p:cNvSpPr txBox="1"/>
+          <p:nvPr/>
+        </p:nvSpPr>
+        <p:spPr>
+          <a:xfrm>
+            <a:off x="1106424" y="3685032"/>
+            <a:ext cx="3383280" cy="548640"/>
+          </a:xfrm>
+          <a:prstGeom prst="rect">
+            <a:avLst/>
+          </a:prstGeom>
+          <a:noFill/>
+          <a:ln/>
+        </p:spPr>
+        <p:txBody>
+          <a:bodyPr wrap="square" lIns="0" tIns="0" rIns="0" bIns="0" rtlCol="0" anchor="t"/>
+          <a:lstStyle/>
+          <a:p>
+            <a:pPr algn="l" indent="0" marL="0">
+              <a:lnSpc>
+                <a:spcPct val="122000"/>
               </a:lnSpc>
               <a:buNone/>
             </a:pPr>
@@ -7662,14 +7762,14 @@
       </p:sp>
       <p:sp>
         <p:nvSpPr>
-          <p:cNvPr id="11" name="Shape 8"/>
+          <p:cNvPr id="10" name="Shape 8"/>
           <p:cNvSpPr/>
           <p:nvPr/>
         </p:nvSpPr>
         <p:spPr>
           <a:xfrm>
-            <a:off x="4050792" y="3383280"/>
-            <a:ext cx="137160" cy="137160"/>
+            <a:off x="4690872" y="3776472"/>
+            <a:ext cx="146304" cy="146304"/>
           </a:xfrm>
           <a:prstGeom prst="ellipse">
             <a:avLst/>
@@ -7687,28 +7787,28 @@
       </p:sp>
       <p:sp>
         <p:nvSpPr>
-          <p:cNvPr id="12" name="Text 9"/>
-          <p:cNvSpPr txBox="1"/>
-          <p:nvPr/>
-        </p:nvSpPr>
-        <p:spPr>
-          <a:xfrm>
-            <a:off x="4334256" y="3310128"/>
-            <a:ext cx="2926080" cy="274320"/>
-          </a:xfrm>
-          <a:prstGeom prst="rect">
-            <a:avLst/>
-          </a:prstGeom>
-          <a:noFill/>
-          <a:ln/>
-        </p:spPr>
-        <p:txBody>
-          <a:bodyPr wrap="square" lIns="0" tIns="0" rIns="0" bIns="0" rtlCol="0" anchor="t"/>
-          <a:lstStyle/>
-          <a:p>
-            <a:pPr algn="l" indent="0" marL="0">
-              <a:lnSpc>
-                <a:spcPct val="120000"/>
+          <p:cNvPr id="11" name="Text 9"/>
+          <p:cNvSpPr txBox="1"/>
+          <p:nvPr/>
+        </p:nvSpPr>
+        <p:spPr>
+          <a:xfrm>
+            <a:off x="4992624" y="3685032"/>
+            <a:ext cx="3383280" cy="548640"/>
+          </a:xfrm>
+          <a:prstGeom prst="rect">
+            <a:avLst/>
+          </a:prstGeom>
+          <a:noFill/>
+          <a:ln/>
+        </p:spPr>
+        <p:txBody>
+          <a:bodyPr wrap="square" lIns="0" tIns="0" rIns="0" bIns="0" rtlCol="0" anchor="t"/>
+          <a:lstStyle/>
+          <a:p>
+            <a:pPr algn="l" indent="0" marL="0">
+              <a:lnSpc>
+                <a:spcPct val="122000"/>
               </a:lnSpc>
               <a:buNone/>
             </a:pPr>
@@ -7729,14 +7829,14 @@
       </p:sp>
       <p:sp>
         <p:nvSpPr>
-          <p:cNvPr id="13" name="Shape 10"/>
+          <p:cNvPr id="12" name="Shape 10"/>
           <p:cNvSpPr/>
           <p:nvPr/>
         </p:nvSpPr>
         <p:spPr>
           <a:xfrm>
-            <a:off x="804672" y="3895344"/>
-            <a:ext cx="137160" cy="137160"/>
+            <a:off x="804672" y="4489704"/>
+            <a:ext cx="146304" cy="146304"/>
           </a:xfrm>
           <a:prstGeom prst="ellipse">
             <a:avLst/>
@@ -7754,28 +7854,28 @@
       </p:sp>
       <p:sp>
         <p:nvSpPr>
-          <p:cNvPr id="14" name="Text 11"/>
-          <p:cNvSpPr txBox="1"/>
-          <p:nvPr/>
-        </p:nvSpPr>
-        <p:spPr>
-          <a:xfrm>
-            <a:off x="1088136" y="3822192"/>
-            <a:ext cx="2926080" cy="274320"/>
-          </a:xfrm>
-          <a:prstGeom prst="rect">
-            <a:avLst/>
-          </a:prstGeom>
-          <a:noFill/>
-          <a:ln/>
-        </p:spPr>
-        <p:txBody>
-          <a:bodyPr wrap="square" lIns="0" tIns="0" rIns="0" bIns="0" rtlCol="0" anchor="t"/>
-          <a:lstStyle/>
-          <a:p>
-            <a:pPr algn="l" indent="0" marL="0">
-              <a:lnSpc>
-                <a:spcPct val="120000"/>
+          <p:cNvPr id="13" name="Text 11"/>
+          <p:cNvSpPr txBox="1"/>
+          <p:nvPr/>
+        </p:nvSpPr>
+        <p:spPr>
+          <a:xfrm>
+            <a:off x="1106424" y="4398264"/>
+            <a:ext cx="3383280" cy="548640"/>
+          </a:xfrm>
+          <a:prstGeom prst="rect">
+            <a:avLst/>
+          </a:prstGeom>
+          <a:noFill/>
+          <a:ln/>
+        </p:spPr>
+        <p:txBody>
+          <a:bodyPr wrap="square" lIns="0" tIns="0" rIns="0" bIns="0" rtlCol="0" anchor="t"/>
+          <a:lstStyle/>
+          <a:p>
+            <a:pPr algn="l" indent="0" marL="0">
+              <a:lnSpc>
+                <a:spcPct val="122000"/>
               </a:lnSpc>
               <a:buNone/>
             </a:pPr>
@@ -7796,14 +7896,14 @@
       </p:sp>
       <p:sp>
         <p:nvSpPr>
-          <p:cNvPr id="15" name="Shape 12"/>
+          <p:cNvPr id="14" name="Shape 12"/>
           <p:cNvSpPr/>
           <p:nvPr/>
         </p:nvSpPr>
         <p:spPr>
           <a:xfrm>
-            <a:off x="4050792" y="3895344"/>
-            <a:ext cx="137160" cy="137160"/>
+            <a:off x="4690872" y="4489704"/>
+            <a:ext cx="146304" cy="146304"/>
           </a:xfrm>
           <a:prstGeom prst="ellipse">
             <a:avLst/>
@@ -7821,28 +7921,28 @@
       </p:sp>
       <p:sp>
         <p:nvSpPr>
-          <p:cNvPr id="16" name="Text 13"/>
-          <p:cNvSpPr txBox="1"/>
-          <p:nvPr/>
-        </p:nvSpPr>
-        <p:spPr>
-          <a:xfrm>
-            <a:off x="4334256" y="3822192"/>
-            <a:ext cx="2926080" cy="274320"/>
-          </a:xfrm>
-          <a:prstGeom prst="rect">
-            <a:avLst/>
-          </a:prstGeom>
-          <a:noFill/>
-          <a:ln/>
-        </p:spPr>
-        <p:txBody>
-          <a:bodyPr wrap="square" lIns="0" tIns="0" rIns="0" bIns="0" rtlCol="0" anchor="t"/>
-          <a:lstStyle/>
-          <a:p>
-            <a:pPr algn="l" indent="0" marL="0">
-              <a:lnSpc>
-                <a:spcPct val="120000"/>
+          <p:cNvPr id="15" name="Text 13"/>
+          <p:cNvSpPr txBox="1"/>
+          <p:nvPr/>
+        </p:nvSpPr>
+        <p:spPr>
+          <a:xfrm>
+            <a:off x="4992624" y="4398264"/>
+            <a:ext cx="3383280" cy="548640"/>
+          </a:xfrm>
+          <a:prstGeom prst="rect">
+            <a:avLst/>
+          </a:prstGeom>
+          <a:noFill/>
+          <a:ln/>
+        </p:spPr>
+        <p:txBody>
+          <a:bodyPr wrap="square" lIns="0" tIns="0" rIns="0" bIns="0" rtlCol="0" anchor="t"/>
+          <a:lstStyle/>
+          <a:p>
+            <a:pPr algn="l" indent="0" marL="0">
+              <a:lnSpc>
+                <a:spcPct val="122000"/>
               </a:lnSpc>
               <a:buNone/>
             </a:pPr>
@@ -7863,14 +7963,14 @@
       </p:sp>
       <p:sp>
         <p:nvSpPr>
-          <p:cNvPr id="17" name="Shape 14"/>
+          <p:cNvPr id="16" name="Shape 14"/>
           <p:cNvSpPr/>
           <p:nvPr/>
         </p:nvSpPr>
         <p:spPr>
           <a:xfrm>
-            <a:off x="804672" y="4407408"/>
-            <a:ext cx="137160" cy="137160"/>
+            <a:off x="804672" y="5202936"/>
+            <a:ext cx="146304" cy="146304"/>
           </a:xfrm>
           <a:prstGeom prst="ellipse">
             <a:avLst/>
@@ -7888,28 +7988,28 @@
       </p:sp>
       <p:sp>
         <p:nvSpPr>
-          <p:cNvPr id="18" name="Text 15"/>
-          <p:cNvSpPr txBox="1"/>
-          <p:nvPr/>
-        </p:nvSpPr>
-        <p:spPr>
-          <a:xfrm>
-            <a:off x="1088136" y="4334256"/>
-            <a:ext cx="2926080" cy="274320"/>
-          </a:xfrm>
-          <a:prstGeom prst="rect">
-            <a:avLst/>
-          </a:prstGeom>
-          <a:noFill/>
-          <a:ln/>
-        </p:spPr>
-        <p:txBody>
-          <a:bodyPr wrap="square" lIns="0" tIns="0" rIns="0" bIns="0" rtlCol="0" anchor="t"/>
-          <a:lstStyle/>
-          <a:p>
-            <a:pPr algn="l" indent="0" marL="0">
-              <a:lnSpc>
-                <a:spcPct val="120000"/>
+          <p:cNvPr id="17" name="Text 15"/>
+          <p:cNvSpPr txBox="1"/>
+          <p:nvPr/>
+        </p:nvSpPr>
+        <p:spPr>
+          <a:xfrm>
+            <a:off x="1106424" y="5111496"/>
+            <a:ext cx="3383280" cy="548640"/>
+          </a:xfrm>
+          <a:prstGeom prst="rect">
+            <a:avLst/>
+          </a:prstGeom>
+          <a:noFill/>
+          <a:ln/>
+        </p:spPr>
+        <p:txBody>
+          <a:bodyPr wrap="square" lIns="0" tIns="0" rIns="0" bIns="0" rtlCol="0" anchor="t"/>
+          <a:lstStyle/>
+          <a:p>
+            <a:pPr algn="l" indent="0" marL="0">
+              <a:lnSpc>
+                <a:spcPct val="122000"/>
               </a:lnSpc>
               <a:buNone/>
             </a:pPr>
@@ -7930,14 +8030,14 @@
       </p:sp>
       <p:sp>
         <p:nvSpPr>
-          <p:cNvPr id="19" name="Shape 16"/>
+          <p:cNvPr id="18" name="Shape 16"/>
           <p:cNvSpPr/>
           <p:nvPr/>
         </p:nvSpPr>
         <p:spPr>
           <a:xfrm>
-            <a:off x="4050792" y="4407408"/>
-            <a:ext cx="137160" cy="137160"/>
+            <a:off x="4690872" y="5202936"/>
+            <a:ext cx="146304" cy="146304"/>
           </a:xfrm>
           <a:prstGeom prst="ellipse">
             <a:avLst/>
@@ -7955,28 +8055,28 @@
       </p:sp>
       <p:sp>
         <p:nvSpPr>
-          <p:cNvPr id="20" name="Text 17"/>
-          <p:cNvSpPr txBox="1"/>
-          <p:nvPr/>
-        </p:nvSpPr>
-        <p:spPr>
-          <a:xfrm>
-            <a:off x="4334256" y="4334256"/>
-            <a:ext cx="2926080" cy="274320"/>
-          </a:xfrm>
-          <a:prstGeom prst="rect">
-            <a:avLst/>
-          </a:prstGeom>
-          <a:noFill/>
-          <a:ln/>
-        </p:spPr>
-        <p:txBody>
-          <a:bodyPr wrap="square" lIns="0" tIns="0" rIns="0" bIns="0" rtlCol="0" anchor="t"/>
-          <a:lstStyle/>
-          <a:p>
-            <a:pPr algn="l" indent="0" marL="0">
-              <a:lnSpc>
-                <a:spcPct val="120000"/>
+          <p:cNvPr id="19" name="Text 17"/>
+          <p:cNvSpPr txBox="1"/>
+          <p:nvPr/>
+        </p:nvSpPr>
+        <p:spPr>
+          <a:xfrm>
+            <a:off x="4992624" y="5111496"/>
+            <a:ext cx="3383280" cy="548640"/>
+          </a:xfrm>
+          <a:prstGeom prst="rect">
+            <a:avLst/>
+          </a:prstGeom>
+          <a:noFill/>
+          <a:ln/>
+        </p:spPr>
+        <p:txBody>
+          <a:bodyPr wrap="square" lIns="0" tIns="0" rIns="0" bIns="0" rtlCol="0" anchor="t"/>
+          <a:lstStyle/>
+          <a:p>
+            <a:pPr algn="l" indent="0" marL="0">
+              <a:lnSpc>
+                <a:spcPct val="122000"/>
               </a:lnSpc>
               <a:buNone/>
             </a:pPr>
@@ -7997,18 +8097,18 @@
       </p:sp>
       <p:sp>
         <p:nvSpPr>
-          <p:cNvPr id="21" name="Shape 18"/>
+          <p:cNvPr id="20" name="Shape 18"/>
           <p:cNvSpPr/>
           <p:nvPr/>
         </p:nvSpPr>
         <p:spPr>
           <a:xfrm>
-            <a:off x="777240" y="4956048"/>
-            <a:ext cx="6492240" cy="1042416"/>
+            <a:off x="777240" y="5989320"/>
+            <a:ext cx="7589520" cy="1188720"/>
           </a:xfrm>
           <a:prstGeom prst="roundRect">
             <a:avLst>
-              <a:gd name="adj" fmla="val 12281"/>
+              <a:gd name="adj" fmla="val 10769"/>
             </a:avLst>
           </a:prstGeom>
           <a:solidFill>
@@ -8024,14 +8124,14 @@
       </p:sp>
       <p:sp>
         <p:nvSpPr>
-          <p:cNvPr id="22" name="Text 19"/>
-          <p:cNvSpPr txBox="1"/>
-          <p:nvPr/>
-        </p:nvSpPr>
-        <p:spPr>
-          <a:xfrm>
-            <a:off x="1051560" y="5138928"/>
-            <a:ext cx="5943600" cy="713232"/>
+          <p:cNvPr id="21" name="Text 19"/>
+          <p:cNvSpPr txBox="1"/>
+          <p:nvPr/>
+        </p:nvSpPr>
+        <p:spPr>
+          <a:xfrm>
+            <a:off x="1088136" y="6263640"/>
+            <a:ext cx="6967728" cy="685800"/>
           </a:xfrm>
           <a:prstGeom prst="rect">
             <a:avLst/>
@@ -8064,30 +8164,80 @@
           </a:p>
         </p:txBody>
       </p:sp>
-      <p:sp>
-        <p:nvSpPr>
-          <p:cNvPr id="23" name="Text 20"/>
-          <p:cNvSpPr txBox="1"/>
-          <p:nvPr/>
-        </p:nvSpPr>
-        <p:spPr>
-          <a:xfrm>
-            <a:off x="777240" y="6345936"/>
-            <a:ext cx="6492240" cy="310896"/>
-          </a:xfrm>
-          <a:prstGeom prst="rect">
-            <a:avLst/>
-          </a:prstGeom>
-          <a:noFill/>
-          <a:ln/>
-        </p:spPr>
-        <p:txBody>
-          <a:bodyPr wrap="square" lIns="0" tIns="0" rIns="0" bIns="0" rtlCol="0" anchor="t"/>
-          <a:lstStyle/>
-          <a:p>
-            <a:pPr algn="l" indent="0" marL="0">
-              <a:lnSpc>
-                <a:spcPct val="122000"/>
+      <p:pic>
+        <p:nvPicPr>
+          <p:cNvPr id="22" name="Image 0" descr="/home/user/Prototipo-comercial/presentacion/img/valdivia.jpg">    </p:cNvPr>
+          <p:cNvPicPr>
+            <a:picLocks noChangeAspect="1"/>
+          </p:cNvPicPr>
+          <p:nvPr/>
+        </p:nvPicPr>
+        <p:blipFill>
+          <a:blip r:embed="rId1"/>
+          <a:srcRect l="0" r="0" t="0" b="0"/>
+          <a:stretch/>
+        </p:blipFill>
+        <p:spPr>
+          <a:xfrm>
+            <a:off x="0" y="7635240"/>
+            <a:ext cx="9144000" cy="2926080"/>
+          </a:xfrm>
+          <a:prstGeom prst="rect">
+            <a:avLst/>
+          </a:prstGeom>
+        </p:spPr>
+      </p:pic>
+      <p:sp>
+        <p:nvSpPr>
+          <p:cNvPr id="23" name="Shape 20"/>
+          <p:cNvSpPr/>
+          <p:nvPr/>
+        </p:nvSpPr>
+        <p:spPr>
+          <a:xfrm>
+            <a:off x="0" y="7635240"/>
+            <a:ext cx="9144000" cy="2926080"/>
+          </a:xfrm>
+          <a:prstGeom prst="rect">
+            <a:avLst/>
+          </a:prstGeom>
+          <a:solidFill>
+            <a:srgbClr val="FFFFFF">
+              <a:alpha val="22000"/>
+            </a:srgbClr>
+          </a:solidFill>
+          <a:ln w="12700">
+            <a:solidFill>
+              <a:srgbClr val="333333"/>
+            </a:solidFill>
+            <a:prstDash val="solid"/>
+          </a:ln>
+        </p:spPr>
+      </p:sp>
+      <p:sp>
+        <p:nvSpPr>
+          <p:cNvPr id="24" name="Text 21"/>
+          <p:cNvSpPr txBox="1"/>
+          <p:nvPr/>
+        </p:nvSpPr>
+        <p:spPr>
+          <a:xfrm>
+            <a:off x="777240" y="11411712"/>
+            <a:ext cx="7589520" cy="457200"/>
+          </a:xfrm>
+          <a:prstGeom prst="rect">
+            <a:avLst/>
+          </a:prstGeom>
+          <a:noFill/>
+          <a:ln/>
+        </p:spPr>
+        <p:txBody>
+          <a:bodyPr wrap="square" lIns="0" tIns="0" rIns="0" bIns="0" rtlCol="0" anchor="t"/>
+          <a:lstStyle/>
+          <a:p>
+            <a:pPr algn="l" indent="0" marL="0">
+              <a:lnSpc>
+                <a:spcPct val="124000"/>
               </a:lnSpc>
               <a:buNone/>
             </a:pPr>
@@ -8117,6 +8267,13 @@
 <file path=ppt/slides/slide9.xml><?xml version="1.0" encoding="utf-8"?>
 <p:sld xmlns:a="http://schemas.openxmlformats.org/drawingml/2006/main" xmlns:r="http://schemas.openxmlformats.org/officeDocument/2006/relationships" xmlns:p="http://schemas.openxmlformats.org/presentationml/2006/main">
   <p:cSld name="Slide 9">
+    <p:bg>
+      <p:bgPr>
+        <a:solidFill>
+          <a:srgbClr val="16233A"/>
+        </a:solidFill>
+      </p:bgPr>
+    </p:bg>
     <p:spTree>
       <p:nvGrpSpPr>
         <p:cNvPr id="1" name=""/>
@@ -8133,7 +8290,7 @@
       </p:grpSpPr>
       <p:pic>
         <p:nvPicPr>
-          <p:cNvPr id="2" name="Image 0" descr="/home/user/Prototipo-comercial/presentacion/img/costa.png">    </p:cNvPr>
+          <p:cNvPr id="2" name="Image 0" descr="/home/user/Prototipo-comercial/presentacion/img/vina.jpg">    </p:cNvPr>
           <p:cNvPicPr>
             <a:picLocks noChangeAspect="1"/>
           </p:cNvPicPr>
@@ -8147,7 +8304,7 @@
         <p:spPr>
           <a:xfrm>
             <a:off x="0" y="0"/>
-            <a:ext cx="12191695" cy="6858000"/>
+            <a:ext cx="9144000" cy="4206240"/>
           </a:xfrm>
           <a:prstGeom prst="rect">
             <a:avLst/>
@@ -8163,14 +8320,14 @@
         <p:spPr>
           <a:xfrm>
             <a:off x="0" y="0"/>
-            <a:ext cx="12191695" cy="6858000"/>
+            <a:ext cx="9144000" cy="4206240"/>
           </a:xfrm>
           <a:prstGeom prst="rect">
             <a:avLst/>
           </a:prstGeom>
           <a:solidFill>
             <a:srgbClr val="16233A">
-              <a:alpha val="72000"/>
+              <a:alpha val="42000"/>
             </a:srgbClr>
           </a:solidFill>
           <a:ln w="12700">
@@ -8196,7 +8353,7 @@
         </p:blipFill>
         <p:spPr>
           <a:xfrm>
-            <a:off x="777240" y="603504"/>
+            <a:off x="777240" y="932688"/>
             <a:ext cx="402336" cy="426110"/>
           </a:xfrm>
           <a:prstGeom prst="rect">
@@ -8212,8 +8369,8 @@
         </p:nvSpPr>
         <p:spPr>
           <a:xfrm>
-            <a:off x="1344168" y="685800"/>
-            <a:ext cx="3657600" cy="274320"/>
+            <a:off x="1344168" y="1014984"/>
+            <a:ext cx="4572000" cy="274320"/>
           </a:xfrm>
           <a:prstGeom prst="rect">
             <a:avLst/>
@@ -8254,27 +8411,27 @@
         </p:nvSpPr>
         <p:spPr>
           <a:xfrm>
-            <a:off x="777240" y="2157984"/>
-            <a:ext cx="9875520" cy="1645920"/>
-          </a:xfrm>
-          <a:prstGeom prst="rect">
-            <a:avLst/>
-          </a:prstGeom>
-          <a:noFill/>
-          <a:ln/>
-        </p:spPr>
-        <p:txBody>
-          <a:bodyPr wrap="square" lIns="0" tIns="0" rIns="0" bIns="0" rtlCol="0" anchor="t"/>
-          <a:lstStyle/>
-          <a:p>
-            <a:pPr algn="l" indent="0" marL="0">
-              <a:lnSpc>
-                <a:spcPct val="114000"/>
-              </a:lnSpc>
-              <a:buNone/>
-            </a:pPr>
-            <a:r>
-              <a:rPr lang="en-US" sz="3200" b="1" dirty="0">
+            <a:off x="777240" y="5349240"/>
+            <a:ext cx="7589520" cy="2011680"/>
+          </a:xfrm>
+          <a:prstGeom prst="rect">
+            <a:avLst/>
+          </a:prstGeom>
+          <a:noFill/>
+          <a:ln/>
+        </p:spPr>
+        <p:txBody>
+          <a:bodyPr wrap="square" lIns="0" tIns="0" rIns="0" bIns="0" rtlCol="0" anchor="t"/>
+          <a:lstStyle/>
+          <a:p>
+            <a:pPr algn="l" indent="0" marL="0">
+              <a:lnSpc>
+                <a:spcPct val="116000"/>
+              </a:lnSpc>
+              <a:buNone/>
+            </a:pPr>
+            <a:r>
+              <a:rPr lang="en-US" sz="3000" b="1" dirty="0">
                 <a:solidFill>
                   <a:srgbClr val="FFFFFF"/>
                 </a:solidFill>
@@ -8282,19 +8439,19 @@
                 <a:ea typeface="Inter" pitchFamily="34" charset="-122"/>
                 <a:cs typeface="Inter" pitchFamily="34" charset="-120"/>
               </a:rPr>
-              <a:t>¿Tendría sentido validar Aplica tu Seguro</a:t>
-            </a:r>
-            <a:endParaRPr lang="en-US" sz="3200" dirty="0"/>
-          </a:p>
-          <a:p>
-            <a:pPr algn="l" indent="0" marL="0">
-              <a:lnSpc>
-                <a:spcPct val="114000"/>
-              </a:lnSpc>
-              <a:buNone/>
-            </a:pPr>
-            <a:r>
-              <a:rPr lang="en-US" sz="3200" b="1" dirty="0">
+              <a:t>¿Tendría sentido validar</a:t>
+            </a:r>
+            <a:endParaRPr lang="en-US" sz="3000" dirty="0"/>
+          </a:p>
+          <a:p>
+            <a:pPr algn="l" indent="0" marL="0">
+              <a:lnSpc>
+                <a:spcPct val="116000"/>
+              </a:lnSpc>
+              <a:buNone/>
+            </a:pPr>
+            <a:r>
+              <a:rPr lang="en-US" sz="3000" b="1" dirty="0">
                 <a:solidFill>
                   <a:srgbClr val="FFFFFF"/>
                 </a:solidFill>
@@ -8302,9 +8459,29 @@
                 <a:ea typeface="Inter" pitchFamily="34" charset="-122"/>
                 <a:cs typeface="Inter" pitchFamily="34" charset="-120"/>
               </a:rPr>
-              <a:t>con un grupo de sus colaboradores?</a:t>
-            </a:r>
-            <a:endParaRPr lang="en-US" sz="3200" dirty="0"/>
+              <a:t>Aplica tu Seguro con un grupo</a:t>
+            </a:r>
+            <a:endParaRPr lang="en-US" sz="3000" dirty="0"/>
+          </a:p>
+          <a:p>
+            <a:pPr algn="l" indent="0" marL="0">
+              <a:lnSpc>
+                <a:spcPct val="116000"/>
+              </a:lnSpc>
+              <a:buNone/>
+            </a:pPr>
+            <a:r>
+              <a:rPr lang="en-US" sz="3000" b="1" dirty="0">
+                <a:solidFill>
+                  <a:srgbClr val="FFFFFF"/>
+                </a:solidFill>
+                <a:latin typeface="Inter" pitchFamily="34" charset="0"/>
+                <a:ea typeface="Inter" pitchFamily="34" charset="-122"/>
+                <a:cs typeface="Inter" pitchFamily="34" charset="-120"/>
+              </a:rPr>
+              <a:t>de sus colaboradores?</a:t>
+            </a:r>
+            <a:endParaRPr lang="en-US" sz="3000" dirty="0"/>
           </a:p>
         </p:txBody>
       </p:sp>
@@ -8316,8 +8493,8 @@
         </p:nvSpPr>
         <p:spPr>
           <a:xfrm>
-            <a:off x="777240" y="3950208"/>
-            <a:ext cx="7772400" cy="365760"/>
+            <a:off x="777240" y="7498080"/>
+            <a:ext cx="7223760" cy="365760"/>
           </a:xfrm>
           <a:prstGeom prst="rect">
             <a:avLst/>
@@ -8358,12 +8535,37 @@
         </p:nvSpPr>
         <p:spPr>
           <a:xfrm>
-            <a:off x="777240" y="4535424"/>
-            <a:ext cx="5029200" cy="1481328"/>
+            <a:off x="777240" y="8183880"/>
+            <a:ext cx="1188720" cy="45720"/>
+          </a:xfrm>
+          <a:prstGeom prst="rect">
+            <a:avLst/>
+          </a:prstGeom>
+          <a:solidFill>
+            <a:srgbClr val="2F6FED"/>
+          </a:solidFill>
+          <a:ln w="12700">
+            <a:solidFill>
+              <a:srgbClr val="333333"/>
+            </a:solidFill>
+            <a:prstDash val="solid"/>
+          </a:ln>
+        </p:spPr>
+      </p:sp>
+      <p:sp>
+        <p:nvSpPr>
+          <p:cNvPr id="9" name="Shape 5"/>
+          <p:cNvSpPr/>
+          <p:nvPr/>
+        </p:nvSpPr>
+        <p:spPr>
+          <a:xfrm>
+            <a:off x="777240" y="8686800"/>
+            <a:ext cx="5760720" cy="1828800"/>
           </a:xfrm>
           <a:prstGeom prst="roundRect">
             <a:avLst>
-              <a:gd name="adj" fmla="val 9877"/>
+              <a:gd name="adj" fmla="val 8000"/>
             </a:avLst>
           </a:prstGeom>
           <a:solidFill>
@@ -8383,14 +8585,14 @@
       </p:sp>
       <p:sp>
         <p:nvSpPr>
-          <p:cNvPr id="9" name="Text 5"/>
-          <p:cNvSpPr txBox="1"/>
-          <p:nvPr/>
-        </p:nvSpPr>
-        <p:spPr>
-          <a:xfrm>
-            <a:off x="1106424" y="4736592"/>
-            <a:ext cx="4389120" cy="274320"/>
+          <p:cNvPr id="10" name="Text 6"/>
+          <p:cNvSpPr txBox="1"/>
+          <p:nvPr/>
+        </p:nvSpPr>
+        <p:spPr>
+          <a:xfrm>
+            <a:off x="1143000" y="8961120"/>
+            <a:ext cx="5029200" cy="292608"/>
           </a:xfrm>
           <a:prstGeom prst="rect">
             <a:avLst/>
@@ -8409,7 +8611,7 @@
               <a:buNone/>
             </a:pPr>
             <a:r>
-              <a:rPr lang="en-US" sz="1500" b="1" dirty="0">
+              <a:rPr lang="en-US" sz="1550" b="1" dirty="0">
                 <a:solidFill>
                   <a:srgbClr val="FFFFFF"/>
                 </a:solidFill>
@@ -8419,20 +8621,20 @@
               </a:rPr>
               <a:t>Diego Córdova E.</a:t>
             </a:r>
-            <a:endParaRPr lang="en-US" sz="1500" dirty="0"/>
-          </a:p>
-        </p:txBody>
-      </p:sp>
-      <p:sp>
-        <p:nvSpPr>
-          <p:cNvPr id="10" name="Text 6"/>
-          <p:cNvSpPr txBox="1"/>
-          <p:nvPr/>
-        </p:nvSpPr>
-        <p:spPr>
-          <a:xfrm>
-            <a:off x="1106424" y="5029200"/>
-            <a:ext cx="4389120" cy="256032"/>
+            <a:endParaRPr lang="en-US" sz="1550" dirty="0"/>
+          </a:p>
+        </p:txBody>
+      </p:sp>
+      <p:sp>
+        <p:nvSpPr>
+          <p:cNvPr id="11" name="Text 7"/>
+          <p:cNvSpPr txBox="1"/>
+          <p:nvPr/>
+        </p:nvSpPr>
+        <p:spPr>
+          <a:xfrm>
+            <a:off x="1143000" y="9308592"/>
+            <a:ext cx="5029200" cy="256032"/>
           </a:xfrm>
           <a:prstGeom prst="rect">
             <a:avLst/>
@@ -8467,14 +8669,14 @@
       </p:sp>
       <p:sp>
         <p:nvSpPr>
-          <p:cNvPr id="11" name="Text 7"/>
-          <p:cNvSpPr txBox="1"/>
-          <p:nvPr/>
-        </p:nvSpPr>
-        <p:spPr>
-          <a:xfrm>
-            <a:off x="1106424" y="5358384"/>
-            <a:ext cx="2377440" cy="256032"/>
+          <p:cNvPr id="12" name="Text 8"/>
+          <p:cNvSpPr txBox="1"/>
+          <p:nvPr/>
+        </p:nvSpPr>
+        <p:spPr>
+          <a:xfrm>
+            <a:off x="1143000" y="9692640"/>
+            <a:ext cx="2743200" cy="256032"/>
           </a:xfrm>
           <a:prstGeom prst="rect">
             <a:avLst/>
@@ -8493,7 +8695,7 @@
               <a:buNone/>
             </a:pPr>
             <a:r>
-              <a:rPr lang="en-US" sz="1200" dirty="0">
+              <a:rPr lang="en-US" sz="1250" dirty="0">
                 <a:solidFill>
                   <a:srgbClr val="FFFFFF"/>
                 </a:solidFill>
@@ -8503,13 +8705,13 @@
               </a:rPr>
               <a:t>+569 8495 3941</a:t>
             </a:r>
-            <a:endParaRPr lang="en-US" sz="1200" dirty="0"/>
-          </a:p>
-        </p:txBody>
-      </p:sp>
-      <p:sp>
-        <p:nvSpPr>
-          <p:cNvPr id="12" name="Text 8">
+            <a:endParaRPr lang="en-US" sz="1250" dirty="0"/>
+          </a:p>
+        </p:txBody>
+      </p:sp>
+      <p:sp>
+        <p:nvSpPr>
+          <p:cNvPr id="13" name="Text 9">
             <a:hlinkClick r:id="rId3" tooltip=""/>
           </p:cNvPr>
           <p:cNvSpPr txBox="1"/>
@@ -8517,8 +8719,8 @@
         </p:nvSpPr>
         <p:spPr>
           <a:xfrm>
-            <a:off x="1106424" y="5632704"/>
-            <a:ext cx="4389120" cy="256032"/>
+            <a:off x="1143000" y="10003536"/>
+            <a:ext cx="5029200" cy="256032"/>
           </a:xfrm>
           <a:prstGeom prst="rect">
             <a:avLst/>
@@ -8537,7 +8739,7 @@
               <a:buNone/>
             </a:pPr>
             <a:r>
-              <a:rPr lang="en-US" sz="1200" u="sng" dirty="0">
+              <a:rPr lang="en-US" sz="1250" u="sng" dirty="0">
                 <a:solidFill>
                   <a:srgbClr val="FFFFFF"/>
                 </a:solidFill>
@@ -8554,34 +8756,34 @@
               </a:rPr>
               <a:t>hola@aplicatuseguro.cl</a:t>
             </a:r>
-            <a:endParaRPr lang="en-US" sz="1200" dirty="0"/>
-          </a:p>
-        </p:txBody>
-      </p:sp>
-      <p:sp>
-        <p:nvSpPr>
-          <p:cNvPr id="13" name="Text 9"/>
-          <p:cNvSpPr txBox="1"/>
-          <p:nvPr/>
-        </p:nvSpPr>
-        <p:spPr>
-          <a:xfrm>
-            <a:off x="777240" y="6345936"/>
-            <a:ext cx="10637215" cy="310896"/>
-          </a:xfrm>
-          <a:prstGeom prst="rect">
-            <a:avLst/>
-          </a:prstGeom>
-          <a:noFill/>
-          <a:ln/>
-        </p:spPr>
-        <p:txBody>
-          <a:bodyPr wrap="square" lIns="0" tIns="0" rIns="0" bIns="0" rtlCol="0" anchor="t"/>
-          <a:lstStyle/>
-          <a:p>
-            <a:pPr algn="l" indent="0" marL="0">
-              <a:lnSpc>
-                <a:spcPct val="122000"/>
+            <a:endParaRPr lang="en-US" sz="1250" dirty="0"/>
+          </a:p>
+        </p:txBody>
+      </p:sp>
+      <p:sp>
+        <p:nvSpPr>
+          <p:cNvPr id="14" name="Text 10"/>
+          <p:cNvSpPr txBox="1"/>
+          <p:nvPr/>
+        </p:nvSpPr>
+        <p:spPr>
+          <a:xfrm>
+            <a:off x="777240" y="11292840"/>
+            <a:ext cx="7589520" cy="457200"/>
+          </a:xfrm>
+          <a:prstGeom prst="rect">
+            <a:avLst/>
+          </a:prstGeom>
+          <a:noFill/>
+          <a:ln/>
+        </p:spPr>
+        <p:txBody>
+          <a:bodyPr wrap="square" lIns="0" tIns="0" rIns="0" bIns="0" rtlCol="0" anchor="t"/>
+          <a:lstStyle/>
+          <a:p>
+            <a:pPr algn="l" indent="0" marL="0">
+              <a:lnSpc>
+                <a:spcPct val="124000"/>
               </a:lnSpc>
               <a:buNone/>
             </a:pPr>

--- a/presentacion/Aplica-tu-Seguro-Presentacion-Comercial-v2.pptx
+++ b/presentacion/Aplica-tu-Seguro-Presentacion-Comercial-v2.pptx
@@ -1887,7 +1887,7 @@
     <p:bg>
       <p:bgPr>
         <a:solidFill>
-          <a:srgbClr val="FFFFFF"/>
+          <a:srgbClr val="16233A"/>
         </a:solidFill>
       </p:bgPr>
     </p:bg>
@@ -1905,113 +1905,9 @@
           <a:chExt cx="0" cy="0"/>
         </a:xfrm>
       </p:grpSpPr>
-      <p:sp>
-        <p:nvSpPr>
-          <p:cNvPr id="2" name="Text 0"/>
-          <p:cNvSpPr txBox="1"/>
-          <p:nvPr/>
-        </p:nvSpPr>
-        <p:spPr>
-          <a:xfrm>
-            <a:off x="777240" y="841248"/>
-            <a:ext cx="7589520" cy="237744"/>
-          </a:xfrm>
-          <a:prstGeom prst="rect">
-            <a:avLst/>
-          </a:prstGeom>
-          <a:noFill/>
-          <a:ln/>
-        </p:spPr>
-        <p:txBody>
-          <a:bodyPr wrap="square" lIns="0" tIns="0" rIns="0" bIns="0" rtlCol="0" anchor="t"/>
-          <a:lstStyle/>
-          <a:p>
-            <a:pPr algn="l" indent="0" marL="0">
-              <a:lnSpc>
-                <a:spcPct val="120000"/>
-              </a:lnSpc>
-              <a:buNone/>
-            </a:pPr>
-            <a:r>
-              <a:rPr lang="en-US" sz="1050" b="1" spc="240" kern="0" dirty="0">
-                <a:solidFill>
-                  <a:srgbClr val="6B7686"/>
-                </a:solidFill>
-                <a:latin typeface="Inter" pitchFamily="34" charset="0"/>
-                <a:ea typeface="Inter" pitchFamily="34" charset="-122"/>
-                <a:cs typeface="Inter" pitchFamily="34" charset="-120"/>
-              </a:rPr>
-              <a:t>EL PROBLEMA · CASO FICTICIO</a:t>
-            </a:r>
-            <a:endParaRPr lang="en-US" sz="1050" dirty="0"/>
-          </a:p>
-        </p:txBody>
-      </p:sp>
-      <p:sp>
-        <p:nvSpPr>
-          <p:cNvPr id="3" name="Text 1"/>
-          <p:cNvSpPr txBox="1"/>
-          <p:nvPr/>
-        </p:nvSpPr>
-        <p:spPr>
-          <a:xfrm>
-            <a:off x="777240" y="1243584"/>
-            <a:ext cx="7589520" cy="1828800"/>
-          </a:xfrm>
-          <a:prstGeom prst="rect">
-            <a:avLst/>
-          </a:prstGeom>
-          <a:noFill/>
-          <a:ln/>
-        </p:spPr>
-        <p:txBody>
-          <a:bodyPr wrap="square" lIns="0" tIns="0" rIns="0" bIns="0" rtlCol="0" anchor="t"/>
-          <a:lstStyle/>
-          <a:p>
-            <a:pPr algn="l" indent="0" marL="0">
-              <a:lnSpc>
-                <a:spcPct val="110000"/>
-              </a:lnSpc>
-              <a:buNone/>
-            </a:pPr>
-            <a:r>
-              <a:rPr lang="en-US" sz="2600" b="1" dirty="0">
-                <a:solidFill>
-                  <a:srgbClr val="0F172A"/>
-                </a:solidFill>
-                <a:latin typeface="Inter" pitchFamily="34" charset="0"/>
-                <a:ea typeface="Inter" pitchFamily="34" charset="-122"/>
-                <a:cs typeface="Inter" pitchFamily="34" charset="-120"/>
-              </a:rPr>
-              <a:t>María y su familia tienen cuatro</a:t>
-            </a:r>
-            <a:endParaRPr lang="en-US" sz="2600" dirty="0"/>
-          </a:p>
-          <a:p>
-            <a:pPr algn="l" indent="0" marL="0">
-              <a:lnSpc>
-                <a:spcPct val="110000"/>
-              </a:lnSpc>
-              <a:buNone/>
-            </a:pPr>
-            <a:r>
-              <a:rPr lang="en-US" sz="2600" b="1" dirty="0">
-                <a:solidFill>
-                  <a:srgbClr val="0F172A"/>
-                </a:solidFill>
-                <a:latin typeface="Inter" pitchFamily="34" charset="0"/>
-                <a:ea typeface="Inter" pitchFamily="34" charset="-122"/>
-                <a:cs typeface="Inter" pitchFamily="34" charset="-120"/>
-              </a:rPr>
-              <a:t>coberturas de salud activas.</a:t>
-            </a:r>
-            <a:endParaRPr lang="en-US" sz="2600" dirty="0"/>
-          </a:p>
-        </p:txBody>
-      </p:sp>
       <p:pic>
         <p:nvPicPr>
-          <p:cNvPr id="4" name="Image 0" descr="/home/user/Prototipo-comercial/presentacion/img/atacama.jpg">    </p:cNvPr>
+          <p:cNvPr id="2" name="Image 0" descr="/home/user/Prototipo-comercial/presentacion/img/atacama-fondo.jpg">    </p:cNvPr>
           <p:cNvPicPr>
             <a:picLocks noChangeAspect="1"/>
           </p:cNvPicPr>
@@ -2024,8 +1920,8 @@
         </p:blipFill>
         <p:spPr>
           <a:xfrm>
-            <a:off x="0" y="2880360"/>
-            <a:ext cx="9144000" cy="2743200"/>
+            <a:off x="0" y="0"/>
+            <a:ext cx="9144000" cy="12191695"/>
           </a:xfrm>
           <a:prstGeom prst="rect">
             <a:avLst/>
@@ -2034,21 +1930,21 @@
       </p:pic>
       <p:sp>
         <p:nvSpPr>
-          <p:cNvPr id="5" name="Shape 2"/>
+          <p:cNvPr id="3" name="Shape 0"/>
           <p:cNvSpPr/>
           <p:nvPr/>
         </p:nvSpPr>
         <p:spPr>
           <a:xfrm>
-            <a:off x="0" y="2880360"/>
-            <a:ext cx="9144000" cy="2743200"/>
+            <a:off x="0" y="0"/>
+            <a:ext cx="9144000" cy="12191695"/>
           </a:xfrm>
           <a:prstGeom prst="rect">
             <a:avLst/>
           </a:prstGeom>
           <a:solidFill>
-            <a:srgbClr val="FFFFFF">
-              <a:alpha val="22000"/>
+            <a:srgbClr val="16233A">
+              <a:alpha val="83000"/>
             </a:srgbClr>
           </a:solidFill>
           <a:ln w="12700">
@@ -2061,13 +1957,117 @@
       </p:sp>
       <p:sp>
         <p:nvSpPr>
+          <p:cNvPr id="4" name="Text 1"/>
+          <p:cNvSpPr txBox="1"/>
+          <p:nvPr/>
+        </p:nvSpPr>
+        <p:spPr>
+          <a:xfrm>
+            <a:off x="777240" y="841248"/>
+            <a:ext cx="7589520" cy="237744"/>
+          </a:xfrm>
+          <a:prstGeom prst="rect">
+            <a:avLst/>
+          </a:prstGeom>
+          <a:noFill/>
+          <a:ln/>
+        </p:spPr>
+        <p:txBody>
+          <a:bodyPr wrap="square" lIns="0" tIns="0" rIns="0" bIns="0" rtlCol="0" anchor="t"/>
+          <a:lstStyle/>
+          <a:p>
+            <a:pPr algn="l" indent="0" marL="0">
+              <a:lnSpc>
+                <a:spcPct val="120000"/>
+              </a:lnSpc>
+              <a:buNone/>
+            </a:pPr>
+            <a:r>
+              <a:rPr lang="en-US" sz="1050" b="1" spc="240" kern="0" dirty="0">
+                <a:solidFill>
+                  <a:srgbClr val="8FA9D0"/>
+                </a:solidFill>
+                <a:latin typeface="Inter" pitchFamily="34" charset="0"/>
+                <a:ea typeface="Inter" pitchFamily="34" charset="-122"/>
+                <a:cs typeface="Inter" pitchFamily="34" charset="-120"/>
+              </a:rPr>
+              <a:t>EL PROBLEMA · CASO FICTICIO</a:t>
+            </a:r>
+            <a:endParaRPr lang="en-US" sz="1050" dirty="0"/>
+          </a:p>
+        </p:txBody>
+      </p:sp>
+      <p:sp>
+        <p:nvSpPr>
+          <p:cNvPr id="5" name="Text 2"/>
+          <p:cNvSpPr txBox="1"/>
+          <p:nvPr/>
+        </p:nvSpPr>
+        <p:spPr>
+          <a:xfrm>
+            <a:off x="777240" y="1243584"/>
+            <a:ext cx="7589520" cy="1828800"/>
+          </a:xfrm>
+          <a:prstGeom prst="rect">
+            <a:avLst/>
+          </a:prstGeom>
+          <a:noFill/>
+          <a:ln/>
+        </p:spPr>
+        <p:txBody>
+          <a:bodyPr wrap="square" lIns="0" tIns="0" rIns="0" bIns="0" rtlCol="0" anchor="t"/>
+          <a:lstStyle/>
+          <a:p>
+            <a:pPr algn="l" indent="0" marL="0">
+              <a:lnSpc>
+                <a:spcPct val="110000"/>
+              </a:lnSpc>
+              <a:buNone/>
+            </a:pPr>
+            <a:r>
+              <a:rPr lang="en-US" sz="2600" b="1" dirty="0">
+                <a:solidFill>
+                  <a:srgbClr val="FFFFFF"/>
+                </a:solidFill>
+                <a:latin typeface="Inter" pitchFamily="34" charset="0"/>
+                <a:ea typeface="Inter" pitchFamily="34" charset="-122"/>
+                <a:cs typeface="Inter" pitchFamily="34" charset="-120"/>
+              </a:rPr>
+              <a:t>María y su familia tienen cuatro</a:t>
+            </a:r>
+            <a:endParaRPr lang="en-US" sz="2600" dirty="0"/>
+          </a:p>
+          <a:p>
+            <a:pPr algn="l" indent="0" marL="0">
+              <a:lnSpc>
+                <a:spcPct val="110000"/>
+              </a:lnSpc>
+              <a:buNone/>
+            </a:pPr>
+            <a:r>
+              <a:rPr lang="en-US" sz="2600" b="1" dirty="0">
+                <a:solidFill>
+                  <a:srgbClr val="FFFFFF"/>
+                </a:solidFill>
+                <a:latin typeface="Inter" pitchFamily="34" charset="0"/>
+                <a:ea typeface="Inter" pitchFamily="34" charset="-122"/>
+                <a:cs typeface="Inter" pitchFamily="34" charset="-120"/>
+              </a:rPr>
+              <a:t>coberturas de salud activas.</a:t>
+            </a:r>
+            <a:endParaRPr lang="en-US" sz="2600" dirty="0"/>
+          </a:p>
+        </p:txBody>
+      </p:sp>
+      <p:sp>
+        <p:nvSpPr>
           <p:cNvPr id="6" name="Text 3"/>
           <p:cNvSpPr txBox="1"/>
           <p:nvPr/>
         </p:nvSpPr>
         <p:spPr>
           <a:xfrm>
-            <a:off x="777240" y="6172200"/>
+            <a:off x="777240" y="4709160"/>
             <a:ext cx="7589520" cy="365760"/>
           </a:xfrm>
           <a:prstGeom prst="rect">
@@ -2087,9 +2087,9 @@
               <a:buNone/>
             </a:pPr>
             <a:r>
-              <a:rPr lang="en-US" sz="1500" b="1" dirty="0">
-                <a:solidFill>
-                  <a:srgbClr val="0F172A"/>
+              <a:rPr lang="en-US" sz="1550" b="1" dirty="0">
+                <a:solidFill>
+                  <a:srgbClr val="FFFFFF"/>
                 </a:solidFill>
                 <a:latin typeface="Inter" pitchFamily="34" charset="0"/>
                 <a:ea typeface="Inter" pitchFamily="34" charset="-122"/>
@@ -2097,7 +2097,7 @@
               </a:rPr>
               <a:t>Cada una tiene condiciones, topes y procesos diferentes.</a:t>
             </a:r>
-            <a:endParaRPr lang="en-US" sz="1500" dirty="0"/>
+            <a:endParaRPr lang="en-US" sz="1550" dirty="0"/>
           </a:p>
         </p:txBody>
       </p:sp>
@@ -2109,14 +2109,14 @@
         </p:nvSpPr>
         <p:spPr>
           <a:xfrm>
-            <a:off x="777240" y="6995160"/>
+            <a:off x="777240" y="5669280"/>
             <a:ext cx="310896" cy="310896"/>
           </a:xfrm>
           <a:prstGeom prst="ellipse">
             <a:avLst/>
           </a:prstGeom>
           <a:solidFill>
-            <a:srgbClr val="2C3E5D"/>
+            <a:srgbClr val="2F6FED"/>
           </a:solidFill>
           <a:ln w="12700">
             <a:solidFill>
@@ -2134,7 +2134,7 @@
         </p:nvSpPr>
         <p:spPr>
           <a:xfrm>
-            <a:off x="777240" y="6995160"/>
+            <a:off x="777240" y="5669280"/>
             <a:ext cx="310896" cy="310896"/>
           </a:xfrm>
           <a:prstGeom prst="rect">
@@ -2176,7 +2176,7 @@
         </p:nvSpPr>
         <p:spPr>
           <a:xfrm>
-            <a:off x="1289304" y="6967728"/>
+            <a:off x="1289304" y="5641848"/>
             <a:ext cx="6583680" cy="310896"/>
           </a:xfrm>
           <a:prstGeom prst="rect">
@@ -2198,7 +2198,7 @@
             <a:r>
               <a:rPr lang="en-US" sz="1450" b="1" dirty="0">
                 <a:solidFill>
-                  <a:srgbClr val="0F172A"/>
+                  <a:srgbClr val="FFFFFF"/>
                 </a:solidFill>
                 <a:latin typeface="Inter" pitchFamily="34" charset="0"/>
                 <a:ea typeface="Inter" pitchFamily="34" charset="-122"/>
@@ -2218,7 +2218,7 @@
         </p:nvSpPr>
         <p:spPr>
           <a:xfrm>
-            <a:off x="1289304" y="7324344"/>
+            <a:off x="1289304" y="6016752"/>
             <a:ext cx="6583680" cy="457200"/>
           </a:xfrm>
           <a:prstGeom prst="rect">
@@ -2240,7 +2240,7 @@
             <a:r>
               <a:rPr lang="en-US" sz="1200" dirty="0">
                 <a:solidFill>
-                  <a:srgbClr val="6B7686"/>
+                  <a:srgbClr val="C8D8F0"/>
                 </a:solidFill>
                 <a:latin typeface="Inter" pitchFamily="34" charset="0"/>
                 <a:ea typeface="Inter" pitchFamily="34" charset="-122"/>
@@ -2260,14 +2260,14 @@
         </p:nvSpPr>
         <p:spPr>
           <a:xfrm>
-            <a:off x="777240" y="8321040"/>
+            <a:off x="777240" y="7150608"/>
             <a:ext cx="310896" cy="310896"/>
           </a:xfrm>
           <a:prstGeom prst="ellipse">
             <a:avLst/>
           </a:prstGeom>
           <a:solidFill>
-            <a:srgbClr val="2C3E5D"/>
+            <a:srgbClr val="2F6FED"/>
           </a:solidFill>
           <a:ln w="12700">
             <a:solidFill>
@@ -2285,7 +2285,7 @@
         </p:nvSpPr>
         <p:spPr>
           <a:xfrm>
-            <a:off x="777240" y="8321040"/>
+            <a:off x="777240" y="7150608"/>
             <a:ext cx="310896" cy="310896"/>
           </a:xfrm>
           <a:prstGeom prst="rect">
@@ -2327,7 +2327,7 @@
         </p:nvSpPr>
         <p:spPr>
           <a:xfrm>
-            <a:off x="1289304" y="8293608"/>
+            <a:off x="1289304" y="7123176"/>
             <a:ext cx="6583680" cy="310896"/>
           </a:xfrm>
           <a:prstGeom prst="rect">
@@ -2349,7 +2349,7 @@
             <a:r>
               <a:rPr lang="en-US" sz="1450" b="1" dirty="0">
                 <a:solidFill>
-                  <a:srgbClr val="0F172A"/>
+                  <a:srgbClr val="FFFFFF"/>
                 </a:solidFill>
                 <a:latin typeface="Inter" pitchFamily="34" charset="0"/>
                 <a:ea typeface="Inter" pitchFamily="34" charset="-122"/>
@@ -2369,7 +2369,7 @@
         </p:nvSpPr>
         <p:spPr>
           <a:xfrm>
-            <a:off x="1289304" y="8650224"/>
+            <a:off x="1289304" y="7498080"/>
             <a:ext cx="6583680" cy="457200"/>
           </a:xfrm>
           <a:prstGeom prst="rect">
@@ -2391,7 +2391,7 @@
             <a:r>
               <a:rPr lang="en-US" sz="1200" dirty="0">
                 <a:solidFill>
-                  <a:srgbClr val="6B7686"/>
+                  <a:srgbClr val="C8D8F0"/>
                 </a:solidFill>
                 <a:latin typeface="Inter" pitchFamily="34" charset="0"/>
                 <a:ea typeface="Inter" pitchFamily="34" charset="-122"/>
@@ -2411,14 +2411,14 @@
         </p:nvSpPr>
         <p:spPr>
           <a:xfrm>
-            <a:off x="777240" y="9646920"/>
+            <a:off x="777240" y="8631936"/>
             <a:ext cx="310896" cy="310896"/>
           </a:xfrm>
           <a:prstGeom prst="ellipse">
             <a:avLst/>
           </a:prstGeom>
           <a:solidFill>
-            <a:srgbClr val="2C3E5D"/>
+            <a:srgbClr val="2F6FED"/>
           </a:solidFill>
           <a:ln w="12700">
             <a:solidFill>
@@ -2436,7 +2436,7 @@
         </p:nvSpPr>
         <p:spPr>
           <a:xfrm>
-            <a:off x="777240" y="9646920"/>
+            <a:off x="777240" y="8631936"/>
             <a:ext cx="310896" cy="310896"/>
           </a:xfrm>
           <a:prstGeom prst="rect">
@@ -2478,7 +2478,7 @@
         </p:nvSpPr>
         <p:spPr>
           <a:xfrm>
-            <a:off x="1289304" y="9619488"/>
+            <a:off x="1289304" y="8604504"/>
             <a:ext cx="6583680" cy="310896"/>
           </a:xfrm>
           <a:prstGeom prst="rect">
@@ -2500,7 +2500,7 @@
             <a:r>
               <a:rPr lang="en-US" sz="1450" b="1" dirty="0">
                 <a:solidFill>
-                  <a:srgbClr val="0F172A"/>
+                  <a:srgbClr val="FFFFFF"/>
                 </a:solidFill>
                 <a:latin typeface="Inter" pitchFamily="34" charset="0"/>
                 <a:ea typeface="Inter" pitchFamily="34" charset="-122"/>
@@ -2520,7 +2520,7 @@
         </p:nvSpPr>
         <p:spPr>
           <a:xfrm>
-            <a:off x="1289304" y="9976104"/>
+            <a:off x="1289304" y="8979408"/>
             <a:ext cx="6583680" cy="457200"/>
           </a:xfrm>
           <a:prstGeom prst="rect">
@@ -2542,7 +2542,7 @@
             <a:r>
               <a:rPr lang="en-US" sz="1200" dirty="0">
                 <a:solidFill>
-                  <a:srgbClr val="6B7686"/>
+                  <a:srgbClr val="C8D8F0"/>
                 </a:solidFill>
                 <a:latin typeface="Inter" pitchFamily="34" charset="0"/>
                 <a:ea typeface="Inter" pitchFamily="34" charset="-122"/>
@@ -2584,7 +2584,7 @@
             <a:r>
               <a:rPr lang="en-US" sz="1050" dirty="0">
                 <a:solidFill>
-                  <a:srgbClr val="6B7686"/>
+                  <a:srgbClr val="8FA9D0"/>
                 </a:solidFill>
                 <a:latin typeface="Inter" pitchFamily="34" charset="0"/>
                 <a:ea typeface="Inter" pitchFamily="34" charset="-122"/>
@@ -7437,7 +7437,7 @@
     <p:bg>
       <p:bgPr>
         <a:solidFill>
-          <a:srgbClr val="FFFFFF"/>
+          <a:srgbClr val="16233A"/>
         </a:solidFill>
       </p:bgPr>
     </p:bg>
@@ -7455,9 +7455,59 @@
           <a:chExt cx="0" cy="0"/>
         </a:xfrm>
       </p:grpSpPr>
-      <p:sp>
-        <p:nvSpPr>
-          <p:cNvPr id="2" name="Text 0"/>
+      <p:pic>
+        <p:nvPicPr>
+          <p:cNvPr id="2" name="Image 0" descr="/home/user/Prototipo-comercial/presentacion/img/valdivia-fondo.jpg">    </p:cNvPr>
+          <p:cNvPicPr>
+            <a:picLocks noChangeAspect="1"/>
+          </p:cNvPicPr>
+          <p:nvPr/>
+        </p:nvPicPr>
+        <p:blipFill>
+          <a:blip r:embed="rId1"/>
+          <a:srcRect l="0" r="0" t="0" b="0"/>
+          <a:stretch/>
+        </p:blipFill>
+        <p:spPr>
+          <a:xfrm>
+            <a:off x="0" y="0"/>
+            <a:ext cx="9144000" cy="12191695"/>
+          </a:xfrm>
+          <a:prstGeom prst="rect">
+            <a:avLst/>
+          </a:prstGeom>
+        </p:spPr>
+      </p:pic>
+      <p:sp>
+        <p:nvSpPr>
+          <p:cNvPr id="3" name="Shape 0"/>
+          <p:cNvSpPr/>
+          <p:nvPr/>
+        </p:nvSpPr>
+        <p:spPr>
+          <a:xfrm>
+            <a:off x="0" y="0"/>
+            <a:ext cx="9144000" cy="12191695"/>
+          </a:xfrm>
+          <a:prstGeom prst="rect">
+            <a:avLst/>
+          </a:prstGeom>
+          <a:solidFill>
+            <a:srgbClr val="16233A">
+              <a:alpha val="83000"/>
+            </a:srgbClr>
+          </a:solidFill>
+          <a:ln w="12700">
+            <a:solidFill>
+              <a:srgbClr val="333333"/>
+            </a:solidFill>
+            <a:prstDash val="solid"/>
+          </a:ln>
+        </p:spPr>
+      </p:sp>
+      <p:sp>
+        <p:nvSpPr>
+          <p:cNvPr id="4" name="Text 1"/>
           <p:cNvSpPr txBox="1"/>
           <p:nvPr/>
         </p:nvSpPr>
@@ -7485,7 +7535,7 @@
             <a:r>
               <a:rPr lang="en-US" sz="1050" b="1" spc="240" kern="0" dirty="0">
                 <a:solidFill>
-                  <a:srgbClr val="6B7686"/>
+                  <a:srgbClr val="8FA9D0"/>
                 </a:solidFill>
                 <a:latin typeface="Inter" pitchFamily="34" charset="0"/>
                 <a:ea typeface="Inter" pitchFamily="34" charset="-122"/>
@@ -7499,7 +7549,7 @@
       </p:sp>
       <p:sp>
         <p:nvSpPr>
-          <p:cNvPr id="3" name="Text 1"/>
+          <p:cNvPr id="5" name="Text 2"/>
           <p:cNvSpPr txBox="1"/>
           <p:nvPr/>
         </p:nvSpPr>
@@ -7527,7 +7577,7 @@
             <a:r>
               <a:rPr lang="en-US" sz="2800" b="1" dirty="0">
                 <a:solidFill>
-                  <a:srgbClr val="0F172A"/>
+                  <a:srgbClr val="FFFFFF"/>
                 </a:solidFill>
                 <a:latin typeface="Inter" pitchFamily="34" charset="0"/>
                 <a:ea typeface="Inter" pitchFamily="34" charset="-122"/>
@@ -7547,7 +7597,7 @@
             <a:r>
               <a:rPr lang="en-US" sz="2800" b="1" dirty="0">
                 <a:solidFill>
-                  <a:srgbClr val="0F172A"/>
+                  <a:srgbClr val="FFFFFF"/>
                 </a:solidFill>
                 <a:latin typeface="Inter" pitchFamily="34" charset="0"/>
                 <a:ea typeface="Inter" pitchFamily="34" charset="-122"/>
@@ -7561,13 +7611,13 @@
       </p:sp>
       <p:sp>
         <p:nvSpPr>
-          <p:cNvPr id="4" name="Shape 2"/>
+          <p:cNvPr id="6" name="Shape 3"/>
           <p:cNvSpPr/>
           <p:nvPr/>
         </p:nvSpPr>
         <p:spPr>
           <a:xfrm>
-            <a:off x="804672" y="3063240"/>
+            <a:off x="804672" y="3657600"/>
             <a:ext cx="146304" cy="146304"/>
           </a:xfrm>
           <a:prstGeom prst="ellipse">
@@ -7586,13 +7636,13 @@
       </p:sp>
       <p:sp>
         <p:nvSpPr>
-          <p:cNvPr id="5" name="Text 3"/>
-          <p:cNvSpPr txBox="1"/>
-          <p:nvPr/>
-        </p:nvSpPr>
-        <p:spPr>
-          <a:xfrm>
-            <a:off x="1106424" y="2971800"/>
+          <p:cNvPr id="7" name="Text 4"/>
+          <p:cNvSpPr txBox="1"/>
+          <p:nvPr/>
+        </p:nvSpPr>
+        <p:spPr>
+          <a:xfrm>
+            <a:off x="1106424" y="3566160"/>
             <a:ext cx="3383280" cy="548640"/>
           </a:xfrm>
           <a:prstGeom prst="rect">
@@ -7614,7 +7664,7 @@
             <a:r>
               <a:rPr lang="en-US" sz="1250" b="1" dirty="0">
                 <a:solidFill>
-                  <a:srgbClr val="0F172A"/>
+                  <a:srgbClr val="FFFFFF"/>
                 </a:solidFill>
                 <a:latin typeface="Inter" pitchFamily="34" charset="0"/>
                 <a:ea typeface="Inter" pitchFamily="34" charset="-122"/>
@@ -7628,13 +7678,13 @@
       </p:sp>
       <p:sp>
         <p:nvSpPr>
-          <p:cNvPr id="6" name="Shape 4"/>
+          <p:cNvPr id="8" name="Shape 5"/>
           <p:cNvSpPr/>
           <p:nvPr/>
         </p:nvSpPr>
         <p:spPr>
           <a:xfrm>
-            <a:off x="4690872" y="3063240"/>
+            <a:off x="4690872" y="3657600"/>
             <a:ext cx="146304" cy="146304"/>
           </a:xfrm>
           <a:prstGeom prst="ellipse">
@@ -7653,13 +7703,13 @@
       </p:sp>
       <p:sp>
         <p:nvSpPr>
-          <p:cNvPr id="7" name="Text 5"/>
-          <p:cNvSpPr txBox="1"/>
-          <p:nvPr/>
-        </p:nvSpPr>
-        <p:spPr>
-          <a:xfrm>
-            <a:off x="4992624" y="2971800"/>
+          <p:cNvPr id="9" name="Text 6"/>
+          <p:cNvSpPr txBox="1"/>
+          <p:nvPr/>
+        </p:nvSpPr>
+        <p:spPr>
+          <a:xfrm>
+            <a:off x="4992624" y="3566160"/>
             <a:ext cx="3383280" cy="548640"/>
           </a:xfrm>
           <a:prstGeom prst="rect">
@@ -7681,7 +7731,7 @@
             <a:r>
               <a:rPr lang="en-US" sz="1250" b="1" dirty="0">
                 <a:solidFill>
-                  <a:srgbClr val="0F172A"/>
+                  <a:srgbClr val="FFFFFF"/>
                 </a:solidFill>
                 <a:latin typeface="Inter" pitchFamily="34" charset="0"/>
                 <a:ea typeface="Inter" pitchFamily="34" charset="-122"/>
@@ -7695,13 +7745,13 @@
       </p:sp>
       <p:sp>
         <p:nvSpPr>
-          <p:cNvPr id="8" name="Shape 6"/>
+          <p:cNvPr id="10" name="Shape 7"/>
           <p:cNvSpPr/>
           <p:nvPr/>
         </p:nvSpPr>
         <p:spPr>
           <a:xfrm>
-            <a:off x="804672" y="3776472"/>
+            <a:off x="804672" y="4800600"/>
             <a:ext cx="146304" cy="146304"/>
           </a:xfrm>
           <a:prstGeom prst="ellipse">
@@ -7720,13 +7770,13 @@
       </p:sp>
       <p:sp>
         <p:nvSpPr>
-          <p:cNvPr id="9" name="Text 7"/>
-          <p:cNvSpPr txBox="1"/>
-          <p:nvPr/>
-        </p:nvSpPr>
-        <p:spPr>
-          <a:xfrm>
-            <a:off x="1106424" y="3685032"/>
+          <p:cNvPr id="11" name="Text 8"/>
+          <p:cNvSpPr txBox="1"/>
+          <p:nvPr/>
+        </p:nvSpPr>
+        <p:spPr>
+          <a:xfrm>
+            <a:off x="1106424" y="4709160"/>
             <a:ext cx="3383280" cy="548640"/>
           </a:xfrm>
           <a:prstGeom prst="rect">
@@ -7748,7 +7798,7 @@
             <a:r>
               <a:rPr lang="en-US" sz="1250" b="1" dirty="0">
                 <a:solidFill>
-                  <a:srgbClr val="0F172A"/>
+                  <a:srgbClr val="FFFFFF"/>
                 </a:solidFill>
                 <a:latin typeface="Inter" pitchFamily="34" charset="0"/>
                 <a:ea typeface="Inter" pitchFamily="34" charset="-122"/>
@@ -7762,13 +7812,13 @@
       </p:sp>
       <p:sp>
         <p:nvSpPr>
-          <p:cNvPr id="10" name="Shape 8"/>
+          <p:cNvPr id="12" name="Shape 9"/>
           <p:cNvSpPr/>
           <p:nvPr/>
         </p:nvSpPr>
         <p:spPr>
           <a:xfrm>
-            <a:off x="4690872" y="3776472"/>
+            <a:off x="4690872" y="4800600"/>
             <a:ext cx="146304" cy="146304"/>
           </a:xfrm>
           <a:prstGeom prst="ellipse">
@@ -7787,13 +7837,13 @@
       </p:sp>
       <p:sp>
         <p:nvSpPr>
-          <p:cNvPr id="11" name="Text 9"/>
-          <p:cNvSpPr txBox="1"/>
-          <p:nvPr/>
-        </p:nvSpPr>
-        <p:spPr>
-          <a:xfrm>
-            <a:off x="4992624" y="3685032"/>
+          <p:cNvPr id="13" name="Text 10"/>
+          <p:cNvSpPr txBox="1"/>
+          <p:nvPr/>
+        </p:nvSpPr>
+        <p:spPr>
+          <a:xfrm>
+            <a:off x="4992624" y="4709160"/>
             <a:ext cx="3383280" cy="548640"/>
           </a:xfrm>
           <a:prstGeom prst="rect">
@@ -7815,7 +7865,7 @@
             <a:r>
               <a:rPr lang="en-US" sz="1250" b="1" dirty="0">
                 <a:solidFill>
-                  <a:srgbClr val="0F172A"/>
+                  <a:srgbClr val="FFFFFF"/>
                 </a:solidFill>
                 <a:latin typeface="Inter" pitchFamily="34" charset="0"/>
                 <a:ea typeface="Inter" pitchFamily="34" charset="-122"/>
@@ -7829,13 +7879,13 @@
       </p:sp>
       <p:sp>
         <p:nvSpPr>
-          <p:cNvPr id="12" name="Shape 10"/>
+          <p:cNvPr id="14" name="Shape 11"/>
           <p:cNvSpPr/>
           <p:nvPr/>
         </p:nvSpPr>
         <p:spPr>
           <a:xfrm>
-            <a:off x="804672" y="4489704"/>
+            <a:off x="804672" y="5943600"/>
             <a:ext cx="146304" cy="146304"/>
           </a:xfrm>
           <a:prstGeom prst="ellipse">
@@ -7854,13 +7904,13 @@
       </p:sp>
       <p:sp>
         <p:nvSpPr>
-          <p:cNvPr id="13" name="Text 11"/>
-          <p:cNvSpPr txBox="1"/>
-          <p:nvPr/>
-        </p:nvSpPr>
-        <p:spPr>
-          <a:xfrm>
-            <a:off x="1106424" y="4398264"/>
+          <p:cNvPr id="15" name="Text 12"/>
+          <p:cNvSpPr txBox="1"/>
+          <p:nvPr/>
+        </p:nvSpPr>
+        <p:spPr>
+          <a:xfrm>
+            <a:off x="1106424" y="5852160"/>
             <a:ext cx="3383280" cy="548640"/>
           </a:xfrm>
           <a:prstGeom prst="rect">
@@ -7882,7 +7932,7 @@
             <a:r>
               <a:rPr lang="en-US" sz="1250" b="1" dirty="0">
                 <a:solidFill>
-                  <a:srgbClr val="0F172A"/>
+                  <a:srgbClr val="FFFFFF"/>
                 </a:solidFill>
                 <a:latin typeface="Inter" pitchFamily="34" charset="0"/>
                 <a:ea typeface="Inter" pitchFamily="34" charset="-122"/>
@@ -7896,13 +7946,13 @@
       </p:sp>
       <p:sp>
         <p:nvSpPr>
-          <p:cNvPr id="14" name="Shape 12"/>
+          <p:cNvPr id="16" name="Shape 13"/>
           <p:cNvSpPr/>
           <p:nvPr/>
         </p:nvSpPr>
         <p:spPr>
           <a:xfrm>
-            <a:off x="4690872" y="4489704"/>
+            <a:off x="4690872" y="5943600"/>
             <a:ext cx="146304" cy="146304"/>
           </a:xfrm>
           <a:prstGeom prst="ellipse">
@@ -7921,13 +7971,13 @@
       </p:sp>
       <p:sp>
         <p:nvSpPr>
-          <p:cNvPr id="15" name="Text 13"/>
-          <p:cNvSpPr txBox="1"/>
-          <p:nvPr/>
-        </p:nvSpPr>
-        <p:spPr>
-          <a:xfrm>
-            <a:off x="4992624" y="4398264"/>
+          <p:cNvPr id="17" name="Text 14"/>
+          <p:cNvSpPr txBox="1"/>
+          <p:nvPr/>
+        </p:nvSpPr>
+        <p:spPr>
+          <a:xfrm>
+            <a:off x="4992624" y="5852160"/>
             <a:ext cx="3383280" cy="548640"/>
           </a:xfrm>
           <a:prstGeom prst="rect">
@@ -7949,7 +7999,7 @@
             <a:r>
               <a:rPr lang="en-US" sz="1250" b="1" dirty="0">
                 <a:solidFill>
-                  <a:srgbClr val="0F172A"/>
+                  <a:srgbClr val="FFFFFF"/>
                 </a:solidFill>
                 <a:latin typeface="Inter" pitchFamily="34" charset="0"/>
                 <a:ea typeface="Inter" pitchFamily="34" charset="-122"/>
@@ -7963,13 +8013,13 @@
       </p:sp>
       <p:sp>
         <p:nvSpPr>
-          <p:cNvPr id="16" name="Shape 14"/>
+          <p:cNvPr id="18" name="Shape 15"/>
           <p:cNvSpPr/>
           <p:nvPr/>
         </p:nvSpPr>
         <p:spPr>
           <a:xfrm>
-            <a:off x="804672" y="5202936"/>
+            <a:off x="804672" y="7086600"/>
             <a:ext cx="146304" cy="146304"/>
           </a:xfrm>
           <a:prstGeom prst="ellipse">
@@ -7988,13 +8038,13 @@
       </p:sp>
       <p:sp>
         <p:nvSpPr>
-          <p:cNvPr id="17" name="Text 15"/>
-          <p:cNvSpPr txBox="1"/>
-          <p:nvPr/>
-        </p:nvSpPr>
-        <p:spPr>
-          <a:xfrm>
-            <a:off x="1106424" y="5111496"/>
+          <p:cNvPr id="19" name="Text 16"/>
+          <p:cNvSpPr txBox="1"/>
+          <p:nvPr/>
+        </p:nvSpPr>
+        <p:spPr>
+          <a:xfrm>
+            <a:off x="1106424" y="6995160"/>
             <a:ext cx="3383280" cy="548640"/>
           </a:xfrm>
           <a:prstGeom prst="rect">
@@ -8016,7 +8066,7 @@
             <a:r>
               <a:rPr lang="en-US" sz="1250" b="1" dirty="0">
                 <a:solidFill>
-                  <a:srgbClr val="0F172A"/>
+                  <a:srgbClr val="FFFFFF"/>
                 </a:solidFill>
                 <a:latin typeface="Inter" pitchFamily="34" charset="0"/>
                 <a:ea typeface="Inter" pitchFamily="34" charset="-122"/>
@@ -8030,13 +8080,13 @@
       </p:sp>
       <p:sp>
         <p:nvSpPr>
-          <p:cNvPr id="18" name="Shape 16"/>
+          <p:cNvPr id="20" name="Shape 17"/>
           <p:cNvSpPr/>
           <p:nvPr/>
         </p:nvSpPr>
         <p:spPr>
           <a:xfrm>
-            <a:off x="4690872" y="5202936"/>
+            <a:off x="4690872" y="7086600"/>
             <a:ext cx="146304" cy="146304"/>
           </a:xfrm>
           <a:prstGeom prst="ellipse">
@@ -8055,13 +8105,13 @@
       </p:sp>
       <p:sp>
         <p:nvSpPr>
-          <p:cNvPr id="19" name="Text 17"/>
-          <p:cNvSpPr txBox="1"/>
-          <p:nvPr/>
-        </p:nvSpPr>
-        <p:spPr>
-          <a:xfrm>
-            <a:off x="4992624" y="5111496"/>
+          <p:cNvPr id="21" name="Text 18"/>
+          <p:cNvSpPr txBox="1"/>
+          <p:nvPr/>
+        </p:nvSpPr>
+        <p:spPr>
+          <a:xfrm>
+            <a:off x="4992624" y="6995160"/>
             <a:ext cx="3383280" cy="548640"/>
           </a:xfrm>
           <a:prstGeom prst="rect">
@@ -8083,7 +8133,7 @@
             <a:r>
               <a:rPr lang="en-US" sz="1250" b="1" dirty="0">
                 <a:solidFill>
-                  <a:srgbClr val="0F172A"/>
+                  <a:srgbClr val="FFFFFF"/>
                 </a:solidFill>
                 <a:latin typeface="Inter" pitchFamily="34" charset="0"/>
                 <a:ea typeface="Inter" pitchFamily="34" charset="-122"/>
@@ -8097,118 +8147,30 @@
       </p:sp>
       <p:sp>
         <p:nvSpPr>
-          <p:cNvPr id="20" name="Shape 18"/>
+          <p:cNvPr id="22" name="Shape 19"/>
           <p:cNvSpPr/>
           <p:nvPr/>
         </p:nvSpPr>
         <p:spPr>
           <a:xfrm>
-            <a:off x="777240" y="5989320"/>
-            <a:ext cx="7589520" cy="1188720"/>
+            <a:off x="777240" y="8229600"/>
+            <a:ext cx="7589520" cy="1280160"/>
           </a:xfrm>
           <a:prstGeom prst="roundRect">
             <a:avLst>
-              <a:gd name="adj" fmla="val 10769"/>
+              <a:gd name="adj" fmla="val 11429"/>
             </a:avLst>
-          </a:prstGeom>
-          <a:solidFill>
-            <a:srgbClr val="F7F8FA"/>
-          </a:solidFill>
-          <a:ln w="12700">
-            <a:solidFill>
-              <a:srgbClr val="E6E9EF"/>
-            </a:solidFill>
-            <a:prstDash val="solid"/>
-          </a:ln>
-        </p:spPr>
-      </p:sp>
-      <p:sp>
-        <p:nvSpPr>
-          <p:cNvPr id="21" name="Text 19"/>
-          <p:cNvSpPr txBox="1"/>
-          <p:nvPr/>
-        </p:nvSpPr>
-        <p:spPr>
-          <a:xfrm>
-            <a:off x="1088136" y="6263640"/>
-            <a:ext cx="6967728" cy="685800"/>
-          </a:xfrm>
-          <a:prstGeom prst="rect">
-            <a:avLst/>
-          </a:prstGeom>
-          <a:noFill/>
-          <a:ln/>
-        </p:spPr>
-        <p:txBody>
-          <a:bodyPr wrap="square" lIns="0" tIns="0" rIns="0" bIns="0" rtlCol="0" anchor="t"/>
-          <a:lstStyle/>
-          <a:p>
-            <a:pPr algn="l" indent="0" marL="0">
-              <a:lnSpc>
-                <a:spcPct val="130000"/>
-              </a:lnSpc>
-              <a:buNone/>
-            </a:pPr>
-            <a:r>
-              <a:rPr lang="en-US" sz="1250" dirty="0">
-                <a:solidFill>
-                  <a:srgbClr val="3F4A5C"/>
-                </a:solidFill>
-                <a:latin typeface="Inter" pitchFamily="34" charset="0"/>
-                <a:ea typeface="Inter" pitchFamily="34" charset="-122"/>
-                <a:cs typeface="Inter" pitchFamily="34" charset="-120"/>
-              </a:rPr>
-              <a:t>Al cierre, la empresa revisa los indicadores agregados y los criterios de éxito acordados para decidir el siguiente paso.</a:t>
-            </a:r>
-            <a:endParaRPr lang="en-US" sz="1250" dirty="0"/>
-          </a:p>
-        </p:txBody>
-      </p:sp>
-      <p:pic>
-        <p:nvPicPr>
-          <p:cNvPr id="22" name="Image 0" descr="/home/user/Prototipo-comercial/presentacion/img/valdivia.jpg">    </p:cNvPr>
-          <p:cNvPicPr>
-            <a:picLocks noChangeAspect="1"/>
-          </p:cNvPicPr>
-          <p:nvPr/>
-        </p:nvPicPr>
-        <p:blipFill>
-          <a:blip r:embed="rId1"/>
-          <a:srcRect l="0" r="0" t="0" b="0"/>
-          <a:stretch/>
-        </p:blipFill>
-        <p:spPr>
-          <a:xfrm>
-            <a:off x="0" y="7635240"/>
-            <a:ext cx="9144000" cy="2926080"/>
-          </a:xfrm>
-          <a:prstGeom prst="rect">
-            <a:avLst/>
-          </a:prstGeom>
-        </p:spPr>
-      </p:pic>
-      <p:sp>
-        <p:nvSpPr>
-          <p:cNvPr id="23" name="Shape 20"/>
-          <p:cNvSpPr/>
-          <p:nvPr/>
-        </p:nvSpPr>
-        <p:spPr>
-          <a:xfrm>
-            <a:off x="0" y="7635240"/>
-            <a:ext cx="9144000" cy="2926080"/>
-          </a:xfrm>
-          <a:prstGeom prst="rect">
-            <a:avLst/>
           </a:prstGeom>
           <a:solidFill>
             <a:srgbClr val="FFFFFF">
-              <a:alpha val="22000"/>
+              <a:alpha val="12000"/>
             </a:srgbClr>
           </a:solidFill>
           <a:ln w="12700">
             <a:solidFill>
-              <a:srgbClr val="333333"/>
+              <a:srgbClr val="FFFFFF">
+                <a:alpha val="30000"/>
+              </a:srgbClr>
             </a:solidFill>
             <a:prstDash val="solid"/>
           </a:ln>
@@ -8216,6 +8178,48 @@
       </p:sp>
       <p:sp>
         <p:nvSpPr>
+          <p:cNvPr id="23" name="Text 20"/>
+          <p:cNvSpPr txBox="1"/>
+          <p:nvPr/>
+        </p:nvSpPr>
+        <p:spPr>
+          <a:xfrm>
+            <a:off x="1143000" y="8549640"/>
+            <a:ext cx="6858000" cy="685800"/>
+          </a:xfrm>
+          <a:prstGeom prst="rect">
+            <a:avLst/>
+          </a:prstGeom>
+          <a:noFill/>
+          <a:ln/>
+        </p:spPr>
+        <p:txBody>
+          <a:bodyPr wrap="square" lIns="0" tIns="0" rIns="0" bIns="0" rtlCol="0" anchor="t"/>
+          <a:lstStyle/>
+          <a:p>
+            <a:pPr algn="l" indent="0" marL="0">
+              <a:lnSpc>
+                <a:spcPct val="130000"/>
+              </a:lnSpc>
+              <a:buNone/>
+            </a:pPr>
+            <a:r>
+              <a:rPr lang="en-US" sz="1250" dirty="0">
+                <a:solidFill>
+                  <a:srgbClr val="C8D8F0"/>
+                </a:solidFill>
+                <a:latin typeface="Inter" pitchFamily="34" charset="0"/>
+                <a:ea typeface="Inter" pitchFamily="34" charset="-122"/>
+                <a:cs typeface="Inter" pitchFamily="34" charset="-120"/>
+              </a:rPr>
+              <a:t>Al cierre, la empresa revisa los indicadores agregados y los criterios de éxito acordados para decidir el siguiente paso.</a:t>
+            </a:r>
+            <a:endParaRPr lang="en-US" sz="1250" dirty="0"/>
+          </a:p>
+        </p:txBody>
+      </p:sp>
+      <p:sp>
+        <p:nvSpPr>
           <p:cNvPr id="24" name="Text 21"/>
           <p:cNvSpPr txBox="1"/>
           <p:nvPr/>
@@ -8244,7 +8248,7 @@
             <a:r>
               <a:rPr lang="en-US" sz="1050" dirty="0">
                 <a:solidFill>
-                  <a:srgbClr val="6B7686"/>
+                  <a:srgbClr val="8FA9D0"/>
                 </a:solidFill>
                 <a:latin typeface="Inter" pitchFamily="34" charset="0"/>
                 <a:ea typeface="Inter" pitchFamily="34" charset="-122"/>
@@ -8290,7 +8294,7 @@
       </p:grpSpPr>
       <p:pic>
         <p:nvPicPr>
-          <p:cNvPr id="2" name="Image 0" descr="/home/user/Prototipo-comercial/presentacion/img/vina.jpg">    </p:cNvPr>
+          <p:cNvPr id="2" name="Image 0" descr="/home/user/Prototipo-comercial/presentacion/img/logo-blanco.png">    </p:cNvPr>
           <p:cNvPicPr>
             <a:picLocks noChangeAspect="1"/>
           </p:cNvPicPr>
@@ -8303,56 +8307,6 @@
         </p:blipFill>
         <p:spPr>
           <a:xfrm>
-            <a:off x="0" y="0"/>
-            <a:ext cx="9144000" cy="4206240"/>
-          </a:xfrm>
-          <a:prstGeom prst="rect">
-            <a:avLst/>
-          </a:prstGeom>
-        </p:spPr>
-      </p:pic>
-      <p:sp>
-        <p:nvSpPr>
-          <p:cNvPr id="3" name="Shape 0"/>
-          <p:cNvSpPr/>
-          <p:nvPr/>
-        </p:nvSpPr>
-        <p:spPr>
-          <a:xfrm>
-            <a:off x="0" y="0"/>
-            <a:ext cx="9144000" cy="4206240"/>
-          </a:xfrm>
-          <a:prstGeom prst="rect">
-            <a:avLst/>
-          </a:prstGeom>
-          <a:solidFill>
-            <a:srgbClr val="16233A">
-              <a:alpha val="42000"/>
-            </a:srgbClr>
-          </a:solidFill>
-          <a:ln w="12700">
-            <a:solidFill>
-              <a:srgbClr val="333333"/>
-            </a:solidFill>
-            <a:prstDash val="solid"/>
-          </a:ln>
-        </p:spPr>
-      </p:sp>
-      <p:pic>
-        <p:nvPicPr>
-          <p:cNvPr id="4" name="Image 1" descr="/home/user/Prototipo-comercial/presentacion/img/logo-blanco.png">    </p:cNvPr>
-          <p:cNvPicPr>
-            <a:picLocks noChangeAspect="1"/>
-          </p:cNvPicPr>
-          <p:nvPr/>
-        </p:nvPicPr>
-        <p:blipFill>
-          <a:blip r:embed="rId2"/>
-          <a:srcRect l="0" r="0" t="0" b="0"/>
-          <a:stretch/>
-        </p:blipFill>
-        <p:spPr>
-          <a:xfrm>
             <a:off x="777240" y="932688"/>
             <a:ext cx="402336" cy="426110"/>
           </a:xfrm>
@@ -8363,7 +8317,7 @@
       </p:pic>
       <p:sp>
         <p:nvSpPr>
-          <p:cNvPr id="5" name="Text 1"/>
+          <p:cNvPr id="3" name="Text 0"/>
           <p:cNvSpPr txBox="1"/>
           <p:nvPr/>
         </p:nvSpPr>
@@ -8405,13 +8359,13 @@
       </p:sp>
       <p:sp>
         <p:nvSpPr>
-          <p:cNvPr id="6" name="Text 2"/>
-          <p:cNvSpPr txBox="1"/>
-          <p:nvPr/>
-        </p:nvSpPr>
-        <p:spPr>
-          <a:xfrm>
-            <a:off x="777240" y="5349240"/>
+          <p:cNvPr id="4" name="Text 1"/>
+          <p:cNvSpPr txBox="1"/>
+          <p:nvPr/>
+        </p:nvSpPr>
+        <p:spPr>
+          <a:xfrm>
+            <a:off x="777240" y="3200400"/>
             <a:ext cx="7589520" cy="2011680"/>
           </a:xfrm>
           <a:prstGeom prst="rect">
@@ -8487,13 +8441,13 @@
       </p:sp>
       <p:sp>
         <p:nvSpPr>
-          <p:cNvPr id="7" name="Text 3"/>
-          <p:cNvSpPr txBox="1"/>
-          <p:nvPr/>
-        </p:nvSpPr>
-        <p:spPr>
-          <a:xfrm>
-            <a:off x="777240" y="7498080"/>
+          <p:cNvPr id="5" name="Text 2"/>
+          <p:cNvSpPr txBox="1"/>
+          <p:nvPr/>
+        </p:nvSpPr>
+        <p:spPr>
+          <a:xfrm>
+            <a:off x="777240" y="4983480"/>
             <a:ext cx="7223760" cy="365760"/>
           </a:xfrm>
           <a:prstGeom prst="rect">
@@ -8529,13 +8483,13 @@
       </p:sp>
       <p:sp>
         <p:nvSpPr>
-          <p:cNvPr id="8" name="Shape 4"/>
+          <p:cNvPr id="6" name="Shape 3"/>
           <p:cNvSpPr/>
           <p:nvPr/>
         </p:nvSpPr>
         <p:spPr>
           <a:xfrm>
-            <a:off x="777240" y="8183880"/>
+            <a:off x="777240" y="5943600"/>
             <a:ext cx="1188720" cy="45720"/>
           </a:xfrm>
           <a:prstGeom prst="rect">
@@ -8554,18 +8508,18 @@
       </p:sp>
       <p:sp>
         <p:nvSpPr>
-          <p:cNvPr id="9" name="Shape 5"/>
+          <p:cNvPr id="7" name="Shape 4"/>
           <p:cNvSpPr/>
           <p:nvPr/>
         </p:nvSpPr>
         <p:spPr>
           <a:xfrm>
-            <a:off x="777240" y="8686800"/>
-            <a:ext cx="5760720" cy="1828800"/>
+            <a:off x="777240" y="6492240"/>
+            <a:ext cx="7589520" cy="2697480"/>
           </a:xfrm>
           <a:prstGeom prst="roundRect">
             <a:avLst>
-              <a:gd name="adj" fmla="val 8000"/>
+              <a:gd name="adj" fmla="val 5424"/>
             </a:avLst>
           </a:prstGeom>
           <a:solidFill>
@@ -8585,14 +8539,14 @@
       </p:sp>
       <p:sp>
         <p:nvSpPr>
-          <p:cNvPr id="10" name="Text 6"/>
-          <p:cNvSpPr txBox="1"/>
-          <p:nvPr/>
-        </p:nvSpPr>
-        <p:spPr>
-          <a:xfrm>
-            <a:off x="1143000" y="8961120"/>
-            <a:ext cx="5029200" cy="292608"/>
+          <p:cNvPr id="8" name="Text 5"/>
+          <p:cNvSpPr txBox="1"/>
+          <p:nvPr/>
+        </p:nvSpPr>
+        <p:spPr>
+          <a:xfrm>
+            <a:off x="1188720" y="6876288"/>
+            <a:ext cx="6766560" cy="237744"/>
           </a:xfrm>
           <a:prstGeom prst="rect">
             <a:avLst/>
@@ -8611,7 +8565,49 @@
               <a:buNone/>
             </a:pPr>
             <a:r>
-              <a:rPr lang="en-US" sz="1550" b="1" dirty="0">
+              <a:rPr lang="en-US" sz="1000" b="1" spc="220" kern="0" dirty="0">
+                <a:solidFill>
+                  <a:srgbClr val="8FA9D0"/>
+                </a:solidFill>
+                <a:latin typeface="Inter" pitchFamily="34" charset="0"/>
+                <a:ea typeface="Inter" pitchFamily="34" charset="-122"/>
+                <a:cs typeface="Inter" pitchFamily="34" charset="-120"/>
+              </a:rPr>
+              <a:t>CONTACTO</a:t>
+            </a:r>
+            <a:endParaRPr lang="en-US" sz="1000" dirty="0"/>
+          </a:p>
+        </p:txBody>
+      </p:sp>
+      <p:sp>
+        <p:nvSpPr>
+          <p:cNvPr id="9" name="Text 6"/>
+          <p:cNvSpPr txBox="1"/>
+          <p:nvPr/>
+        </p:nvSpPr>
+        <p:spPr>
+          <a:xfrm>
+            <a:off x="1188720" y="7223760"/>
+            <a:ext cx="6766560" cy="384048"/>
+          </a:xfrm>
+          <a:prstGeom prst="rect">
+            <a:avLst/>
+          </a:prstGeom>
+          <a:noFill/>
+          <a:ln/>
+        </p:spPr>
+        <p:txBody>
+          <a:bodyPr wrap="square" lIns="0" tIns="0" rIns="0" bIns="0" rtlCol="0" anchor="t"/>
+          <a:lstStyle/>
+          <a:p>
+            <a:pPr algn="l" indent="0" marL="0">
+              <a:lnSpc>
+                <a:spcPct val="120000"/>
+              </a:lnSpc>
+              <a:buNone/>
+            </a:pPr>
+            <a:r>
+              <a:rPr lang="en-US" sz="2000" b="1" dirty="0">
                 <a:solidFill>
                   <a:srgbClr val="FFFFFF"/>
                 </a:solidFill>
@@ -8621,20 +8617,20 @@
               </a:rPr>
               <a:t>Diego Córdova E.</a:t>
             </a:r>
-            <a:endParaRPr lang="en-US" sz="1550" dirty="0"/>
-          </a:p>
-        </p:txBody>
-      </p:sp>
-      <p:sp>
-        <p:nvSpPr>
-          <p:cNvPr id="11" name="Text 7"/>
-          <p:cNvSpPr txBox="1"/>
-          <p:nvPr/>
-        </p:nvSpPr>
-        <p:spPr>
-          <a:xfrm>
-            <a:off x="1143000" y="9308592"/>
-            <a:ext cx="5029200" cy="256032"/>
+            <a:endParaRPr lang="en-US" sz="2000" dirty="0"/>
+          </a:p>
+        </p:txBody>
+      </p:sp>
+      <p:sp>
+        <p:nvSpPr>
+          <p:cNvPr id="10" name="Text 7"/>
+          <p:cNvSpPr txBox="1"/>
+          <p:nvPr/>
+        </p:nvSpPr>
+        <p:spPr>
+          <a:xfrm>
+            <a:off x="1188720" y="7662672"/>
+            <a:ext cx="6766560" cy="274320"/>
           </a:xfrm>
           <a:prstGeom prst="rect">
             <a:avLst/>
@@ -8653,7 +8649,7 @@
               <a:buNone/>
             </a:pPr>
             <a:r>
-              <a:rPr lang="en-US" sz="1150" dirty="0">
+              <a:rPr lang="en-US" sz="1300" dirty="0">
                 <a:solidFill>
                   <a:srgbClr val="C8D8F0"/>
                 </a:solidFill>
@@ -8663,20 +8659,47 @@
               </a:rPr>
               <a:t>Fundador · Aplica tu Seguro</a:t>
             </a:r>
-            <a:endParaRPr lang="en-US" sz="1150" dirty="0"/>
-          </a:p>
-        </p:txBody>
-      </p:sp>
-      <p:sp>
-        <p:nvSpPr>
-          <p:cNvPr id="12" name="Text 8"/>
-          <p:cNvSpPr txBox="1"/>
-          <p:nvPr/>
-        </p:nvSpPr>
-        <p:spPr>
-          <a:xfrm>
-            <a:off x="1143000" y="9692640"/>
-            <a:ext cx="2743200" cy="256032"/>
+            <a:endParaRPr lang="en-US" sz="1300" dirty="0"/>
+          </a:p>
+        </p:txBody>
+      </p:sp>
+      <p:sp>
+        <p:nvSpPr>
+          <p:cNvPr id="11" name="Shape 8"/>
+          <p:cNvSpPr/>
+          <p:nvPr/>
+        </p:nvSpPr>
+        <p:spPr>
+          <a:xfrm>
+            <a:off x="1188720" y="8138160"/>
+            <a:ext cx="6766560" cy="10973"/>
+          </a:xfrm>
+          <a:prstGeom prst="rect">
+            <a:avLst/>
+          </a:prstGeom>
+          <a:solidFill>
+            <a:srgbClr val="FFFFFF">
+              <a:alpha val="35000"/>
+            </a:srgbClr>
+          </a:solidFill>
+          <a:ln w="12700">
+            <a:solidFill>
+              <a:srgbClr val="333333"/>
+            </a:solidFill>
+            <a:prstDash val="solid"/>
+          </a:ln>
+        </p:spPr>
+      </p:sp>
+      <p:sp>
+        <p:nvSpPr>
+          <p:cNvPr id="12" name="Text 9"/>
+          <p:cNvSpPr txBox="1"/>
+          <p:nvPr/>
+        </p:nvSpPr>
+        <p:spPr>
+          <a:xfrm>
+            <a:off x="1188720" y="8339328"/>
+            <a:ext cx="3657600" cy="292608"/>
           </a:xfrm>
           <a:prstGeom prst="rect">
             <a:avLst/>
@@ -8695,7 +8718,7 @@
               <a:buNone/>
             </a:pPr>
             <a:r>
-              <a:rPr lang="en-US" sz="1250" dirty="0">
+              <a:rPr lang="en-US" sz="1450" dirty="0">
                 <a:solidFill>
                   <a:srgbClr val="FFFFFF"/>
                 </a:solidFill>
@@ -8705,22 +8728,22 @@
               </a:rPr>
               <a:t>+569 8495 3941</a:t>
             </a:r>
-            <a:endParaRPr lang="en-US" sz="1250" dirty="0"/>
-          </a:p>
-        </p:txBody>
-      </p:sp>
-      <p:sp>
-        <p:nvSpPr>
-          <p:cNvPr id="13" name="Text 9">
-            <a:hlinkClick r:id="rId3" tooltip=""/>
+            <a:endParaRPr lang="en-US" sz="1450" dirty="0"/>
+          </a:p>
+        </p:txBody>
+      </p:sp>
+      <p:sp>
+        <p:nvSpPr>
+          <p:cNvPr id="13" name="Text 10">
+            <a:hlinkClick r:id="rId2" tooltip=""/>
           </p:cNvPr>
           <p:cNvSpPr txBox="1"/>
           <p:nvPr/>
         </p:nvSpPr>
         <p:spPr>
           <a:xfrm>
-            <a:off x="1143000" y="10003536"/>
-            <a:ext cx="5029200" cy="256032"/>
+            <a:off x="1188720" y="8705088"/>
+            <a:ext cx="6766560" cy="292608"/>
           </a:xfrm>
           <a:prstGeom prst="rect">
             <a:avLst/>
@@ -8739,14 +8762,14 @@
               <a:buNone/>
             </a:pPr>
             <a:r>
-              <a:rPr lang="en-US" sz="1250" u="sng" dirty="0">
+              <a:rPr lang="en-US" sz="1450" u="sng" dirty="0">
                 <a:solidFill>
                   <a:srgbClr val="FFFFFF"/>
                 </a:solidFill>
                 <a:latin typeface="Inter" pitchFamily="34" charset="0"/>
                 <a:ea typeface="Inter" pitchFamily="34" charset="-122"/>
                 <a:cs typeface="Inter" pitchFamily="34" charset="-120"/>
-                <a:hlinkClick r:id="rId3" invalidUrl="" action="" tgtFrame="" tooltip="" history="1" highlightClick="0" endSnd="0">
+                <a:hlinkClick r:id="rId2" invalidUrl="" action="" tgtFrame="" tooltip="" history="1" highlightClick="0" endSnd="0">
                   <a:extLst>
                     <a:ext uri="{A12FA001-AC4F-418D-AE19-62706E023703}">
                       <ahyp:hlinkClr xmlns:ahyp="http://schemas.microsoft.com/office/drawing/2018/hyperlinkcolor" val="tx"/>
@@ -8756,13 +8779,13 @@
               </a:rPr>
               <a:t>hola@aplicatuseguro.cl</a:t>
             </a:r>
-            <a:endParaRPr lang="en-US" sz="1250" dirty="0"/>
-          </a:p>
-        </p:txBody>
-      </p:sp>
-      <p:sp>
-        <p:nvSpPr>
-          <p:cNvPr id="14" name="Text 10"/>
+            <a:endParaRPr lang="en-US" sz="1450" dirty="0"/>
+          </a:p>
+        </p:txBody>
+      </p:sp>
+      <p:sp>
+        <p:nvSpPr>
+          <p:cNvPr id="14" name="Text 11"/>
           <p:cNvSpPr txBox="1"/>
           <p:nvPr/>
         </p:nvSpPr>

--- a/presentacion/Aplica-tu-Seguro-Presentacion-Comercial-v2.pptx
+++ b/presentacion/Aplica-tu-Seguro-Presentacion-Comercial-v2.pptx
@@ -1638,7 +1638,7 @@
               <a:buNone/>
             </a:pPr>
             <a:r>
-              <a:rPr lang="en-US" sz="1150" b="1" spc="300" kern="0" dirty="0">
+              <a:rPr lang="en-US" sz="1150" b="1" spc="184" kern="0" dirty="0">
                 <a:solidFill>
                   <a:srgbClr val="FFFFFF"/>
                 </a:solidFill>
@@ -1725,12 +1725,12 @@
           <a:p>
             <a:pPr algn="l" indent="0" marL="0">
               <a:lnSpc>
-                <a:spcPct val="110000"/>
-              </a:lnSpc>
-              <a:buNone/>
-            </a:pPr>
-            <a:r>
-              <a:rPr lang="en-US" sz="3200" b="1" dirty="0">
+                <a:spcPct val="106000"/>
+              </a:lnSpc>
+              <a:buNone/>
+            </a:pPr>
+            <a:r>
+              <a:rPr lang="en-US" sz="3200" b="1" spc="-109" kern="0" dirty="0">
                 <a:solidFill>
                   <a:srgbClr val="FFFFFF"/>
                 </a:solidFill>
@@ -1745,12 +1745,12 @@
           <a:p>
             <a:pPr algn="l" indent="0" marL="0">
               <a:lnSpc>
-                <a:spcPct val="110000"/>
-              </a:lnSpc>
-              <a:buNone/>
-            </a:pPr>
-            <a:r>
-              <a:rPr lang="en-US" sz="3200" b="1" dirty="0">
+                <a:spcPct val="106000"/>
+              </a:lnSpc>
+              <a:buNone/>
+            </a:pPr>
+            <a:r>
+              <a:rPr lang="en-US" sz="3200" b="1" spc="-109" kern="0" dirty="0">
                 <a:solidFill>
                   <a:srgbClr val="FFFFFF"/>
                 </a:solidFill>
@@ -1812,7 +1812,7 @@
           <a:p>
             <a:pPr algn="l" indent="0" marL="0">
               <a:lnSpc>
-                <a:spcPct val="134000"/>
+                <a:spcPct val="142000"/>
               </a:lnSpc>
               <a:buNone/>
             </a:pPr>
@@ -1983,7 +1983,7 @@
               <a:buNone/>
             </a:pPr>
             <a:r>
-              <a:rPr lang="en-US" sz="1050" b="1" spc="240" kern="0" dirty="0">
+              <a:rPr lang="en-US" sz="1050" b="1" spc="105" kern="0" dirty="0">
                 <a:solidFill>
                   <a:srgbClr val="8FA9D0"/>
                 </a:solidFill>
@@ -2025,7 +2025,7 @@
               <a:buNone/>
             </a:pPr>
             <a:r>
-              <a:rPr lang="en-US" sz="2600" b="1" dirty="0">
+              <a:rPr lang="en-US" sz="2600" b="1" spc="-73" kern="0" dirty="0">
                 <a:solidFill>
                   <a:srgbClr val="FFFFFF"/>
                 </a:solidFill>
@@ -2045,7 +2045,7 @@
               <a:buNone/>
             </a:pPr>
             <a:r>
-              <a:rPr lang="en-US" sz="2600" b="1" dirty="0">
+              <a:rPr lang="en-US" sz="2600" b="1" spc="-73" kern="0" dirty="0">
                 <a:solidFill>
                   <a:srgbClr val="FFFFFF"/>
                 </a:solidFill>
@@ -2087,7 +2087,7 @@
               <a:buNone/>
             </a:pPr>
             <a:r>
-              <a:rPr lang="en-US" sz="1550" b="1" dirty="0">
+              <a:rPr lang="en-US" sz="1550" b="1" spc="-25" kern="0" dirty="0">
                 <a:solidFill>
                   <a:srgbClr val="FFFFFF"/>
                 </a:solidFill>
@@ -2196,7 +2196,7 @@
               <a:buNone/>
             </a:pPr>
             <a:r>
-              <a:rPr lang="en-US" sz="1450" b="1" dirty="0">
+              <a:rPr lang="en-US" sz="1450" b="1" spc="-23" kern="0" dirty="0">
                 <a:solidFill>
                   <a:srgbClr val="FFFFFF"/>
                 </a:solidFill>
@@ -2347,7 +2347,7 @@
               <a:buNone/>
             </a:pPr>
             <a:r>
-              <a:rPr lang="en-US" sz="1450" b="1" dirty="0">
+              <a:rPr lang="en-US" sz="1450" b="1" spc="-23" kern="0" dirty="0">
                 <a:solidFill>
                   <a:srgbClr val="FFFFFF"/>
                 </a:solidFill>
@@ -2498,7 +2498,7 @@
               <a:buNone/>
             </a:pPr>
             <a:r>
-              <a:rPr lang="en-US" sz="1450" b="1" dirty="0">
+              <a:rPr lang="en-US" sz="1450" b="1" spc="-23" kern="0" dirty="0">
                 <a:solidFill>
                   <a:srgbClr val="FFFFFF"/>
                 </a:solidFill>
@@ -2656,7 +2656,7 @@
               <a:buNone/>
             </a:pPr>
             <a:r>
-              <a:rPr lang="en-US" sz="1050" b="1" spc="240" kern="0" dirty="0">
+              <a:rPr lang="en-US" sz="1050" b="1" spc="105" kern="0" dirty="0">
                 <a:solidFill>
                   <a:srgbClr val="6B7686"/>
                 </a:solidFill>
@@ -2698,7 +2698,7 @@
               <a:buNone/>
             </a:pPr>
             <a:r>
-              <a:rPr lang="en-US" sz="2600" b="1" dirty="0">
+              <a:rPr lang="en-US" sz="2600" b="1" spc="-73" kern="0" dirty="0">
                 <a:solidFill>
                   <a:srgbClr val="0F172A"/>
                 </a:solidFill>
@@ -2718,7 +2718,7 @@
               <a:buNone/>
             </a:pPr>
             <a:r>
-              <a:rPr lang="en-US" sz="2600" b="1" dirty="0">
+              <a:rPr lang="en-US" sz="2600" b="1" spc="-73" kern="0" dirty="0">
                 <a:solidFill>
                   <a:srgbClr val="0F172A"/>
                 </a:solidFill>
@@ -2755,7 +2755,7 @@
           <a:p>
             <a:pPr algn="l" indent="0" marL="0">
               <a:lnSpc>
-                <a:spcPct val="132000"/>
+                <a:spcPct val="142000"/>
               </a:lnSpc>
               <a:buNone/>
             </a:pPr>
@@ -2827,7 +2827,7 @@
               <a:buNone/>
             </a:pPr>
             <a:r>
-              <a:rPr lang="en-US" sz="1450" b="1" dirty="0">
+              <a:rPr lang="en-US" sz="1450" b="1" spc="-23" kern="0" dirty="0">
                 <a:solidFill>
                   <a:srgbClr val="2C3E5D"/>
                 </a:solidFill>
@@ -2936,7 +2936,7 @@
               <a:buNone/>
             </a:pPr>
             <a:r>
-              <a:rPr lang="en-US" sz="1450" b="1" dirty="0">
+              <a:rPr lang="en-US" sz="1450" b="1" spc="-23" kern="0" dirty="0">
                 <a:solidFill>
                   <a:srgbClr val="2C3E5D"/>
                 </a:solidFill>
@@ -3045,7 +3045,7 @@
               <a:buNone/>
             </a:pPr>
             <a:r>
-              <a:rPr lang="en-US" sz="1450" b="1" dirty="0">
+              <a:rPr lang="en-US" sz="1450" b="1" spc="-23" kern="0" dirty="0">
                 <a:solidFill>
                   <a:srgbClr val="2C3E5D"/>
                 </a:solidFill>
@@ -3154,7 +3154,7 @@
               <a:buNone/>
             </a:pPr>
             <a:r>
-              <a:rPr lang="en-US" sz="1450" b="1" dirty="0">
+              <a:rPr lang="en-US" sz="1450" b="1" spc="-23" kern="0" dirty="0">
                 <a:solidFill>
                   <a:srgbClr val="2C3E5D"/>
                 </a:solidFill>
@@ -3456,7 +3456,7 @@
               <a:buNone/>
             </a:pPr>
             <a:r>
-              <a:rPr lang="en-US" sz="1050" b="1" spc="240" kern="0" dirty="0">
+              <a:rPr lang="en-US" sz="1050" b="1" spc="105" kern="0" dirty="0">
                 <a:solidFill>
                   <a:srgbClr val="8FA9D0"/>
                 </a:solidFill>
@@ -3498,7 +3498,7 @@
               <a:buNone/>
             </a:pPr>
             <a:r>
-              <a:rPr lang="en-US" sz="3000" b="1" dirty="0">
+              <a:rPr lang="en-US" sz="3000" b="1" spc="-84" kern="0" dirty="0">
                 <a:solidFill>
                   <a:srgbClr val="FFFFFF"/>
                 </a:solidFill>
@@ -3518,7 +3518,7 @@
               <a:buNone/>
             </a:pPr>
             <a:r>
-              <a:rPr lang="en-US" sz="3000" b="1" dirty="0">
+              <a:rPr lang="en-US" sz="3000" b="1" spc="-84" kern="0" dirty="0">
                 <a:solidFill>
                   <a:srgbClr val="FFFFFF"/>
                 </a:solidFill>
@@ -3555,7 +3555,7 @@
           <a:p>
             <a:pPr algn="l" indent="0" marL="0">
               <a:lnSpc>
-                <a:spcPct val="134000"/>
+                <a:spcPct val="142000"/>
               </a:lnSpc>
               <a:buNone/>
             </a:pPr>
@@ -3675,7 +3675,7 @@
               <a:buNone/>
             </a:pPr>
             <a:r>
-              <a:rPr lang="en-US" sz="1000" b="1" spc="140" kern="0" dirty="0">
+              <a:rPr lang="en-US" sz="1000" b="1" spc="60" kern="0" dirty="0">
                 <a:solidFill>
                   <a:srgbClr val="FFFFFF"/>
                 </a:solidFill>
@@ -3748,7 +3748,7 @@
               <a:buNone/>
             </a:pPr>
             <a:r>
-              <a:rPr lang="en-US" sz="1000" b="1" spc="140" kern="0" dirty="0">
+              <a:rPr lang="en-US" sz="1000" b="1" spc="60" kern="0" dirty="0">
                 <a:solidFill>
                   <a:srgbClr val="FFFFFF"/>
                 </a:solidFill>
@@ -3821,7 +3821,7 @@
               <a:buNone/>
             </a:pPr>
             <a:r>
-              <a:rPr lang="en-US" sz="1000" b="1" spc="140" kern="0" dirty="0">
+              <a:rPr lang="en-US" sz="1000" b="1" spc="60" kern="0" dirty="0">
                 <a:solidFill>
                   <a:srgbClr val="FFFFFF"/>
                 </a:solidFill>
@@ -3894,7 +3894,7 @@
               <a:buNone/>
             </a:pPr>
             <a:r>
-              <a:rPr lang="en-US" sz="1000" b="1" spc="140" kern="0" dirty="0">
+              <a:rPr lang="en-US" sz="1000" b="1" spc="60" kern="0" dirty="0">
                 <a:solidFill>
                   <a:srgbClr val="FFFFFF"/>
                 </a:solidFill>
@@ -3967,7 +3967,7 @@
               <a:buNone/>
             </a:pPr>
             <a:r>
-              <a:rPr lang="en-US" sz="1000" b="1" spc="140" kern="0" dirty="0">
+              <a:rPr lang="en-US" sz="1000" b="1" spc="60" kern="0" dirty="0">
                 <a:solidFill>
                   <a:srgbClr val="FFFFFF"/>
                 </a:solidFill>
@@ -4043,7 +4043,7 @@
               <a:buNone/>
             </a:pPr>
             <a:r>
-              <a:rPr lang="en-US" sz="1000" b="1" spc="220" kern="0" dirty="0">
+              <a:rPr lang="en-US" sz="1000" b="1" spc="100" kern="0" dirty="0">
                 <a:solidFill>
                   <a:srgbClr val="B45309"/>
                 </a:solidFill>
@@ -4080,12 +4080,12 @@
           <a:p>
             <a:pPr algn="l" indent="0" marL="0">
               <a:lnSpc>
-                <a:spcPct val="114000"/>
-              </a:lnSpc>
-              <a:buNone/>
-            </a:pPr>
-            <a:r>
-              <a:rPr lang="en-US" sz="2100" b="1" dirty="0">
+                <a:spcPct val="112000"/>
+              </a:lnSpc>
+              <a:buNone/>
+            </a:pPr>
+            <a:r>
+              <a:rPr lang="en-US" sz="2100" b="1" spc="-50" kern="0" dirty="0">
                 <a:solidFill>
                   <a:srgbClr val="0F172A"/>
                 </a:solidFill>
@@ -4100,12 +4100,12 @@
           <a:p>
             <a:pPr algn="l" indent="0" marL="0">
               <a:lnSpc>
-                <a:spcPct val="114000"/>
-              </a:lnSpc>
-              <a:buNone/>
-            </a:pPr>
-            <a:r>
-              <a:rPr lang="en-US" sz="2100" b="1" dirty="0">
+                <a:spcPct val="112000"/>
+              </a:lnSpc>
+              <a:buNone/>
+            </a:pPr>
+            <a:r>
+              <a:rPr lang="en-US" sz="2100" b="1" spc="-50" kern="0" dirty="0">
                 <a:solidFill>
                   <a:srgbClr val="0F172A"/>
                 </a:solidFill>
@@ -4596,7 +4596,7 @@
               <a:buNone/>
             </a:pPr>
             <a:r>
-              <a:rPr lang="en-US" sz="1050" b="1" spc="240" kern="0" dirty="0">
+              <a:rPr lang="en-US" sz="1050" b="1" spc="105" kern="0" dirty="0">
                 <a:solidFill>
                   <a:srgbClr val="6B7686"/>
                 </a:solidFill>
@@ -4638,7 +4638,7 @@
               <a:buNone/>
             </a:pPr>
             <a:r>
-              <a:rPr lang="en-US" sz="2700" b="1" dirty="0">
+              <a:rPr lang="en-US" sz="2700" b="1" spc="-76" kern="0" dirty="0">
                 <a:solidFill>
                   <a:srgbClr val="0F172A"/>
                 </a:solidFill>
@@ -4658,7 +4658,7 @@
               <a:buNone/>
             </a:pPr>
             <a:r>
-              <a:rPr lang="en-US" sz="2700" b="1" dirty="0">
+              <a:rPr lang="en-US" sz="2700" b="1" spc="-76" kern="0" dirty="0">
                 <a:solidFill>
                   <a:srgbClr val="0F172A"/>
                 </a:solidFill>
@@ -4769,7 +4769,7 @@
               <a:buNone/>
             </a:pPr>
             <a:r>
-              <a:rPr lang="en-US" sz="1500" b="1" dirty="0">
+              <a:rPr lang="en-US" sz="1500" b="1" spc="-24" kern="0" dirty="0">
                 <a:solidFill>
                   <a:srgbClr val="2C3E5D"/>
                 </a:solidFill>
@@ -4880,7 +4880,7 @@
               <a:buNone/>
             </a:pPr>
             <a:r>
-              <a:rPr lang="en-US" sz="1500" b="1" dirty="0">
+              <a:rPr lang="en-US" sz="1500" b="1" spc="-24" kern="0" dirty="0">
                 <a:solidFill>
                   <a:srgbClr val="2C3E5D"/>
                 </a:solidFill>
@@ -4991,7 +4991,7 @@
               <a:buNone/>
             </a:pPr>
             <a:r>
-              <a:rPr lang="en-US" sz="1500" b="1" dirty="0">
+              <a:rPr lang="en-US" sz="1500" b="1" spc="-24" kern="0" dirty="0">
                 <a:solidFill>
                   <a:srgbClr val="2C3E5D"/>
                 </a:solidFill>
@@ -5102,7 +5102,7 @@
               <a:buNone/>
             </a:pPr>
             <a:r>
-              <a:rPr lang="en-US" sz="1000" b="1" spc="220" kern="0" dirty="0">
+              <a:rPr lang="en-US" sz="1000" b="1" spc="100" kern="0" dirty="0">
                 <a:solidFill>
                   <a:srgbClr val="8FA9D0"/>
                 </a:solidFill>
@@ -5189,7 +5189,7 @@
     <p:bg>
       <p:bgPr>
         <a:solidFill>
-          <a:srgbClr val="FFFFFF"/>
+          <a:srgbClr val="16233A"/>
         </a:solidFill>
       </p:bgPr>
     </p:bg>
@@ -5207,195 +5207,47 @@
           <a:chExt cx="0" cy="0"/>
         </a:xfrm>
       </p:grpSpPr>
-      <p:sp>
-        <p:nvSpPr>
-          <p:cNvPr id="2" name="Text 0"/>
-          <p:cNvSpPr txBox="1"/>
-          <p:nvPr/>
-        </p:nvSpPr>
-        <p:spPr>
-          <a:xfrm>
-            <a:off x="777240" y="841248"/>
-            <a:ext cx="7589520" cy="237744"/>
-          </a:xfrm>
-          <a:prstGeom prst="rect">
-            <a:avLst/>
-          </a:prstGeom>
-          <a:noFill/>
-          <a:ln/>
-        </p:spPr>
-        <p:txBody>
-          <a:bodyPr wrap="square" lIns="0" tIns="0" rIns="0" bIns="0" rtlCol="0" anchor="t"/>
-          <a:lstStyle/>
-          <a:p>
-            <a:pPr algn="l" indent="0" marL="0">
-              <a:lnSpc>
-                <a:spcPct val="120000"/>
-              </a:lnSpc>
-              <a:buNone/>
-            </a:pPr>
-            <a:r>
-              <a:rPr lang="en-US" sz="1050" b="1" spc="240" kern="0" dirty="0">
-                <a:solidFill>
-                  <a:srgbClr val="6B7686"/>
-                </a:solidFill>
-                <a:latin typeface="Inter" pitchFamily="34" charset="0"/>
-                <a:ea typeface="Inter" pitchFamily="34" charset="-122"/>
-                <a:cs typeface="Inter" pitchFamily="34" charset="-120"/>
-              </a:rPr>
-              <a:t>PRIVACIDAD</a:t>
-            </a:r>
-            <a:endParaRPr lang="en-US" sz="1050" dirty="0"/>
-          </a:p>
-        </p:txBody>
-      </p:sp>
-      <p:sp>
-        <p:nvSpPr>
-          <p:cNvPr id="3" name="Text 1"/>
-          <p:cNvSpPr txBox="1"/>
-          <p:nvPr/>
-        </p:nvSpPr>
-        <p:spPr>
-          <a:xfrm>
-            <a:off x="777240" y="1243584"/>
-            <a:ext cx="7589520" cy="1828800"/>
-          </a:xfrm>
-          <a:prstGeom prst="rect">
-            <a:avLst/>
-          </a:prstGeom>
-          <a:noFill/>
-          <a:ln/>
-        </p:spPr>
-        <p:txBody>
-          <a:bodyPr wrap="square" lIns="0" tIns="0" rIns="0" bIns="0" rtlCol="0" anchor="t"/>
-          <a:lstStyle/>
-          <a:p>
-            <a:pPr algn="l" indent="0" marL="0">
-              <a:lnSpc>
-                <a:spcPct val="110000"/>
-              </a:lnSpc>
-              <a:buNone/>
-            </a:pPr>
-            <a:r>
-              <a:rPr lang="en-US" sz="2400" b="1" dirty="0">
-                <a:solidFill>
-                  <a:srgbClr val="0F172A"/>
-                </a:solidFill>
-                <a:latin typeface="Inter" pitchFamily="34" charset="0"/>
-                <a:ea typeface="Inter" pitchFamily="34" charset="-122"/>
-                <a:cs typeface="Inter" pitchFamily="34" charset="-120"/>
-              </a:rPr>
-              <a:t>El diseño propuesto separa la experiencia</a:t>
-            </a:r>
-            <a:endParaRPr lang="en-US" sz="2400" dirty="0"/>
-          </a:p>
-          <a:p>
-            <a:pPr algn="l" indent="0" marL="0">
-              <a:lnSpc>
-                <a:spcPct val="110000"/>
-              </a:lnSpc>
-              <a:buNone/>
-            </a:pPr>
-            <a:r>
-              <a:rPr lang="en-US" sz="2400" b="1" dirty="0">
-                <a:solidFill>
-                  <a:srgbClr val="0F172A"/>
-                </a:solidFill>
-                <a:latin typeface="Inter" pitchFamily="34" charset="0"/>
-                <a:ea typeface="Inter" pitchFamily="34" charset="-122"/>
-                <a:cs typeface="Inter" pitchFamily="34" charset="-120"/>
-              </a:rPr>
-              <a:t>individual del dashboard corporativo.</a:t>
-            </a:r>
-            <a:endParaRPr lang="en-US" sz="2400" dirty="0"/>
-          </a:p>
-        </p:txBody>
-      </p:sp>
-      <p:sp>
-        <p:nvSpPr>
-          <p:cNvPr id="4" name="Shape 2"/>
+      <p:pic>
+        <p:nvPicPr>
+          <p:cNvPr id="2" name="Image 0" descr="/home/user/Prototipo-comercial/presentacion/img/vina-fondo.jpg">    </p:cNvPr>
+          <p:cNvPicPr>
+            <a:picLocks noChangeAspect="1"/>
+          </p:cNvPicPr>
+          <p:nvPr/>
+        </p:nvPicPr>
+        <p:blipFill>
+          <a:blip r:embed="rId1"/>
+          <a:srcRect l="0" r="0" t="0" b="0"/>
+          <a:stretch/>
+        </p:blipFill>
+        <p:spPr>
+          <a:xfrm>
+            <a:off x="0" y="0"/>
+            <a:ext cx="9144000" cy="12191695"/>
+          </a:xfrm>
+          <a:prstGeom prst="rect">
+            <a:avLst/>
+          </a:prstGeom>
+        </p:spPr>
+      </p:pic>
+      <p:sp>
+        <p:nvSpPr>
+          <p:cNvPr id="3" name="Shape 0"/>
           <p:cNvSpPr/>
           <p:nvPr/>
         </p:nvSpPr>
         <p:spPr>
           <a:xfrm>
-            <a:off x="777240" y="3017520"/>
-            <a:ext cx="7589520" cy="2560320"/>
-          </a:xfrm>
-          <a:prstGeom prst="roundRect">
-            <a:avLst>
-              <a:gd name="adj" fmla="val 5000"/>
-            </a:avLst>
+            <a:off x="0" y="0"/>
+            <a:ext cx="9144000" cy="12191695"/>
+          </a:xfrm>
+          <a:prstGeom prst="rect">
+            <a:avLst/>
           </a:prstGeom>
           <a:solidFill>
-            <a:srgbClr val="F7F8FA"/>
-          </a:solidFill>
-          <a:ln w="12700">
-            <a:solidFill>
-              <a:srgbClr val="E6E9EF"/>
-            </a:solidFill>
-            <a:prstDash val="solid"/>
-          </a:ln>
-        </p:spPr>
-      </p:sp>
-      <p:sp>
-        <p:nvSpPr>
-          <p:cNvPr id="5" name="Text 3"/>
-          <p:cNvSpPr txBox="1"/>
-          <p:nvPr/>
-        </p:nvSpPr>
-        <p:spPr>
-          <a:xfrm>
-            <a:off x="1106424" y="3282696"/>
-            <a:ext cx="6931152" cy="237744"/>
-          </a:xfrm>
-          <a:prstGeom prst="rect">
-            <a:avLst/>
-          </a:prstGeom>
-          <a:noFill/>
-          <a:ln/>
-        </p:spPr>
-        <p:txBody>
-          <a:bodyPr wrap="square" lIns="0" tIns="0" rIns="0" bIns="0" rtlCol="0" anchor="t"/>
-          <a:lstStyle/>
-          <a:p>
-            <a:pPr algn="l" indent="0" marL="0">
-              <a:lnSpc>
-                <a:spcPct val="120000"/>
-              </a:lnSpc>
-              <a:buNone/>
-            </a:pPr>
-            <a:r>
-              <a:rPr lang="en-US" sz="1000" b="1" spc="200" kern="0" dirty="0">
-                <a:solidFill>
-                  <a:srgbClr val="B45309"/>
-                </a:solidFill>
-                <a:latin typeface="Inter" pitchFamily="34" charset="0"/>
-                <a:ea typeface="Inter" pitchFamily="34" charset="-122"/>
-                <a:cs typeface="Inter" pitchFamily="34" charset="-120"/>
-              </a:rPr>
-              <a:t>LA EMPRESA NO ACCEDE A</a:t>
-            </a:r>
-            <a:endParaRPr lang="en-US" sz="1000" dirty="0"/>
-          </a:p>
-        </p:txBody>
-      </p:sp>
-      <p:sp>
-        <p:nvSpPr>
-          <p:cNvPr id="6" name="Shape 4"/>
-          <p:cNvSpPr/>
-          <p:nvPr/>
-        </p:nvSpPr>
-        <p:spPr>
-          <a:xfrm>
-            <a:off x="1124712" y="3867912"/>
-            <a:ext cx="91440" cy="91440"/>
-          </a:xfrm>
-          <a:prstGeom prst="ellipse">
-            <a:avLst/>
-          </a:prstGeom>
-          <a:solidFill>
-            <a:srgbClr val="B45309"/>
+            <a:srgbClr val="16233A">
+              <a:alpha val="83000"/>
+            </a:srgbClr>
           </a:solidFill>
           <a:ln w="12700">
             <a:solidFill>
@@ -5407,14 +5259,14 @@
       </p:sp>
       <p:sp>
         <p:nvSpPr>
-          <p:cNvPr id="7" name="Text 5"/>
-          <p:cNvSpPr txBox="1"/>
-          <p:nvPr/>
-        </p:nvSpPr>
-        <p:spPr>
-          <a:xfrm>
-            <a:off x="1362456" y="3776472"/>
-            <a:ext cx="6675120" cy="274320"/>
+          <p:cNvPr id="4" name="Text 1"/>
+          <p:cNvSpPr txBox="1"/>
+          <p:nvPr/>
+        </p:nvSpPr>
+        <p:spPr>
+          <a:xfrm>
+            <a:off x="777240" y="841248"/>
+            <a:ext cx="7589520" cy="237744"/>
           </a:xfrm>
           <a:prstGeom prst="rect">
             <a:avLst/>
@@ -5433,36 +5285,171 @@
               <a:buNone/>
             </a:pPr>
             <a:r>
-              <a:rPr lang="en-US" sz="1200" dirty="0">
-                <a:solidFill>
-                  <a:srgbClr val="3F4A5C"/>
-                </a:solidFill>
-                <a:latin typeface="Inter" pitchFamily="34" charset="0"/>
-                <a:ea typeface="Inter" pitchFamily="34" charset="-122"/>
-                <a:cs typeface="Inter" pitchFamily="34" charset="-120"/>
-              </a:rPr>
-              <a:t>Diagnósticos</a:t>
-            </a:r>
-            <a:endParaRPr lang="en-US" sz="1200" dirty="0"/>
-          </a:p>
-        </p:txBody>
-      </p:sp>
-      <p:sp>
-        <p:nvSpPr>
-          <p:cNvPr id="8" name="Shape 6"/>
+              <a:rPr lang="en-US" sz="1050" b="1" spc="105" kern="0" dirty="0">
+                <a:solidFill>
+                  <a:srgbClr val="8FA9D0"/>
+                </a:solidFill>
+                <a:latin typeface="Inter" pitchFamily="34" charset="0"/>
+                <a:ea typeface="Inter" pitchFamily="34" charset="-122"/>
+                <a:cs typeface="Inter" pitchFamily="34" charset="-120"/>
+              </a:rPr>
+              <a:t>PRIVACIDAD</a:t>
+            </a:r>
+            <a:endParaRPr lang="en-US" sz="1050" dirty="0"/>
+          </a:p>
+        </p:txBody>
+      </p:sp>
+      <p:sp>
+        <p:nvSpPr>
+          <p:cNvPr id="5" name="Text 2"/>
+          <p:cNvSpPr txBox="1"/>
+          <p:nvPr/>
+        </p:nvSpPr>
+        <p:spPr>
+          <a:xfrm>
+            <a:off x="777240" y="1243584"/>
+            <a:ext cx="7589520" cy="1828800"/>
+          </a:xfrm>
+          <a:prstGeom prst="rect">
+            <a:avLst/>
+          </a:prstGeom>
+          <a:noFill/>
+          <a:ln/>
+        </p:spPr>
+        <p:txBody>
+          <a:bodyPr wrap="square" lIns="0" tIns="0" rIns="0" bIns="0" rtlCol="0" anchor="t"/>
+          <a:lstStyle/>
+          <a:p>
+            <a:pPr algn="l" indent="0" marL="0">
+              <a:lnSpc>
+                <a:spcPct val="110000"/>
+              </a:lnSpc>
+              <a:buNone/>
+            </a:pPr>
+            <a:r>
+              <a:rPr lang="en-US" sz="2400" b="1" spc="-67" kern="0" dirty="0">
+                <a:solidFill>
+                  <a:srgbClr val="FFFFFF"/>
+                </a:solidFill>
+                <a:latin typeface="Inter" pitchFamily="34" charset="0"/>
+                <a:ea typeface="Inter" pitchFamily="34" charset="-122"/>
+                <a:cs typeface="Inter" pitchFamily="34" charset="-120"/>
+              </a:rPr>
+              <a:t>El diseño propuesto separa la experiencia</a:t>
+            </a:r>
+            <a:endParaRPr lang="en-US" sz="2400" dirty="0"/>
+          </a:p>
+          <a:p>
+            <a:pPr algn="l" indent="0" marL="0">
+              <a:lnSpc>
+                <a:spcPct val="110000"/>
+              </a:lnSpc>
+              <a:buNone/>
+            </a:pPr>
+            <a:r>
+              <a:rPr lang="en-US" sz="2400" b="1" spc="-67" kern="0" dirty="0">
+                <a:solidFill>
+                  <a:srgbClr val="FFFFFF"/>
+                </a:solidFill>
+                <a:latin typeface="Inter" pitchFamily="34" charset="0"/>
+                <a:ea typeface="Inter" pitchFamily="34" charset="-122"/>
+                <a:cs typeface="Inter" pitchFamily="34" charset="-120"/>
+              </a:rPr>
+              <a:t>individual del dashboard corporativo.</a:t>
+            </a:r>
+            <a:endParaRPr lang="en-US" sz="2400" dirty="0"/>
+          </a:p>
+        </p:txBody>
+      </p:sp>
+      <p:sp>
+        <p:nvSpPr>
+          <p:cNvPr id="6" name="Shape 3"/>
           <p:cNvSpPr/>
           <p:nvPr/>
         </p:nvSpPr>
         <p:spPr>
           <a:xfrm>
-            <a:off x="1124712" y="4169664"/>
+            <a:off x="777240" y="3017520"/>
+            <a:ext cx="7589520" cy="2560320"/>
+          </a:xfrm>
+          <a:prstGeom prst="roundRect">
+            <a:avLst>
+              <a:gd name="adj" fmla="val 5714"/>
+            </a:avLst>
+          </a:prstGeom>
+          <a:solidFill>
+            <a:srgbClr val="FFFFFF">
+              <a:alpha val="18000"/>
+            </a:srgbClr>
+          </a:solidFill>
+          <a:ln w="12700">
+            <a:solidFill>
+              <a:srgbClr val="FFFFFF">
+                <a:alpha val="36000"/>
+              </a:srgbClr>
+            </a:solidFill>
+            <a:prstDash val="solid"/>
+          </a:ln>
+        </p:spPr>
+      </p:sp>
+      <p:sp>
+        <p:nvSpPr>
+          <p:cNvPr id="7" name="Text 4"/>
+          <p:cNvSpPr txBox="1"/>
+          <p:nvPr/>
+        </p:nvSpPr>
+        <p:spPr>
+          <a:xfrm>
+            <a:off x="1143000" y="3282696"/>
+            <a:ext cx="6858000" cy="237744"/>
+          </a:xfrm>
+          <a:prstGeom prst="rect">
+            <a:avLst/>
+          </a:prstGeom>
+          <a:noFill/>
+          <a:ln/>
+        </p:spPr>
+        <p:txBody>
+          <a:bodyPr wrap="square" lIns="0" tIns="0" rIns="0" bIns="0" rtlCol="0" anchor="t"/>
+          <a:lstStyle/>
+          <a:p>
+            <a:pPr algn="l" indent="0" marL="0">
+              <a:lnSpc>
+                <a:spcPct val="120000"/>
+              </a:lnSpc>
+              <a:buNone/>
+            </a:pPr>
+            <a:r>
+              <a:rPr lang="en-US" sz="1000" b="1" spc="100" kern="0" dirty="0">
+                <a:solidFill>
+                  <a:srgbClr val="E8A25C"/>
+                </a:solidFill>
+                <a:latin typeface="Inter" pitchFamily="34" charset="0"/>
+                <a:ea typeface="Inter" pitchFamily="34" charset="-122"/>
+                <a:cs typeface="Inter" pitchFamily="34" charset="-120"/>
+              </a:rPr>
+              <a:t>LA EMPRESA NO ACCEDE A</a:t>
+            </a:r>
+            <a:endParaRPr lang="en-US" sz="1000" dirty="0"/>
+          </a:p>
+        </p:txBody>
+      </p:sp>
+      <p:sp>
+        <p:nvSpPr>
+          <p:cNvPr id="8" name="Shape 5"/>
+          <p:cNvSpPr/>
+          <p:nvPr/>
+        </p:nvSpPr>
+        <p:spPr>
+          <a:xfrm>
+            <a:off x="1161288" y="3867912"/>
             <a:ext cx="91440" cy="91440"/>
           </a:xfrm>
           <a:prstGeom prst="ellipse">
             <a:avLst/>
           </a:prstGeom>
           <a:solidFill>
-            <a:srgbClr val="B45309"/>
+            <a:srgbClr val="E8A25C"/>
           </a:solidFill>
           <a:ln w="12700">
             <a:solidFill>
@@ -5474,14 +5461,14 @@
       </p:sp>
       <p:sp>
         <p:nvSpPr>
-          <p:cNvPr id="9" name="Text 7"/>
-          <p:cNvSpPr txBox="1"/>
-          <p:nvPr/>
-        </p:nvSpPr>
-        <p:spPr>
-          <a:xfrm>
-            <a:off x="1362456" y="4078224"/>
-            <a:ext cx="6675120" cy="274320"/>
+          <p:cNvPr id="9" name="Text 6"/>
+          <p:cNvSpPr txBox="1"/>
+          <p:nvPr/>
+        </p:nvSpPr>
+        <p:spPr>
+          <a:xfrm>
+            <a:off x="1399032" y="3776472"/>
+            <a:ext cx="6601968" cy="274320"/>
           </a:xfrm>
           <a:prstGeom prst="rect">
             <a:avLst/>
@@ -5502,13 +5489,13 @@
             <a:r>
               <a:rPr lang="en-US" sz="1200" dirty="0">
                 <a:solidFill>
-                  <a:srgbClr val="3F4A5C"/>
-                </a:solidFill>
-                <a:latin typeface="Inter" pitchFamily="34" charset="0"/>
-                <a:ea typeface="Inter" pitchFamily="34" charset="-122"/>
-                <a:cs typeface="Inter" pitchFamily="34" charset="-120"/>
-              </a:rPr>
-              <a:t>Documentos médicos</a:t>
+                  <a:srgbClr val="C8D8F0"/>
+                </a:solidFill>
+                <a:latin typeface="Inter" pitchFamily="34" charset="0"/>
+                <a:ea typeface="Inter" pitchFamily="34" charset="-122"/>
+                <a:cs typeface="Inter" pitchFamily="34" charset="-120"/>
+              </a:rPr>
+              <a:t>Diagnósticos</a:t>
             </a:r>
             <a:endParaRPr lang="en-US" sz="1200" dirty="0"/>
           </a:p>
@@ -5516,20 +5503,20 @@
       </p:sp>
       <p:sp>
         <p:nvSpPr>
-          <p:cNvPr id="10" name="Shape 8"/>
+          <p:cNvPr id="10" name="Shape 7"/>
           <p:cNvSpPr/>
           <p:nvPr/>
         </p:nvSpPr>
         <p:spPr>
           <a:xfrm>
-            <a:off x="1124712" y="4471416"/>
+            <a:off x="1161288" y="4169664"/>
             <a:ext cx="91440" cy="91440"/>
           </a:xfrm>
           <a:prstGeom prst="ellipse">
             <a:avLst/>
           </a:prstGeom>
           <a:solidFill>
-            <a:srgbClr val="B45309"/>
+            <a:srgbClr val="E8A25C"/>
           </a:solidFill>
           <a:ln w="12700">
             <a:solidFill>
@@ -5541,14 +5528,14 @@
       </p:sp>
       <p:sp>
         <p:nvSpPr>
-          <p:cNvPr id="11" name="Text 9"/>
-          <p:cNvSpPr txBox="1"/>
-          <p:nvPr/>
-        </p:nvSpPr>
-        <p:spPr>
-          <a:xfrm>
-            <a:off x="1362456" y="4379976"/>
-            <a:ext cx="6675120" cy="274320"/>
+          <p:cNvPr id="11" name="Text 8"/>
+          <p:cNvSpPr txBox="1"/>
+          <p:nvPr/>
+        </p:nvSpPr>
+        <p:spPr>
+          <a:xfrm>
+            <a:off x="1399032" y="4078224"/>
+            <a:ext cx="6601968" cy="274320"/>
           </a:xfrm>
           <a:prstGeom prst="rect">
             <a:avLst/>
@@ -5569,13 +5556,13 @@
             <a:r>
               <a:rPr lang="en-US" sz="1200" dirty="0">
                 <a:solidFill>
-                  <a:srgbClr val="3F4A5C"/>
-                </a:solidFill>
-                <a:latin typeface="Inter" pitchFamily="34" charset="0"/>
-                <a:ea typeface="Inter" pitchFamily="34" charset="-122"/>
-                <a:cs typeface="Inter" pitchFamily="34" charset="-120"/>
-              </a:rPr>
-              <a:t>Consultas individuales</a:t>
+                  <a:srgbClr val="C8D8F0"/>
+                </a:solidFill>
+                <a:latin typeface="Inter" pitchFamily="34" charset="0"/>
+                <a:ea typeface="Inter" pitchFamily="34" charset="-122"/>
+                <a:cs typeface="Inter" pitchFamily="34" charset="-120"/>
+              </a:rPr>
+              <a:t>Documentos médicos</a:t>
             </a:r>
             <a:endParaRPr lang="en-US" sz="1200" dirty="0"/>
           </a:p>
@@ -5583,20 +5570,20 @@
       </p:sp>
       <p:sp>
         <p:nvSpPr>
-          <p:cNvPr id="12" name="Shape 10"/>
+          <p:cNvPr id="12" name="Shape 9"/>
           <p:cNvSpPr/>
           <p:nvPr/>
         </p:nvSpPr>
         <p:spPr>
           <a:xfrm>
-            <a:off x="1124712" y="4773168"/>
+            <a:off x="1161288" y="4471416"/>
             <a:ext cx="91440" cy="91440"/>
           </a:xfrm>
           <a:prstGeom prst="ellipse">
             <a:avLst/>
           </a:prstGeom>
           <a:solidFill>
-            <a:srgbClr val="B45309"/>
+            <a:srgbClr val="E8A25C"/>
           </a:solidFill>
           <a:ln w="12700">
             <a:solidFill>
@@ -5608,14 +5595,14 @@
       </p:sp>
       <p:sp>
         <p:nvSpPr>
-          <p:cNvPr id="13" name="Text 11"/>
-          <p:cNvSpPr txBox="1"/>
-          <p:nvPr/>
-        </p:nvSpPr>
-        <p:spPr>
-          <a:xfrm>
-            <a:off x="1362456" y="4681728"/>
-            <a:ext cx="6675120" cy="274320"/>
+          <p:cNvPr id="13" name="Text 10"/>
+          <p:cNvSpPr txBox="1"/>
+          <p:nvPr/>
+        </p:nvSpPr>
+        <p:spPr>
+          <a:xfrm>
+            <a:off x="1399032" y="4379976"/>
+            <a:ext cx="6601968" cy="274320"/>
           </a:xfrm>
           <a:prstGeom prst="rect">
             <a:avLst/>
@@ -5636,13 +5623,13 @@
             <a:r>
               <a:rPr lang="en-US" sz="1200" dirty="0">
                 <a:solidFill>
-                  <a:srgbClr val="3F4A5C"/>
-                </a:solidFill>
-                <a:latin typeface="Inter" pitchFamily="34" charset="0"/>
-                <a:ea typeface="Inter" pitchFamily="34" charset="-122"/>
-                <a:cs typeface="Inter" pitchFamily="34" charset="-120"/>
-              </a:rPr>
-              <a:t>Gastos individuales</a:t>
+                  <a:srgbClr val="C8D8F0"/>
+                </a:solidFill>
+                <a:latin typeface="Inter" pitchFamily="34" charset="0"/>
+                <a:ea typeface="Inter" pitchFamily="34" charset="-122"/>
+                <a:cs typeface="Inter" pitchFamily="34" charset="-120"/>
+              </a:rPr>
+              <a:t>Consultas individuales</a:t>
             </a:r>
             <a:endParaRPr lang="en-US" sz="1200" dirty="0"/>
           </a:p>
@@ -5650,20 +5637,20 @@
       </p:sp>
       <p:sp>
         <p:nvSpPr>
-          <p:cNvPr id="14" name="Shape 12"/>
+          <p:cNvPr id="14" name="Shape 11"/>
           <p:cNvSpPr/>
           <p:nvPr/>
         </p:nvSpPr>
         <p:spPr>
           <a:xfrm>
-            <a:off x="1124712" y="5074920"/>
+            <a:off x="1161288" y="4773168"/>
             <a:ext cx="91440" cy="91440"/>
           </a:xfrm>
           <a:prstGeom prst="ellipse">
             <a:avLst/>
           </a:prstGeom>
           <a:solidFill>
-            <a:srgbClr val="B45309"/>
+            <a:srgbClr val="E8A25C"/>
           </a:solidFill>
           <a:ln w="12700">
             <a:solidFill>
@@ -5675,14 +5662,14 @@
       </p:sp>
       <p:sp>
         <p:nvSpPr>
-          <p:cNvPr id="15" name="Text 13"/>
-          <p:cNvSpPr txBox="1"/>
-          <p:nvPr/>
-        </p:nvSpPr>
-        <p:spPr>
-          <a:xfrm>
-            <a:off x="1362456" y="4983480"/>
-            <a:ext cx="6675120" cy="274320"/>
+          <p:cNvPr id="15" name="Text 12"/>
+          <p:cNvSpPr txBox="1"/>
+          <p:nvPr/>
+        </p:nvSpPr>
+        <p:spPr>
+          <a:xfrm>
+            <a:off x="1399032" y="4681728"/>
+            <a:ext cx="6601968" cy="274320"/>
           </a:xfrm>
           <a:prstGeom prst="rect">
             <a:avLst/>
@@ -5703,13 +5690,13 @@
             <a:r>
               <a:rPr lang="en-US" sz="1200" dirty="0">
                 <a:solidFill>
-                  <a:srgbClr val="3F4A5C"/>
-                </a:solidFill>
-                <a:latin typeface="Inter" pitchFamily="34" charset="0"/>
-                <a:ea typeface="Inter" pitchFamily="34" charset="-122"/>
-                <a:cs typeface="Inter" pitchFamily="34" charset="-120"/>
-              </a:rPr>
-              <a:t>Pólizas personales</a:t>
+                  <a:srgbClr val="C8D8F0"/>
+                </a:solidFill>
+                <a:latin typeface="Inter" pitchFamily="34" charset="0"/>
+                <a:ea typeface="Inter" pitchFamily="34" charset="-122"/>
+                <a:cs typeface="Inter" pitchFamily="34" charset="-120"/>
+              </a:rPr>
+              <a:t>Gastos individuales</a:t>
             </a:r>
             <a:endParaRPr lang="en-US" sz="1200" dirty="0"/>
           </a:p>
@@ -5717,20 +5704,20 @@
       </p:sp>
       <p:sp>
         <p:nvSpPr>
-          <p:cNvPr id="16" name="Shape 14"/>
+          <p:cNvPr id="16" name="Shape 13"/>
           <p:cNvSpPr/>
           <p:nvPr/>
         </p:nvSpPr>
         <p:spPr>
           <a:xfrm>
-            <a:off x="1124712" y="5376672"/>
+            <a:off x="1161288" y="5074920"/>
             <a:ext cx="91440" cy="91440"/>
           </a:xfrm>
           <a:prstGeom prst="ellipse">
             <a:avLst/>
           </a:prstGeom>
           <a:solidFill>
-            <a:srgbClr val="B45309"/>
+            <a:srgbClr val="E8A25C"/>
           </a:solidFill>
           <a:ln w="12700">
             <a:solidFill>
@@ -5742,14 +5729,14 @@
       </p:sp>
       <p:sp>
         <p:nvSpPr>
-          <p:cNvPr id="17" name="Text 15"/>
-          <p:cNvSpPr txBox="1"/>
-          <p:nvPr/>
-        </p:nvSpPr>
-        <p:spPr>
-          <a:xfrm>
-            <a:off x="1362456" y="5285232"/>
-            <a:ext cx="6675120" cy="274320"/>
+          <p:cNvPr id="17" name="Text 14"/>
+          <p:cNvSpPr txBox="1"/>
+          <p:nvPr/>
+        </p:nvSpPr>
+        <p:spPr>
+          <a:xfrm>
+            <a:off x="1399032" y="4983480"/>
+            <a:ext cx="6601968" cy="274320"/>
           </a:xfrm>
           <a:prstGeom prst="rect">
             <a:avLst/>
@@ -5770,13 +5757,13 @@
             <a:r>
               <a:rPr lang="en-US" sz="1200" dirty="0">
                 <a:solidFill>
-                  <a:srgbClr val="3F4A5C"/>
-                </a:solidFill>
-                <a:latin typeface="Inter" pitchFamily="34" charset="0"/>
-                <a:ea typeface="Inter" pitchFamily="34" charset="-122"/>
-                <a:cs typeface="Inter" pitchFamily="34" charset="-120"/>
-              </a:rPr>
-              <a:t>Reembolsos individuales</a:t>
+                  <a:srgbClr val="C8D8F0"/>
+                </a:solidFill>
+                <a:latin typeface="Inter" pitchFamily="34" charset="0"/>
+                <a:ea typeface="Inter" pitchFamily="34" charset="-122"/>
+                <a:cs typeface="Inter" pitchFamily="34" charset="-120"/>
+              </a:rPr>
+              <a:t>Pólizas personales</a:t>
             </a:r>
             <a:endParaRPr lang="en-US" sz="1200" dirty="0"/>
           </a:p>
@@ -5784,89 +5771,20 @@
       </p:sp>
       <p:sp>
         <p:nvSpPr>
-          <p:cNvPr id="18" name="Shape 16"/>
+          <p:cNvPr id="18" name="Shape 15"/>
           <p:cNvSpPr/>
           <p:nvPr/>
         </p:nvSpPr>
         <p:spPr>
           <a:xfrm>
-            <a:off x="777240" y="5897880"/>
-            <a:ext cx="7589520" cy="2331720"/>
-          </a:xfrm>
-          <a:prstGeom prst="roundRect">
-            <a:avLst>
-              <a:gd name="adj" fmla="val 5490"/>
-            </a:avLst>
+            <a:off x="1161288" y="5376672"/>
+            <a:ext cx="91440" cy="91440"/>
+          </a:xfrm>
+          <a:prstGeom prst="ellipse">
+            <a:avLst/>
           </a:prstGeom>
           <a:solidFill>
-            <a:srgbClr val="F7F8FA"/>
-          </a:solidFill>
-          <a:ln w="12700">
-            <a:solidFill>
-              <a:srgbClr val="E6E9EF"/>
-            </a:solidFill>
-            <a:prstDash val="solid"/>
-          </a:ln>
-        </p:spPr>
-      </p:sp>
-      <p:sp>
-        <p:nvSpPr>
-          <p:cNvPr id="19" name="Text 17"/>
-          <p:cNvSpPr txBox="1"/>
-          <p:nvPr/>
-        </p:nvSpPr>
-        <p:spPr>
-          <a:xfrm>
-            <a:off x="1106424" y="6163056"/>
-            <a:ext cx="6931152" cy="237744"/>
-          </a:xfrm>
-          <a:prstGeom prst="rect">
-            <a:avLst/>
-          </a:prstGeom>
-          <a:noFill/>
-          <a:ln/>
-        </p:spPr>
-        <p:txBody>
-          <a:bodyPr wrap="square" lIns="0" tIns="0" rIns="0" bIns="0" rtlCol="0" anchor="t"/>
-          <a:lstStyle/>
-          <a:p>
-            <a:pPr algn="l" indent="0" marL="0">
-              <a:lnSpc>
-                <a:spcPct val="120000"/>
-              </a:lnSpc>
-              <a:buNone/>
-            </a:pPr>
-            <a:r>
-              <a:rPr lang="en-US" sz="1000" b="1" spc="200" kern="0" dirty="0">
-                <a:solidFill>
-                  <a:srgbClr val="16A34A"/>
-                </a:solidFill>
-                <a:latin typeface="Inter" pitchFamily="34" charset="0"/>
-                <a:ea typeface="Inter" pitchFamily="34" charset="-122"/>
-                <a:cs typeface="Inter" pitchFamily="34" charset="-120"/>
-              </a:rPr>
-              <a:t>LA EMPRESA PODRÍA RECIBIR</a:t>
-            </a:r>
-            <a:endParaRPr lang="en-US" sz="1000" dirty="0"/>
-          </a:p>
-        </p:txBody>
-      </p:sp>
-      <p:sp>
-        <p:nvSpPr>
-          <p:cNvPr id="20" name="Shape 18"/>
-          <p:cNvSpPr/>
-          <p:nvPr/>
-        </p:nvSpPr>
-        <p:spPr>
-          <a:xfrm>
-            <a:off x="1124712" y="6748272"/>
-            <a:ext cx="91440" cy="91440"/>
-          </a:xfrm>
-          <a:prstGeom prst="ellipse">
-            <a:avLst/>
-          </a:prstGeom>
-          <a:solidFill>
-            <a:srgbClr val="16A34A"/>
+            <a:srgbClr val="E8A25C"/>
           </a:solidFill>
           <a:ln w="12700">
             <a:solidFill>
@@ -5878,14 +5796,14 @@
       </p:sp>
       <p:sp>
         <p:nvSpPr>
-          <p:cNvPr id="21" name="Text 19"/>
-          <p:cNvSpPr txBox="1"/>
-          <p:nvPr/>
-        </p:nvSpPr>
-        <p:spPr>
-          <a:xfrm>
-            <a:off x="1362456" y="6656832"/>
-            <a:ext cx="6675120" cy="274320"/>
+          <p:cNvPr id="19" name="Text 16"/>
+          <p:cNvSpPr txBox="1"/>
+          <p:nvPr/>
+        </p:nvSpPr>
+        <p:spPr>
+          <a:xfrm>
+            <a:off x="1399032" y="5285232"/>
+            <a:ext cx="6601968" cy="274320"/>
           </a:xfrm>
           <a:prstGeom prst="rect">
             <a:avLst/>
@@ -5906,13 +5824,13 @@
             <a:r>
               <a:rPr lang="en-US" sz="1200" dirty="0">
                 <a:solidFill>
-                  <a:srgbClr val="3F4A5C"/>
-                </a:solidFill>
-                <a:latin typeface="Inter" pitchFamily="34" charset="0"/>
-                <a:ea typeface="Inter" pitchFamily="34" charset="-122"/>
-                <a:cs typeface="Inter" pitchFamily="34" charset="-120"/>
-              </a:rPr>
-              <a:t>Activación</a:t>
+                  <a:srgbClr val="C8D8F0"/>
+                </a:solidFill>
+                <a:latin typeface="Inter" pitchFamily="34" charset="0"/>
+                <a:ea typeface="Inter" pitchFamily="34" charset="-122"/>
+                <a:cs typeface="Inter" pitchFamily="34" charset="-120"/>
+              </a:rPr>
+              <a:t>Reembolsos individuales</a:t>
             </a:r>
             <a:endParaRPr lang="en-US" sz="1200" dirty="0"/>
           </a:p>
@@ -5920,20 +5838,93 @@
       </p:sp>
       <p:sp>
         <p:nvSpPr>
-          <p:cNvPr id="22" name="Shape 20"/>
+          <p:cNvPr id="20" name="Shape 17"/>
           <p:cNvSpPr/>
           <p:nvPr/>
         </p:nvSpPr>
         <p:spPr>
           <a:xfrm>
-            <a:off x="1124712" y="7050024"/>
+            <a:off x="777240" y="5897880"/>
+            <a:ext cx="7589520" cy="2331720"/>
+          </a:xfrm>
+          <a:prstGeom prst="roundRect">
+            <a:avLst>
+              <a:gd name="adj" fmla="val 6275"/>
+            </a:avLst>
+          </a:prstGeom>
+          <a:solidFill>
+            <a:srgbClr val="FFFFFF">
+              <a:alpha val="18000"/>
+            </a:srgbClr>
+          </a:solidFill>
+          <a:ln w="12700">
+            <a:solidFill>
+              <a:srgbClr val="FFFFFF">
+                <a:alpha val="36000"/>
+              </a:srgbClr>
+            </a:solidFill>
+            <a:prstDash val="solid"/>
+          </a:ln>
+        </p:spPr>
+      </p:sp>
+      <p:sp>
+        <p:nvSpPr>
+          <p:cNvPr id="21" name="Text 18"/>
+          <p:cNvSpPr txBox="1"/>
+          <p:nvPr/>
+        </p:nvSpPr>
+        <p:spPr>
+          <a:xfrm>
+            <a:off x="1143000" y="6163056"/>
+            <a:ext cx="6858000" cy="237744"/>
+          </a:xfrm>
+          <a:prstGeom prst="rect">
+            <a:avLst/>
+          </a:prstGeom>
+          <a:noFill/>
+          <a:ln/>
+        </p:spPr>
+        <p:txBody>
+          <a:bodyPr wrap="square" lIns="0" tIns="0" rIns="0" bIns="0" rtlCol="0" anchor="t"/>
+          <a:lstStyle/>
+          <a:p>
+            <a:pPr algn="l" indent="0" marL="0">
+              <a:lnSpc>
+                <a:spcPct val="120000"/>
+              </a:lnSpc>
+              <a:buNone/>
+            </a:pPr>
+            <a:r>
+              <a:rPr lang="en-US" sz="1000" b="1" spc="100" kern="0" dirty="0">
+                <a:solidFill>
+                  <a:srgbClr val="4FD07E"/>
+                </a:solidFill>
+                <a:latin typeface="Inter" pitchFamily="34" charset="0"/>
+                <a:ea typeface="Inter" pitchFamily="34" charset="-122"/>
+                <a:cs typeface="Inter" pitchFamily="34" charset="-120"/>
+              </a:rPr>
+              <a:t>LA EMPRESA PODRÍA RECIBIR</a:t>
+            </a:r>
+            <a:endParaRPr lang="en-US" sz="1000" dirty="0"/>
+          </a:p>
+        </p:txBody>
+      </p:sp>
+      <p:sp>
+        <p:nvSpPr>
+          <p:cNvPr id="22" name="Shape 19"/>
+          <p:cNvSpPr/>
+          <p:nvPr/>
+        </p:nvSpPr>
+        <p:spPr>
+          <a:xfrm>
+            <a:off x="1161288" y="6748272"/>
             <a:ext cx="91440" cy="91440"/>
           </a:xfrm>
           <a:prstGeom prst="ellipse">
             <a:avLst/>
           </a:prstGeom>
           <a:solidFill>
-            <a:srgbClr val="16A34A"/>
+            <a:srgbClr val="4FD07E"/>
           </a:solidFill>
           <a:ln w="12700">
             <a:solidFill>
@@ -5945,14 +5936,14 @@
       </p:sp>
       <p:sp>
         <p:nvSpPr>
-          <p:cNvPr id="23" name="Text 21"/>
-          <p:cNvSpPr txBox="1"/>
-          <p:nvPr/>
-        </p:nvSpPr>
-        <p:spPr>
-          <a:xfrm>
-            <a:off x="1362456" y="6958584"/>
-            <a:ext cx="6675120" cy="274320"/>
+          <p:cNvPr id="23" name="Text 20"/>
+          <p:cNvSpPr txBox="1"/>
+          <p:nvPr/>
+        </p:nvSpPr>
+        <p:spPr>
+          <a:xfrm>
+            <a:off x="1399032" y="6656832"/>
+            <a:ext cx="6601968" cy="274320"/>
           </a:xfrm>
           <a:prstGeom prst="rect">
             <a:avLst/>
@@ -5973,13 +5964,13 @@
             <a:r>
               <a:rPr lang="en-US" sz="1200" dirty="0">
                 <a:solidFill>
-                  <a:srgbClr val="3F4A5C"/>
-                </a:solidFill>
-                <a:latin typeface="Inter" pitchFamily="34" charset="0"/>
-                <a:ea typeface="Inter" pitchFamily="34" charset="-122"/>
-                <a:cs typeface="Inter" pitchFamily="34" charset="-120"/>
-              </a:rPr>
-              <a:t>Adopción</a:t>
+                  <a:srgbClr val="C8D8F0"/>
+                </a:solidFill>
+                <a:latin typeface="Inter" pitchFamily="34" charset="0"/>
+                <a:ea typeface="Inter" pitchFamily="34" charset="-122"/>
+                <a:cs typeface="Inter" pitchFamily="34" charset="-120"/>
+              </a:rPr>
+              <a:t>Activación</a:t>
             </a:r>
             <a:endParaRPr lang="en-US" sz="1200" dirty="0"/>
           </a:p>
@@ -5987,20 +5978,20 @@
       </p:sp>
       <p:sp>
         <p:nvSpPr>
-          <p:cNvPr id="24" name="Shape 22"/>
+          <p:cNvPr id="24" name="Shape 21"/>
           <p:cNvSpPr/>
           <p:nvPr/>
         </p:nvSpPr>
         <p:spPr>
           <a:xfrm>
-            <a:off x="1124712" y="7351776"/>
+            <a:off x="1161288" y="7050024"/>
             <a:ext cx="91440" cy="91440"/>
           </a:xfrm>
           <a:prstGeom prst="ellipse">
             <a:avLst/>
           </a:prstGeom>
           <a:solidFill>
-            <a:srgbClr val="16A34A"/>
+            <a:srgbClr val="4FD07E"/>
           </a:solidFill>
           <a:ln w="12700">
             <a:solidFill>
@@ -6012,14 +6003,14 @@
       </p:sp>
       <p:sp>
         <p:nvSpPr>
-          <p:cNvPr id="25" name="Text 23"/>
-          <p:cNvSpPr txBox="1"/>
-          <p:nvPr/>
-        </p:nvSpPr>
-        <p:spPr>
-          <a:xfrm>
-            <a:off x="1362456" y="7260336"/>
-            <a:ext cx="6675120" cy="274320"/>
+          <p:cNvPr id="25" name="Text 22"/>
+          <p:cNvSpPr txBox="1"/>
+          <p:nvPr/>
+        </p:nvSpPr>
+        <p:spPr>
+          <a:xfrm>
+            <a:off x="1399032" y="6958584"/>
+            <a:ext cx="6601968" cy="274320"/>
           </a:xfrm>
           <a:prstGeom prst="rect">
             <a:avLst/>
@@ -6040,13 +6031,13 @@
             <a:r>
               <a:rPr lang="en-US" sz="1200" dirty="0">
                 <a:solidFill>
-                  <a:srgbClr val="3F4A5C"/>
-                </a:solidFill>
-                <a:latin typeface="Inter" pitchFamily="34" charset="0"/>
-                <a:ea typeface="Inter" pitchFamily="34" charset="-122"/>
-                <a:cs typeface="Inter" pitchFamily="34" charset="-120"/>
-              </a:rPr>
-              <a:t>Utilización agregada</a:t>
+                  <a:srgbClr val="C8D8F0"/>
+                </a:solidFill>
+                <a:latin typeface="Inter" pitchFamily="34" charset="0"/>
+                <a:ea typeface="Inter" pitchFamily="34" charset="-122"/>
+                <a:cs typeface="Inter" pitchFamily="34" charset="-120"/>
+              </a:rPr>
+              <a:t>Adopción</a:t>
             </a:r>
             <a:endParaRPr lang="en-US" sz="1200" dirty="0"/>
           </a:p>
@@ -6054,20 +6045,20 @@
       </p:sp>
       <p:sp>
         <p:nvSpPr>
-          <p:cNvPr id="26" name="Shape 24"/>
+          <p:cNvPr id="26" name="Shape 23"/>
           <p:cNvSpPr/>
           <p:nvPr/>
         </p:nvSpPr>
         <p:spPr>
           <a:xfrm>
-            <a:off x="1124712" y="7653528"/>
+            <a:off x="1161288" y="7351776"/>
             <a:ext cx="91440" cy="91440"/>
           </a:xfrm>
           <a:prstGeom prst="ellipse">
             <a:avLst/>
           </a:prstGeom>
           <a:solidFill>
-            <a:srgbClr val="16A34A"/>
+            <a:srgbClr val="4FD07E"/>
           </a:solidFill>
           <a:ln w="12700">
             <a:solidFill>
@@ -6079,14 +6070,14 @@
       </p:sp>
       <p:sp>
         <p:nvSpPr>
-          <p:cNvPr id="27" name="Text 25"/>
-          <p:cNvSpPr txBox="1"/>
-          <p:nvPr/>
-        </p:nvSpPr>
-        <p:spPr>
-          <a:xfrm>
-            <a:off x="1362456" y="7562088"/>
-            <a:ext cx="6675120" cy="274320"/>
+          <p:cNvPr id="27" name="Text 24"/>
+          <p:cNvSpPr txBox="1"/>
+          <p:nvPr/>
+        </p:nvSpPr>
+        <p:spPr>
+          <a:xfrm>
+            <a:off x="1399032" y="7260336"/>
+            <a:ext cx="6601968" cy="274320"/>
           </a:xfrm>
           <a:prstGeom prst="rect">
             <a:avLst/>
@@ -6107,13 +6098,13 @@
             <a:r>
               <a:rPr lang="en-US" sz="1200" dirty="0">
                 <a:solidFill>
-                  <a:srgbClr val="3F4A5C"/>
-                </a:solidFill>
-                <a:latin typeface="Inter" pitchFamily="34" charset="0"/>
-                <a:ea typeface="Inter" pitchFamily="34" charset="-122"/>
-                <a:cs typeface="Inter" pitchFamily="34" charset="-120"/>
-              </a:rPr>
-              <a:t>Indicadores económicos agregados</a:t>
+                  <a:srgbClr val="C8D8F0"/>
+                </a:solidFill>
+                <a:latin typeface="Inter" pitchFamily="34" charset="0"/>
+                <a:ea typeface="Inter" pitchFamily="34" charset="-122"/>
+                <a:cs typeface="Inter" pitchFamily="34" charset="-120"/>
+              </a:rPr>
+              <a:t>Utilización agregada</a:t>
             </a:r>
             <a:endParaRPr lang="en-US" sz="1200" dirty="0"/>
           </a:p>
@@ -6121,20 +6112,20 @@
       </p:sp>
       <p:sp>
         <p:nvSpPr>
-          <p:cNvPr id="28" name="Shape 26"/>
+          <p:cNvPr id="28" name="Shape 25"/>
           <p:cNvSpPr/>
           <p:nvPr/>
         </p:nvSpPr>
         <p:spPr>
           <a:xfrm>
-            <a:off x="1124712" y="7955280"/>
+            <a:off x="1161288" y="7653528"/>
             <a:ext cx="91440" cy="91440"/>
           </a:xfrm>
           <a:prstGeom prst="ellipse">
             <a:avLst/>
           </a:prstGeom>
           <a:solidFill>
-            <a:srgbClr val="16A34A"/>
+            <a:srgbClr val="4FD07E"/>
           </a:solidFill>
           <a:ln w="12700">
             <a:solidFill>
@@ -6146,14 +6137,14 @@
       </p:sp>
       <p:sp>
         <p:nvSpPr>
-          <p:cNvPr id="29" name="Text 27"/>
-          <p:cNvSpPr txBox="1"/>
-          <p:nvPr/>
-        </p:nvSpPr>
-        <p:spPr>
-          <a:xfrm>
-            <a:off x="1362456" y="7863840"/>
-            <a:ext cx="6675120" cy="274320"/>
+          <p:cNvPr id="29" name="Text 26"/>
+          <p:cNvSpPr txBox="1"/>
+          <p:nvPr/>
+        </p:nvSpPr>
+        <p:spPr>
+          <a:xfrm>
+            <a:off x="1399032" y="7562088"/>
+            <a:ext cx="6601968" cy="274320"/>
           </a:xfrm>
           <a:prstGeom prst="rect">
             <a:avLst/>
@@ -6174,13 +6165,13 @@
             <a:r>
               <a:rPr lang="en-US" sz="1200" dirty="0">
                 <a:solidFill>
-                  <a:srgbClr val="3F4A5C"/>
-                </a:solidFill>
-                <a:latin typeface="Inter" pitchFamily="34" charset="0"/>
-                <a:ea typeface="Inter" pitchFamily="34" charset="-122"/>
-                <a:cs typeface="Inter" pitchFamily="34" charset="-120"/>
-              </a:rPr>
-              <a:t>Información anonimizada o suprimida conforme al diseño definitivo</a:t>
+                  <a:srgbClr val="C8D8F0"/>
+                </a:solidFill>
+                <a:latin typeface="Inter" pitchFamily="34" charset="0"/>
+                <a:ea typeface="Inter" pitchFamily="34" charset="-122"/>
+                <a:cs typeface="Inter" pitchFamily="34" charset="-120"/>
+              </a:rPr>
+              <a:t>Indicadores económicos agregados</a:t>
             </a:r>
             <a:endParaRPr lang="en-US" sz="1200" dirty="0"/>
           </a:p>
@@ -6188,110 +6179,24 @@
       </p:sp>
       <p:sp>
         <p:nvSpPr>
-          <p:cNvPr id="30" name="Text 28"/>
-          <p:cNvSpPr txBox="1"/>
-          <p:nvPr/>
-        </p:nvSpPr>
-        <p:spPr>
-          <a:xfrm>
-            <a:off x="777240" y="8641080"/>
-            <a:ext cx="4572000" cy="274320"/>
-          </a:xfrm>
-          <a:prstGeom prst="rect">
-            <a:avLst/>
-          </a:prstGeom>
-          <a:noFill/>
-          <a:ln/>
-        </p:spPr>
-        <p:txBody>
-          <a:bodyPr wrap="square" lIns="0" tIns="0" rIns="0" bIns="0" rtlCol="0" anchor="t"/>
-          <a:lstStyle/>
-          <a:p>
-            <a:pPr algn="l" indent="0" marL="0">
-              <a:lnSpc>
-                <a:spcPct val="120000"/>
-              </a:lnSpc>
-              <a:buNone/>
-            </a:pPr>
-            <a:r>
-              <a:rPr lang="en-US" sz="1500" b="1" dirty="0">
-                <a:solidFill>
-                  <a:srgbClr val="0F172A"/>
-                </a:solidFill>
-                <a:latin typeface="Inter" pitchFamily="34" charset="0"/>
-                <a:ea typeface="Inter" pitchFamily="34" charset="-122"/>
-                <a:cs typeface="Inter" pitchFamily="34" charset="-120"/>
-              </a:rPr>
-              <a:t>El mismo registro, dos miradas</a:t>
-            </a:r>
-            <a:endParaRPr lang="en-US" sz="1500" dirty="0"/>
-          </a:p>
-        </p:txBody>
-      </p:sp>
-      <p:sp>
-        <p:nvSpPr>
-          <p:cNvPr id="31" name="Text 29"/>
-          <p:cNvSpPr txBox="1"/>
-          <p:nvPr/>
-        </p:nvSpPr>
-        <p:spPr>
-          <a:xfrm>
-            <a:off x="4434840" y="8677656"/>
-            <a:ext cx="3931920" cy="256032"/>
-          </a:xfrm>
-          <a:prstGeom prst="rect">
-            <a:avLst/>
-          </a:prstGeom>
-          <a:noFill/>
-          <a:ln/>
-        </p:spPr>
-        <p:txBody>
-          <a:bodyPr wrap="square" lIns="0" tIns="0" rIns="0" bIns="0" rtlCol="0" anchor="t"/>
-          <a:lstStyle/>
-          <a:p>
-            <a:pPr algn="r" indent="0" marL="0">
-              <a:lnSpc>
-                <a:spcPct val="120000"/>
-              </a:lnSpc>
-              <a:buNone/>
-            </a:pPr>
-            <a:r>
-              <a:rPr lang="en-US" sz="1100" dirty="0">
-                <a:solidFill>
-                  <a:srgbClr val="6B7686"/>
-                </a:solidFill>
-                <a:latin typeface="Inter" pitchFamily="34" charset="0"/>
-                <a:ea typeface="Inter" pitchFamily="34" charset="-122"/>
-                <a:cs typeface="Inter" pitchFamily="34" charset="-120"/>
-              </a:rPr>
-              <a:t>Atención completamente simulada</a:t>
-            </a:r>
-            <a:endParaRPr lang="en-US" sz="1100" dirty="0"/>
-          </a:p>
-        </p:txBody>
-      </p:sp>
-      <p:sp>
-        <p:nvSpPr>
-          <p:cNvPr id="32" name="Shape 30"/>
+          <p:cNvPr id="30" name="Shape 27"/>
           <p:cNvSpPr/>
           <p:nvPr/>
         </p:nvSpPr>
         <p:spPr>
           <a:xfrm>
-            <a:off x="777240" y="9144000"/>
-            <a:ext cx="3657600" cy="1600200"/>
-          </a:xfrm>
-          <a:prstGeom prst="roundRect">
-            <a:avLst>
-              <a:gd name="adj" fmla="val 8000"/>
-            </a:avLst>
+            <a:off x="1161288" y="7955280"/>
+            <a:ext cx="91440" cy="91440"/>
+          </a:xfrm>
+          <a:prstGeom prst="ellipse">
+            <a:avLst/>
           </a:prstGeom>
           <a:solidFill>
-            <a:srgbClr val="FFFFFF"/>
+            <a:srgbClr val="4FD07E"/>
           </a:solidFill>
           <a:ln w="12700">
             <a:solidFill>
-              <a:srgbClr val="E6E9EF"/>
+              <a:srgbClr val="333333"/>
             </a:solidFill>
             <a:prstDash val="solid"/>
           </a:ln>
@@ -6299,14 +6204,14 @@
       </p:sp>
       <p:sp>
         <p:nvSpPr>
-          <p:cNvPr id="33" name="Text 31"/>
-          <p:cNvSpPr txBox="1"/>
-          <p:nvPr/>
-        </p:nvSpPr>
-        <p:spPr>
-          <a:xfrm>
-            <a:off x="1033272" y="9381744"/>
-            <a:ext cx="3145536" cy="219456"/>
+          <p:cNvPr id="31" name="Text 28"/>
+          <p:cNvSpPr txBox="1"/>
+          <p:nvPr/>
+        </p:nvSpPr>
+        <p:spPr>
+          <a:xfrm>
+            <a:off x="1399032" y="7863840"/>
+            <a:ext cx="6601968" cy="274320"/>
           </a:xfrm>
           <a:prstGeom prst="rect">
             <a:avLst/>
@@ -6325,30 +6230,30 @@
               <a:buNone/>
             </a:pPr>
             <a:r>
-              <a:rPr lang="en-US" sz="950" b="1" spc="160" kern="0" dirty="0">
-                <a:solidFill>
-                  <a:srgbClr val="2C3E5D"/>
-                </a:solidFill>
-                <a:latin typeface="Inter" pitchFamily="34" charset="0"/>
-                <a:ea typeface="Inter" pitchFamily="34" charset="-122"/>
-                <a:cs typeface="Inter" pitchFamily="34" charset="-120"/>
-              </a:rPr>
-              <a:t>COLABORADOR</a:t>
-            </a:r>
-            <a:endParaRPr lang="en-US" sz="950" dirty="0"/>
-          </a:p>
-        </p:txBody>
-      </p:sp>
-      <p:sp>
-        <p:nvSpPr>
-          <p:cNvPr id="34" name="Text 32"/>
-          <p:cNvSpPr txBox="1"/>
-          <p:nvPr/>
-        </p:nvSpPr>
-        <p:spPr>
-          <a:xfrm>
-            <a:off x="1033272" y="9784080"/>
-            <a:ext cx="1280160" cy="219456"/>
+              <a:rPr lang="en-US" sz="1200" dirty="0">
+                <a:solidFill>
+                  <a:srgbClr val="C8D8F0"/>
+                </a:solidFill>
+                <a:latin typeface="Inter" pitchFamily="34" charset="0"/>
+                <a:ea typeface="Inter" pitchFamily="34" charset="-122"/>
+                <a:cs typeface="Inter" pitchFamily="34" charset="-120"/>
+              </a:rPr>
+              <a:t>Información anonimizada o suprimida conforme al diseño definitivo</a:t>
+            </a:r>
+            <a:endParaRPr lang="en-US" sz="1200" dirty="0"/>
+          </a:p>
+        </p:txBody>
+      </p:sp>
+      <p:sp>
+        <p:nvSpPr>
+          <p:cNvPr id="32" name="Text 29"/>
+          <p:cNvSpPr txBox="1"/>
+          <p:nvPr/>
+        </p:nvSpPr>
+        <p:spPr>
+          <a:xfrm>
+            <a:off x="777240" y="8641080"/>
+            <a:ext cx="4572000" cy="274320"/>
           </a:xfrm>
           <a:prstGeom prst="rect">
             <a:avLst/>
@@ -6367,252 +6272,88 @@
               <a:buNone/>
             </a:pPr>
             <a:r>
-              <a:rPr lang="en-US" sz="1000" dirty="0">
-                <a:solidFill>
-                  <a:srgbClr val="6B7686"/>
-                </a:solidFill>
-                <a:latin typeface="Inter" pitchFamily="34" charset="0"/>
-                <a:ea typeface="Inter" pitchFamily="34" charset="-122"/>
-                <a:cs typeface="Inter" pitchFamily="34" charset="-120"/>
-              </a:rPr>
-              <a:t>Persona</a:t>
-            </a:r>
-            <a:endParaRPr lang="en-US" sz="1000" dirty="0"/>
-          </a:p>
-        </p:txBody>
-      </p:sp>
-      <p:sp>
-        <p:nvSpPr>
-          <p:cNvPr id="35" name="Text 33"/>
-          <p:cNvSpPr txBox="1"/>
-          <p:nvPr/>
-        </p:nvSpPr>
-        <p:spPr>
-          <a:xfrm>
-            <a:off x="2258568" y="9784080"/>
-            <a:ext cx="1920240" cy="219456"/>
-          </a:xfrm>
-          <a:prstGeom prst="rect">
-            <a:avLst/>
-          </a:prstGeom>
-          <a:noFill/>
-          <a:ln/>
-        </p:spPr>
-        <p:txBody>
-          <a:bodyPr wrap="square" lIns="0" tIns="0" rIns="0" bIns="0" rtlCol="0" anchor="t"/>
-          <a:lstStyle/>
-          <a:p>
-            <a:pPr algn="l" indent="0" marL="0">
+              <a:rPr lang="en-US" sz="1500" b="1" spc="-24" kern="0" dirty="0">
+                <a:solidFill>
+                  <a:srgbClr val="FFFFFF"/>
+                </a:solidFill>
+                <a:latin typeface="Inter" pitchFamily="34" charset="0"/>
+                <a:ea typeface="Inter" pitchFamily="34" charset="-122"/>
+                <a:cs typeface="Inter" pitchFamily="34" charset="-120"/>
+              </a:rPr>
+              <a:t>El mismo registro, dos miradas</a:t>
+            </a:r>
+            <a:endParaRPr lang="en-US" sz="1500" dirty="0"/>
+          </a:p>
+        </p:txBody>
+      </p:sp>
+      <p:sp>
+        <p:nvSpPr>
+          <p:cNvPr id="33" name="Text 30"/>
+          <p:cNvSpPr txBox="1"/>
+          <p:nvPr/>
+        </p:nvSpPr>
+        <p:spPr>
+          <a:xfrm>
+            <a:off x="4434840" y="8677656"/>
+            <a:ext cx="3931920" cy="256032"/>
+          </a:xfrm>
+          <a:prstGeom prst="rect">
+            <a:avLst/>
+          </a:prstGeom>
+          <a:noFill/>
+          <a:ln/>
+        </p:spPr>
+        <p:txBody>
+          <a:bodyPr wrap="square" lIns="0" tIns="0" rIns="0" bIns="0" rtlCol="0" anchor="t"/>
+          <a:lstStyle/>
+          <a:p>
+            <a:pPr algn="r" indent="0" marL="0">
               <a:lnSpc>
                 <a:spcPct val="120000"/>
               </a:lnSpc>
               <a:buNone/>
             </a:pPr>
             <a:r>
-              <a:rPr lang="en-US" sz="1000" b="1" dirty="0">
-                <a:solidFill>
-                  <a:srgbClr val="0F172A"/>
-                </a:solidFill>
-                <a:latin typeface="Inter" pitchFamily="34" charset="0"/>
-                <a:ea typeface="Inter" pitchFamily="34" charset="-122"/>
-                <a:cs typeface="Inter" pitchFamily="34" charset="-120"/>
-              </a:rPr>
-              <a:t>Sofía · 9 años</a:t>
-            </a:r>
-            <a:endParaRPr lang="en-US" sz="1000" dirty="0"/>
-          </a:p>
-        </p:txBody>
-      </p:sp>
-      <p:sp>
-        <p:nvSpPr>
-          <p:cNvPr id="36" name="Text 34"/>
-          <p:cNvSpPr txBox="1"/>
-          <p:nvPr/>
-        </p:nvSpPr>
-        <p:spPr>
-          <a:xfrm>
-            <a:off x="1033272" y="10058400"/>
-            <a:ext cx="1280160" cy="219456"/>
-          </a:xfrm>
-          <a:prstGeom prst="rect">
-            <a:avLst/>
-          </a:prstGeom>
-          <a:noFill/>
-          <a:ln/>
-        </p:spPr>
-        <p:txBody>
-          <a:bodyPr wrap="square" lIns="0" tIns="0" rIns="0" bIns="0" rtlCol="0" anchor="t"/>
-          <a:lstStyle/>
-          <a:p>
-            <a:pPr algn="l" indent="0" marL="0">
-              <a:lnSpc>
-                <a:spcPct val="120000"/>
-              </a:lnSpc>
-              <a:buNone/>
-            </a:pPr>
-            <a:r>
-              <a:rPr lang="en-US" sz="1000" dirty="0">
-                <a:solidFill>
-                  <a:srgbClr val="6B7686"/>
-                </a:solidFill>
-                <a:latin typeface="Inter" pitchFamily="34" charset="0"/>
-                <a:ea typeface="Inter" pitchFamily="34" charset="-122"/>
-                <a:cs typeface="Inter" pitchFamily="34" charset="-120"/>
-              </a:rPr>
-              <a:t>Prestación</a:t>
-            </a:r>
-            <a:endParaRPr lang="en-US" sz="1000" dirty="0"/>
-          </a:p>
-        </p:txBody>
-      </p:sp>
-      <p:sp>
-        <p:nvSpPr>
-          <p:cNvPr id="37" name="Text 35"/>
-          <p:cNvSpPr txBox="1"/>
-          <p:nvPr/>
-        </p:nvSpPr>
-        <p:spPr>
-          <a:xfrm>
-            <a:off x="2258568" y="10058400"/>
-            <a:ext cx="1920240" cy="219456"/>
-          </a:xfrm>
-          <a:prstGeom prst="rect">
-            <a:avLst/>
-          </a:prstGeom>
-          <a:noFill/>
-          <a:ln/>
-        </p:spPr>
-        <p:txBody>
-          <a:bodyPr wrap="square" lIns="0" tIns="0" rIns="0" bIns="0" rtlCol="0" anchor="t"/>
-          <a:lstStyle/>
-          <a:p>
-            <a:pPr algn="l" indent="0" marL="0">
-              <a:lnSpc>
-                <a:spcPct val="120000"/>
-              </a:lnSpc>
-              <a:buNone/>
-            </a:pPr>
-            <a:r>
-              <a:rPr lang="en-US" sz="1000" b="1" dirty="0">
-                <a:solidFill>
-                  <a:srgbClr val="0F172A"/>
-                </a:solidFill>
-                <a:latin typeface="Inter" pitchFamily="34" charset="0"/>
-                <a:ea typeface="Inter" pitchFamily="34" charset="-122"/>
-                <a:cs typeface="Inter" pitchFamily="34" charset="-120"/>
-              </a:rPr>
-              <a:t>Resonancia de rodilla</a:t>
-            </a:r>
-            <a:endParaRPr lang="en-US" sz="1000" dirty="0"/>
-          </a:p>
-        </p:txBody>
-      </p:sp>
-      <p:sp>
-        <p:nvSpPr>
-          <p:cNvPr id="38" name="Text 36"/>
-          <p:cNvSpPr txBox="1"/>
-          <p:nvPr/>
-        </p:nvSpPr>
-        <p:spPr>
-          <a:xfrm>
-            <a:off x="1033272" y="10332720"/>
-            <a:ext cx="1280160" cy="219456"/>
-          </a:xfrm>
-          <a:prstGeom prst="rect">
-            <a:avLst/>
-          </a:prstGeom>
-          <a:noFill/>
-          <a:ln/>
-        </p:spPr>
-        <p:txBody>
-          <a:bodyPr wrap="square" lIns="0" tIns="0" rIns="0" bIns="0" rtlCol="0" anchor="t"/>
-          <a:lstStyle/>
-          <a:p>
-            <a:pPr algn="l" indent="0" marL="0">
-              <a:lnSpc>
-                <a:spcPct val="120000"/>
-              </a:lnSpc>
-              <a:buNone/>
-            </a:pPr>
-            <a:r>
-              <a:rPr lang="en-US" sz="1000" dirty="0">
-                <a:solidFill>
-                  <a:srgbClr val="6B7686"/>
-                </a:solidFill>
-                <a:latin typeface="Inter" pitchFamily="34" charset="0"/>
-                <a:ea typeface="Inter" pitchFamily="34" charset="-122"/>
-                <a:cs typeface="Inter" pitchFamily="34" charset="-120"/>
-              </a:rPr>
-              <a:t>Pago estimado</a:t>
-            </a:r>
-            <a:endParaRPr lang="en-US" sz="1000" dirty="0"/>
-          </a:p>
-        </p:txBody>
-      </p:sp>
-      <p:sp>
-        <p:nvSpPr>
-          <p:cNvPr id="39" name="Text 37"/>
-          <p:cNvSpPr txBox="1"/>
-          <p:nvPr/>
-        </p:nvSpPr>
-        <p:spPr>
-          <a:xfrm>
-            <a:off x="2258568" y="10332720"/>
-            <a:ext cx="1920240" cy="219456"/>
-          </a:xfrm>
-          <a:prstGeom prst="rect">
-            <a:avLst/>
-          </a:prstGeom>
-          <a:noFill/>
-          <a:ln/>
-        </p:spPr>
-        <p:txBody>
-          <a:bodyPr wrap="square" lIns="0" tIns="0" rIns="0" bIns="0" rtlCol="0" anchor="t"/>
-          <a:lstStyle/>
-          <a:p>
-            <a:pPr algn="l" indent="0" marL="0">
-              <a:lnSpc>
-                <a:spcPct val="120000"/>
-              </a:lnSpc>
-              <a:buNone/>
-            </a:pPr>
-            <a:r>
-              <a:rPr lang="en-US" sz="1000" b="1" dirty="0">
-                <a:solidFill>
-                  <a:srgbClr val="0F172A"/>
-                </a:solidFill>
-                <a:latin typeface="Inter" pitchFamily="34" charset="0"/>
-                <a:ea typeface="Inter" pitchFamily="34" charset="-122"/>
-                <a:cs typeface="Inter" pitchFamily="34" charset="-120"/>
-              </a:rPr>
-              <a:t>$25.000</a:t>
-            </a:r>
-            <a:endParaRPr lang="en-US" sz="1000" dirty="0"/>
-          </a:p>
-        </p:txBody>
-      </p:sp>
-      <p:sp>
-        <p:nvSpPr>
-          <p:cNvPr id="40" name="Shape 38"/>
+              <a:rPr lang="en-US" sz="1100" dirty="0">
+                <a:solidFill>
+                  <a:srgbClr val="8FA9D0"/>
+                </a:solidFill>
+                <a:latin typeface="Inter" pitchFamily="34" charset="0"/>
+                <a:ea typeface="Inter" pitchFamily="34" charset="-122"/>
+                <a:cs typeface="Inter" pitchFamily="34" charset="-120"/>
+              </a:rPr>
+              <a:t>Atención completamente simulada</a:t>
+            </a:r>
+            <a:endParaRPr lang="en-US" sz="1100" dirty="0"/>
+          </a:p>
+        </p:txBody>
+      </p:sp>
+      <p:sp>
+        <p:nvSpPr>
+          <p:cNvPr id="34" name="Shape 31"/>
           <p:cNvSpPr/>
           <p:nvPr/>
         </p:nvSpPr>
         <p:spPr>
           <a:xfrm>
-            <a:off x="4709160" y="9144000"/>
+            <a:off x="777240" y="9144000"/>
             <a:ext cx="3657600" cy="1600200"/>
           </a:xfrm>
           <a:prstGeom prst="roundRect">
             <a:avLst>
-              <a:gd name="adj" fmla="val 8000"/>
+              <a:gd name="adj" fmla="val 9143"/>
             </a:avLst>
           </a:prstGeom>
           <a:solidFill>
-            <a:srgbClr val="FFFFFF"/>
+            <a:srgbClr val="FFFFFF">
+              <a:alpha val="18000"/>
+            </a:srgbClr>
           </a:solidFill>
           <a:ln w="12700">
             <a:solidFill>
-              <a:srgbClr val="E6E9EF"/>
+              <a:srgbClr val="FFFFFF">
+                <a:alpha val="36000"/>
+              </a:srgbClr>
             </a:solidFill>
             <a:prstDash val="solid"/>
           </a:ln>
@@ -6620,14 +6361,14 @@
       </p:sp>
       <p:sp>
         <p:nvSpPr>
-          <p:cNvPr id="41" name="Text 39"/>
-          <p:cNvSpPr txBox="1"/>
-          <p:nvPr/>
-        </p:nvSpPr>
-        <p:spPr>
-          <a:xfrm>
-            <a:off x="4965192" y="9381744"/>
-            <a:ext cx="3145536" cy="219456"/>
+          <p:cNvPr id="35" name="Text 32"/>
+          <p:cNvSpPr txBox="1"/>
+          <p:nvPr/>
+        </p:nvSpPr>
+        <p:spPr>
+          <a:xfrm>
+            <a:off x="1069848" y="9381744"/>
+            <a:ext cx="3072384" cy="237744"/>
           </a:xfrm>
           <a:prstGeom prst="rect">
             <a:avLst/>
@@ -6646,9 +6387,334 @@
               <a:buNone/>
             </a:pPr>
             <a:r>
-              <a:rPr lang="en-US" sz="950" b="1" spc="160" kern="0" dirty="0">
-                <a:solidFill>
-                  <a:srgbClr val="2C3E5D"/>
+              <a:rPr lang="en-US" sz="950" b="1" spc="95" kern="0" dirty="0">
+                <a:solidFill>
+                  <a:srgbClr val="C8D8F0"/>
+                </a:solidFill>
+                <a:latin typeface="Inter" pitchFamily="34" charset="0"/>
+                <a:ea typeface="Inter" pitchFamily="34" charset="-122"/>
+                <a:cs typeface="Inter" pitchFamily="34" charset="-120"/>
+              </a:rPr>
+              <a:t>COLABORADOR</a:t>
+            </a:r>
+            <a:endParaRPr lang="en-US" sz="950" dirty="0"/>
+          </a:p>
+        </p:txBody>
+      </p:sp>
+      <p:sp>
+        <p:nvSpPr>
+          <p:cNvPr id="36" name="Text 33"/>
+          <p:cNvSpPr txBox="1"/>
+          <p:nvPr/>
+        </p:nvSpPr>
+        <p:spPr>
+          <a:xfrm>
+            <a:off x="1069848" y="9784080"/>
+            <a:ext cx="1280160" cy="219456"/>
+          </a:xfrm>
+          <a:prstGeom prst="rect">
+            <a:avLst/>
+          </a:prstGeom>
+          <a:noFill/>
+          <a:ln/>
+        </p:spPr>
+        <p:txBody>
+          <a:bodyPr wrap="square" lIns="0" tIns="0" rIns="0" bIns="0" rtlCol="0" anchor="t"/>
+          <a:lstStyle/>
+          <a:p>
+            <a:pPr algn="l" indent="0" marL="0">
+              <a:lnSpc>
+                <a:spcPct val="120000"/>
+              </a:lnSpc>
+              <a:buNone/>
+            </a:pPr>
+            <a:r>
+              <a:rPr lang="en-US" sz="1000" dirty="0">
+                <a:solidFill>
+                  <a:srgbClr val="8FA9D0"/>
+                </a:solidFill>
+                <a:latin typeface="Inter" pitchFamily="34" charset="0"/>
+                <a:ea typeface="Inter" pitchFamily="34" charset="-122"/>
+                <a:cs typeface="Inter" pitchFamily="34" charset="-120"/>
+              </a:rPr>
+              <a:t>Persona</a:t>
+            </a:r>
+            <a:endParaRPr lang="en-US" sz="1000" dirty="0"/>
+          </a:p>
+        </p:txBody>
+      </p:sp>
+      <p:sp>
+        <p:nvSpPr>
+          <p:cNvPr id="37" name="Text 34"/>
+          <p:cNvSpPr txBox="1"/>
+          <p:nvPr/>
+        </p:nvSpPr>
+        <p:spPr>
+          <a:xfrm>
+            <a:off x="2295144" y="9784080"/>
+            <a:ext cx="1847088" cy="219456"/>
+          </a:xfrm>
+          <a:prstGeom prst="rect">
+            <a:avLst/>
+          </a:prstGeom>
+          <a:noFill/>
+          <a:ln/>
+        </p:spPr>
+        <p:txBody>
+          <a:bodyPr wrap="square" lIns="0" tIns="0" rIns="0" bIns="0" rtlCol="0" anchor="t"/>
+          <a:lstStyle/>
+          <a:p>
+            <a:pPr algn="l" indent="0" marL="0">
+              <a:lnSpc>
+                <a:spcPct val="120000"/>
+              </a:lnSpc>
+              <a:buNone/>
+            </a:pPr>
+            <a:r>
+              <a:rPr lang="en-US" sz="1000" b="1" dirty="0">
+                <a:solidFill>
+                  <a:srgbClr val="FFFFFF"/>
+                </a:solidFill>
+                <a:latin typeface="Inter" pitchFamily="34" charset="0"/>
+                <a:ea typeface="Inter" pitchFamily="34" charset="-122"/>
+                <a:cs typeface="Inter" pitchFamily="34" charset="-120"/>
+              </a:rPr>
+              <a:t>Sofía · 9 años</a:t>
+            </a:r>
+            <a:endParaRPr lang="en-US" sz="1000" dirty="0"/>
+          </a:p>
+        </p:txBody>
+      </p:sp>
+      <p:sp>
+        <p:nvSpPr>
+          <p:cNvPr id="38" name="Text 35"/>
+          <p:cNvSpPr txBox="1"/>
+          <p:nvPr/>
+        </p:nvSpPr>
+        <p:spPr>
+          <a:xfrm>
+            <a:off x="1069848" y="10058400"/>
+            <a:ext cx="1280160" cy="219456"/>
+          </a:xfrm>
+          <a:prstGeom prst="rect">
+            <a:avLst/>
+          </a:prstGeom>
+          <a:noFill/>
+          <a:ln/>
+        </p:spPr>
+        <p:txBody>
+          <a:bodyPr wrap="square" lIns="0" tIns="0" rIns="0" bIns="0" rtlCol="0" anchor="t"/>
+          <a:lstStyle/>
+          <a:p>
+            <a:pPr algn="l" indent="0" marL="0">
+              <a:lnSpc>
+                <a:spcPct val="120000"/>
+              </a:lnSpc>
+              <a:buNone/>
+            </a:pPr>
+            <a:r>
+              <a:rPr lang="en-US" sz="1000" dirty="0">
+                <a:solidFill>
+                  <a:srgbClr val="8FA9D0"/>
+                </a:solidFill>
+                <a:latin typeface="Inter" pitchFamily="34" charset="0"/>
+                <a:ea typeface="Inter" pitchFamily="34" charset="-122"/>
+                <a:cs typeface="Inter" pitchFamily="34" charset="-120"/>
+              </a:rPr>
+              <a:t>Prestación</a:t>
+            </a:r>
+            <a:endParaRPr lang="en-US" sz="1000" dirty="0"/>
+          </a:p>
+        </p:txBody>
+      </p:sp>
+      <p:sp>
+        <p:nvSpPr>
+          <p:cNvPr id="39" name="Text 36"/>
+          <p:cNvSpPr txBox="1"/>
+          <p:nvPr/>
+        </p:nvSpPr>
+        <p:spPr>
+          <a:xfrm>
+            <a:off x="2295144" y="10058400"/>
+            <a:ext cx="1847088" cy="219456"/>
+          </a:xfrm>
+          <a:prstGeom prst="rect">
+            <a:avLst/>
+          </a:prstGeom>
+          <a:noFill/>
+          <a:ln/>
+        </p:spPr>
+        <p:txBody>
+          <a:bodyPr wrap="square" lIns="0" tIns="0" rIns="0" bIns="0" rtlCol="0" anchor="t"/>
+          <a:lstStyle/>
+          <a:p>
+            <a:pPr algn="l" indent="0" marL="0">
+              <a:lnSpc>
+                <a:spcPct val="120000"/>
+              </a:lnSpc>
+              <a:buNone/>
+            </a:pPr>
+            <a:r>
+              <a:rPr lang="en-US" sz="1000" b="1" dirty="0">
+                <a:solidFill>
+                  <a:srgbClr val="FFFFFF"/>
+                </a:solidFill>
+                <a:latin typeface="Inter" pitchFamily="34" charset="0"/>
+                <a:ea typeface="Inter" pitchFamily="34" charset="-122"/>
+                <a:cs typeface="Inter" pitchFamily="34" charset="-120"/>
+              </a:rPr>
+              <a:t>Resonancia de rodilla</a:t>
+            </a:r>
+            <a:endParaRPr lang="en-US" sz="1000" dirty="0"/>
+          </a:p>
+        </p:txBody>
+      </p:sp>
+      <p:sp>
+        <p:nvSpPr>
+          <p:cNvPr id="40" name="Text 37"/>
+          <p:cNvSpPr txBox="1"/>
+          <p:nvPr/>
+        </p:nvSpPr>
+        <p:spPr>
+          <a:xfrm>
+            <a:off x="1069848" y="10332720"/>
+            <a:ext cx="1280160" cy="219456"/>
+          </a:xfrm>
+          <a:prstGeom prst="rect">
+            <a:avLst/>
+          </a:prstGeom>
+          <a:noFill/>
+          <a:ln/>
+        </p:spPr>
+        <p:txBody>
+          <a:bodyPr wrap="square" lIns="0" tIns="0" rIns="0" bIns="0" rtlCol="0" anchor="t"/>
+          <a:lstStyle/>
+          <a:p>
+            <a:pPr algn="l" indent="0" marL="0">
+              <a:lnSpc>
+                <a:spcPct val="120000"/>
+              </a:lnSpc>
+              <a:buNone/>
+            </a:pPr>
+            <a:r>
+              <a:rPr lang="en-US" sz="1000" dirty="0">
+                <a:solidFill>
+                  <a:srgbClr val="8FA9D0"/>
+                </a:solidFill>
+                <a:latin typeface="Inter" pitchFamily="34" charset="0"/>
+                <a:ea typeface="Inter" pitchFamily="34" charset="-122"/>
+                <a:cs typeface="Inter" pitchFamily="34" charset="-120"/>
+              </a:rPr>
+              <a:t>Pago estimado</a:t>
+            </a:r>
+            <a:endParaRPr lang="en-US" sz="1000" dirty="0"/>
+          </a:p>
+        </p:txBody>
+      </p:sp>
+      <p:sp>
+        <p:nvSpPr>
+          <p:cNvPr id="41" name="Text 38"/>
+          <p:cNvSpPr txBox="1"/>
+          <p:nvPr/>
+        </p:nvSpPr>
+        <p:spPr>
+          <a:xfrm>
+            <a:off x="2295144" y="10332720"/>
+            <a:ext cx="1847088" cy="219456"/>
+          </a:xfrm>
+          <a:prstGeom prst="rect">
+            <a:avLst/>
+          </a:prstGeom>
+          <a:noFill/>
+          <a:ln/>
+        </p:spPr>
+        <p:txBody>
+          <a:bodyPr wrap="square" lIns="0" tIns="0" rIns="0" bIns="0" rtlCol="0" anchor="t"/>
+          <a:lstStyle/>
+          <a:p>
+            <a:pPr algn="l" indent="0" marL="0">
+              <a:lnSpc>
+                <a:spcPct val="120000"/>
+              </a:lnSpc>
+              <a:buNone/>
+            </a:pPr>
+            <a:r>
+              <a:rPr lang="en-US" sz="1000" b="1" dirty="0">
+                <a:solidFill>
+                  <a:srgbClr val="FFFFFF"/>
+                </a:solidFill>
+                <a:latin typeface="Inter" pitchFamily="34" charset="0"/>
+                <a:ea typeface="Inter" pitchFamily="34" charset="-122"/>
+                <a:cs typeface="Inter" pitchFamily="34" charset="-120"/>
+              </a:rPr>
+              <a:t>$25.000</a:t>
+            </a:r>
+            <a:endParaRPr lang="en-US" sz="1000" dirty="0"/>
+          </a:p>
+        </p:txBody>
+      </p:sp>
+      <p:sp>
+        <p:nvSpPr>
+          <p:cNvPr id="42" name="Shape 39"/>
+          <p:cNvSpPr/>
+          <p:nvPr/>
+        </p:nvSpPr>
+        <p:spPr>
+          <a:xfrm>
+            <a:off x="4709160" y="9144000"/>
+            <a:ext cx="3657600" cy="1600200"/>
+          </a:xfrm>
+          <a:prstGeom prst="roundRect">
+            <a:avLst>
+              <a:gd name="adj" fmla="val 9143"/>
+            </a:avLst>
+          </a:prstGeom>
+          <a:solidFill>
+            <a:srgbClr val="FFFFFF">
+              <a:alpha val="18000"/>
+            </a:srgbClr>
+          </a:solidFill>
+          <a:ln w="12700">
+            <a:solidFill>
+              <a:srgbClr val="FFFFFF">
+                <a:alpha val="36000"/>
+              </a:srgbClr>
+            </a:solidFill>
+            <a:prstDash val="solid"/>
+          </a:ln>
+        </p:spPr>
+      </p:sp>
+      <p:sp>
+        <p:nvSpPr>
+          <p:cNvPr id="43" name="Text 40"/>
+          <p:cNvSpPr txBox="1"/>
+          <p:nvPr/>
+        </p:nvSpPr>
+        <p:spPr>
+          <a:xfrm>
+            <a:off x="5001768" y="9381744"/>
+            <a:ext cx="3072384" cy="237744"/>
+          </a:xfrm>
+          <a:prstGeom prst="rect">
+            <a:avLst/>
+          </a:prstGeom>
+          <a:noFill/>
+          <a:ln/>
+        </p:spPr>
+        <p:txBody>
+          <a:bodyPr wrap="square" lIns="0" tIns="0" rIns="0" bIns="0" rtlCol="0" anchor="t"/>
+          <a:lstStyle/>
+          <a:p>
+            <a:pPr algn="l" indent="0" marL="0">
+              <a:lnSpc>
+                <a:spcPct val="120000"/>
+              </a:lnSpc>
+              <a:buNone/>
+            </a:pPr>
+            <a:r>
+              <a:rPr lang="en-US" sz="950" b="1" spc="95" kern="0" dirty="0">
+                <a:solidFill>
+                  <a:srgbClr val="C8D8F0"/>
                 </a:solidFill>
                 <a:latin typeface="Inter" pitchFamily="34" charset="0"/>
                 <a:ea typeface="Inter" pitchFamily="34" charset="-122"/>
@@ -6662,13 +6728,13 @@
       </p:sp>
       <p:sp>
         <p:nvSpPr>
-          <p:cNvPr id="42" name="Text 40"/>
-          <p:cNvSpPr txBox="1"/>
-          <p:nvPr/>
-        </p:nvSpPr>
-        <p:spPr>
-          <a:xfrm>
-            <a:off x="4965192" y="9784080"/>
+          <p:cNvPr id="44" name="Text 41"/>
+          <p:cNvSpPr txBox="1"/>
+          <p:nvPr/>
+        </p:nvSpPr>
+        <p:spPr>
+          <a:xfrm>
+            <a:off x="5001768" y="9784080"/>
             <a:ext cx="1280160" cy="219456"/>
           </a:xfrm>
           <a:prstGeom prst="rect">
@@ -6690,7 +6756,7 @@
             <a:r>
               <a:rPr lang="en-US" sz="1000" dirty="0">
                 <a:solidFill>
-                  <a:srgbClr val="6B7686"/>
+                  <a:srgbClr val="8FA9D0"/>
                 </a:solidFill>
                 <a:latin typeface="Inter" pitchFamily="34" charset="0"/>
                 <a:ea typeface="Inter" pitchFamily="34" charset="-122"/>
@@ -6704,14 +6770,14 @@
       </p:sp>
       <p:sp>
         <p:nvSpPr>
-          <p:cNvPr id="43" name="Text 41"/>
-          <p:cNvSpPr txBox="1"/>
-          <p:nvPr/>
-        </p:nvSpPr>
-        <p:spPr>
-          <a:xfrm>
-            <a:off x="6190488" y="9784080"/>
-            <a:ext cx="1920240" cy="274320"/>
+          <p:cNvPr id="45" name="Text 42"/>
+          <p:cNvSpPr txBox="1"/>
+          <p:nvPr/>
+        </p:nvSpPr>
+        <p:spPr>
+          <a:xfrm>
+            <a:off x="6227064" y="9784080"/>
+            <a:ext cx="1847088" cy="274320"/>
           </a:xfrm>
           <a:prstGeom prst="rect">
             <a:avLst/>
@@ -6732,7 +6798,7 @@
             <a:r>
               <a:rPr lang="en-US" sz="1000" dirty="0">
                 <a:solidFill>
-                  <a:srgbClr val="6B7686"/>
+                  <a:srgbClr val="8FA9D0"/>
                 </a:solidFill>
                 <a:latin typeface="Inter" pitchFamily="34" charset="0"/>
                 <a:ea typeface="Inter" pitchFamily="34" charset="-122"/>
@@ -6746,13 +6812,13 @@
       </p:sp>
       <p:sp>
         <p:nvSpPr>
-          <p:cNvPr id="44" name="Text 42"/>
-          <p:cNvSpPr txBox="1"/>
-          <p:nvPr/>
-        </p:nvSpPr>
-        <p:spPr>
-          <a:xfrm>
-            <a:off x="4965192" y="10058400"/>
+          <p:cNvPr id="46" name="Text 43"/>
+          <p:cNvSpPr txBox="1"/>
+          <p:nvPr/>
+        </p:nvSpPr>
+        <p:spPr>
+          <a:xfrm>
+            <a:off x="5001768" y="10058400"/>
             <a:ext cx="1280160" cy="219456"/>
           </a:xfrm>
           <a:prstGeom prst="rect">
@@ -6774,7 +6840,7 @@
             <a:r>
               <a:rPr lang="en-US" sz="1000" dirty="0">
                 <a:solidFill>
-                  <a:srgbClr val="6B7686"/>
+                  <a:srgbClr val="8FA9D0"/>
                 </a:solidFill>
                 <a:latin typeface="Inter" pitchFamily="34" charset="0"/>
                 <a:ea typeface="Inter" pitchFamily="34" charset="-122"/>
@@ -6788,14 +6854,14 @@
       </p:sp>
       <p:sp>
         <p:nvSpPr>
-          <p:cNvPr id="45" name="Text 43"/>
-          <p:cNvSpPr txBox="1"/>
-          <p:nvPr/>
-        </p:nvSpPr>
-        <p:spPr>
-          <a:xfrm>
-            <a:off x="6190488" y="10058400"/>
-            <a:ext cx="1920240" cy="274320"/>
+          <p:cNvPr id="47" name="Text 44"/>
+          <p:cNvSpPr txBox="1"/>
+          <p:nvPr/>
+        </p:nvSpPr>
+        <p:spPr>
+          <a:xfrm>
+            <a:off x="6227064" y="10058400"/>
+            <a:ext cx="1847088" cy="274320"/>
           </a:xfrm>
           <a:prstGeom prst="rect">
             <a:avLst/>
@@ -6816,7 +6882,7 @@
             <a:r>
               <a:rPr lang="en-US" sz="1000" dirty="0">
                 <a:solidFill>
-                  <a:srgbClr val="6B7686"/>
+                  <a:srgbClr val="8FA9D0"/>
                 </a:solidFill>
                 <a:latin typeface="Inter" pitchFamily="34" charset="0"/>
                 <a:ea typeface="Inter" pitchFamily="34" charset="-122"/>
@@ -6830,13 +6896,13 @@
       </p:sp>
       <p:sp>
         <p:nvSpPr>
-          <p:cNvPr id="46" name="Text 44"/>
-          <p:cNvSpPr txBox="1"/>
-          <p:nvPr/>
-        </p:nvSpPr>
-        <p:spPr>
-          <a:xfrm>
-            <a:off x="4965192" y="10332720"/>
+          <p:cNvPr id="48" name="Text 45"/>
+          <p:cNvSpPr txBox="1"/>
+          <p:nvPr/>
+        </p:nvSpPr>
+        <p:spPr>
+          <a:xfrm>
+            <a:off x="5001768" y="10332720"/>
             <a:ext cx="1280160" cy="219456"/>
           </a:xfrm>
           <a:prstGeom prst="rect">
@@ -6858,7 +6924,7 @@
             <a:r>
               <a:rPr lang="en-US" sz="1000" dirty="0">
                 <a:solidFill>
-                  <a:srgbClr val="6B7686"/>
+                  <a:srgbClr val="8FA9D0"/>
                 </a:solidFill>
                 <a:latin typeface="Inter" pitchFamily="34" charset="0"/>
                 <a:ea typeface="Inter" pitchFamily="34" charset="-122"/>
@@ -6872,14 +6938,14 @@
       </p:sp>
       <p:sp>
         <p:nvSpPr>
-          <p:cNvPr id="47" name="Text 45"/>
-          <p:cNvSpPr txBox="1"/>
-          <p:nvPr/>
-        </p:nvSpPr>
-        <p:spPr>
-          <a:xfrm>
-            <a:off x="6190488" y="10332720"/>
-            <a:ext cx="1920240" cy="274320"/>
+          <p:cNvPr id="49" name="Text 46"/>
+          <p:cNvSpPr txBox="1"/>
+          <p:nvPr/>
+        </p:nvSpPr>
+        <p:spPr>
+          <a:xfrm>
+            <a:off x="6227064" y="10332720"/>
+            <a:ext cx="1847088" cy="274320"/>
           </a:xfrm>
           <a:prstGeom prst="rect">
             <a:avLst/>
@@ -6900,7 +6966,7 @@
             <a:r>
               <a:rPr lang="en-US" sz="1000" dirty="0">
                 <a:solidFill>
-                  <a:srgbClr val="6B7686"/>
+                  <a:srgbClr val="8FA9D0"/>
                 </a:solidFill>
                 <a:latin typeface="Inter" pitchFamily="34" charset="0"/>
                 <a:ea typeface="Inter" pitchFamily="34" charset="-122"/>
@@ -6914,7 +6980,7 @@
       </p:sp>
       <p:sp>
         <p:nvSpPr>
-          <p:cNvPr id="48" name="Text 46"/>
+          <p:cNvPr id="50" name="Text 47"/>
           <p:cNvSpPr txBox="1"/>
           <p:nvPr/>
         </p:nvSpPr>
@@ -6942,7 +7008,7 @@
             <a:r>
               <a:rPr lang="en-US" sz="1050" dirty="0">
                 <a:solidFill>
-                  <a:srgbClr val="6B7686"/>
+                  <a:srgbClr val="8FA9D0"/>
                 </a:solidFill>
                 <a:latin typeface="Inter" pitchFamily="34" charset="0"/>
                 <a:ea typeface="Inter" pitchFamily="34" charset="-122"/>
@@ -7014,7 +7080,7 @@
               <a:buNone/>
             </a:pPr>
             <a:r>
-              <a:rPr lang="en-US" sz="1050" b="1" spc="240" kern="0" dirty="0">
+              <a:rPr lang="en-US" sz="1050" b="1" spc="105" kern="0" dirty="0">
                 <a:solidFill>
                   <a:srgbClr val="6B7686"/>
                 </a:solidFill>
@@ -7056,7 +7122,7 @@
               <a:buNone/>
             </a:pPr>
             <a:r>
-              <a:rPr lang="en-US" sz="2700" b="1" dirty="0">
+              <a:rPr lang="en-US" sz="2700" b="1" spc="-76" kern="0" dirty="0">
                 <a:solidFill>
                   <a:srgbClr val="0F172A"/>
                 </a:solidFill>
@@ -7150,7 +7216,7 @@
           <a:p>
             <a:pPr algn="l" indent="0" marL="0">
               <a:lnSpc>
-                <a:spcPct val="134000"/>
+                <a:spcPct val="142000"/>
               </a:lnSpc>
               <a:buNone/>
             </a:pPr>
@@ -7533,7 +7599,7 @@
               <a:buNone/>
             </a:pPr>
             <a:r>
-              <a:rPr lang="en-US" sz="1050" b="1" spc="240" kern="0" dirty="0">
+              <a:rPr lang="en-US" sz="1050" b="1" spc="105" kern="0" dirty="0">
                 <a:solidFill>
                   <a:srgbClr val="8FA9D0"/>
                 </a:solidFill>
@@ -7575,7 +7641,7 @@
               <a:buNone/>
             </a:pPr>
             <a:r>
-              <a:rPr lang="en-US" sz="2800" b="1" dirty="0">
+              <a:rPr lang="en-US" sz="2800" b="1" spc="-78" kern="0" dirty="0">
                 <a:solidFill>
                   <a:srgbClr val="FFFFFF"/>
                 </a:solidFill>
@@ -7595,7 +7661,7 @@
               <a:buNone/>
             </a:pPr>
             <a:r>
-              <a:rPr lang="en-US" sz="2800" b="1" dirty="0">
+              <a:rPr lang="en-US" sz="2800" b="1" spc="-78" kern="0" dirty="0">
                 <a:solidFill>
                   <a:srgbClr val="FFFFFF"/>
                 </a:solidFill>
@@ -8343,7 +8409,7 @@
               <a:buNone/>
             </a:pPr>
             <a:r>
-              <a:rPr lang="en-US" sz="1150" b="1" spc="300" kern="0" dirty="0">
+              <a:rPr lang="en-US" sz="1150" b="1" spc="184" kern="0" dirty="0">
                 <a:solidFill>
                   <a:srgbClr val="FFFFFF"/>
                 </a:solidFill>
@@ -8380,12 +8446,12 @@
           <a:p>
             <a:pPr algn="l" indent="0" marL="0">
               <a:lnSpc>
-                <a:spcPct val="116000"/>
-              </a:lnSpc>
-              <a:buNone/>
-            </a:pPr>
-            <a:r>
-              <a:rPr lang="en-US" sz="3000" b="1" dirty="0">
+                <a:spcPct val="114000"/>
+              </a:lnSpc>
+              <a:buNone/>
+            </a:pPr>
+            <a:r>
+              <a:rPr lang="en-US" sz="3000" b="1" spc="-102" kern="0" dirty="0">
                 <a:solidFill>
                   <a:srgbClr val="FFFFFF"/>
                 </a:solidFill>
@@ -8400,12 +8466,12 @@
           <a:p>
             <a:pPr algn="l" indent="0" marL="0">
               <a:lnSpc>
-                <a:spcPct val="116000"/>
-              </a:lnSpc>
-              <a:buNone/>
-            </a:pPr>
-            <a:r>
-              <a:rPr lang="en-US" sz="3000" b="1" dirty="0">
+                <a:spcPct val="114000"/>
+              </a:lnSpc>
+              <a:buNone/>
+            </a:pPr>
+            <a:r>
+              <a:rPr lang="en-US" sz="3000" b="1" spc="-102" kern="0" dirty="0">
                 <a:solidFill>
                   <a:srgbClr val="FFFFFF"/>
                 </a:solidFill>
@@ -8420,12 +8486,12 @@
           <a:p>
             <a:pPr algn="l" indent="0" marL="0">
               <a:lnSpc>
-                <a:spcPct val="116000"/>
-              </a:lnSpc>
-              <a:buNone/>
-            </a:pPr>
-            <a:r>
-              <a:rPr lang="en-US" sz="3000" b="1" dirty="0">
+                <a:spcPct val="114000"/>
+              </a:lnSpc>
+              <a:buNone/>
+            </a:pPr>
+            <a:r>
+              <a:rPr lang="en-US" sz="3000" b="1" spc="-102" kern="0" dirty="0">
                 <a:solidFill>
                   <a:srgbClr val="FFFFFF"/>
                 </a:solidFill>
@@ -8565,7 +8631,7 @@
               <a:buNone/>
             </a:pPr>
             <a:r>
-              <a:rPr lang="en-US" sz="1000" b="1" spc="220" kern="0" dirty="0">
+              <a:rPr lang="en-US" sz="1000" b="1" spc="100" kern="0" dirty="0">
                 <a:solidFill>
                   <a:srgbClr val="8FA9D0"/>
                 </a:solidFill>
@@ -8607,7 +8673,7 @@
               <a:buNone/>
             </a:pPr>
             <a:r>
-              <a:rPr lang="en-US" sz="2000" b="1" dirty="0">
+              <a:rPr lang="en-US" sz="2000" b="1" spc="-48" kern="0" dirty="0">
                 <a:solidFill>
                   <a:srgbClr val="FFFFFF"/>
                 </a:solidFill>
